--- a/trabajo-practico/protocolo/Protocolo_Experimentacion_Por_Nivel.pptx
+++ b/trabajo-practico/protocolo/Protocolo_Experimentacion_Por_Nivel.pptx
@@ -4,21 +4,23 @@
   <p:sldMasterIdLst>
     <p:sldMasterId id="2147483648" r:id="rId1"/>
   </p:sldMasterIdLst>
+  <p:notesMasterIdLst>
+    <p:notesMasterId r:id="rId13"/>
+  </p:notesMasterIdLst>
   <p:sldIdLst>
-    <p:sldId id="256" r:id="rId7"/>
-    <p:sldId id="257" r:id="rId9"/>
-    <p:sldId id="258" r:id="rId10"/>
-    <p:sldId id="259" r:id="rId11"/>
-    <p:sldId id="260" r:id="rId12"/>
-    <p:sldId id="261" r:id="rId13"/>
-    <p:sldId id="262" r:id="rId14"/>
-    <p:sldId id="263" r:id="rId15"/>
-    <p:sldId id="264" r:id="rId16"/>
-    <p:sldId id="265" r:id="rId17"/>
-    <p:sldId id="266" r:id="rId18"/>
-    <p:sldId id="267" r:id="rId19"/>
+    <p:sldId id="256" r:id="rId2"/>
+    <p:sldId id="257" r:id="rId3"/>
+    <p:sldId id="258" r:id="rId4"/>
+    <p:sldId id="259" r:id="rId5"/>
+    <p:sldId id="260" r:id="rId6"/>
+    <p:sldId id="261" r:id="rId7"/>
+    <p:sldId id="262" r:id="rId8"/>
+    <p:sldId id="264" r:id="rId9"/>
+    <p:sldId id="265" r:id="rId10"/>
+    <p:sldId id="266" r:id="rId11"/>
+    <p:sldId id="268" r:id="rId12"/>
   </p:sldIdLst>
-  <p:sldSz cx="12191695" cy="6858000" type="screen4x3"/>
+  <p:sldSz cx="12192000" cy="6858000"/>
   <p:notesSz cx="6858000" cy="9144000"/>
   <p:defaultTextStyle>
     <a:defPPr>
@@ -115,11 +117,27 @@
       </a:defRPr>
     </a:lvl9pPr>
   </p:defaultTextStyle>
+  <p:extLst>
+    <p:ext uri="{EFAFB233-063F-42B5-8137-9DF3F51BA10A}">
+      <p15:sldGuideLst xmlns:p15="http://schemas.microsoft.com/office/powerpoint/2012/main">
+        <p15:guide id="1" orient="horz" pos="2160">
+          <p15:clr>
+            <a:srgbClr val="A4A3A4"/>
+          </p15:clr>
+        </p15:guide>
+        <p15:guide id="2" pos="2880">
+          <p15:clr>
+            <a:srgbClr val="A4A3A4"/>
+          </p15:clr>
+        </p15:guide>
+      </p15:sldGuideLst>
+    </p:ext>
+  </p:extLst>
 </p:presentation>
 </file>
 
 <file path=ppt/notesMasters/notesMaster1.xml><?xml version="1.0" encoding="utf-8"?>
-<p:notesMaster xmlns:a="http://schemas.openxmlformats.org/drawingml/2006/main" xmlns:p="http://schemas.openxmlformats.org/presentationml/2006/main" xmlns:r="http://schemas.openxmlformats.org/officeDocument/2006/relationships">
+<p:notesMaster xmlns:a="http://schemas.openxmlformats.org/drawingml/2006/main" xmlns:r="http://schemas.openxmlformats.org/officeDocument/2006/relationships" xmlns:p="http://schemas.openxmlformats.org/presentationml/2006/main">
   <p:cSld>
     <p:bg>
       <p:bgRef idx="1001">
@@ -140,241 +158,16 @@
           <a:chExt cx="0" cy="0"/>
         </a:xfrm>
       </p:grpSpPr>
-      <p:sp>
-        <p:nvSpPr>
-          <p:cNvPr id="2" name="Header Placeholder 1"/>
-          <p:cNvSpPr>
-            <a:spLocks noGrp="1"/>
-          </p:cNvSpPr>
-          <p:nvPr>
-            <p:ph type="hdr" sz="quarter"/>
-          </p:nvPr>
-        </p:nvSpPr>
-        <p:spPr>
-          <a:xfrm>
-            <a:off x="0" y="0"/>
-            <a:ext cx="2971800" cy="457200"/>
-          </a:xfrm>
-          <a:prstGeom prst="rect">
-            <a:avLst/>
-          </a:prstGeom>
-        </p:spPr>
-        <p:txBody>
-          <a:bodyPr vert="horz" lIns="91440" tIns="45720" rIns="91440" bIns="45720" rtlCol="0"/>
-          <a:lstStyle>
-            <a:lvl1pPr algn="l">
-              <a:defRPr sz="1200"/>
-            </a:lvl1pPr>
-          </a:lstStyle>
-          <a:p>
-            <a:endParaRPr lang="en-US"/>
-          </a:p>
-        </p:txBody>
-      </p:sp>
-      <p:sp>
-        <p:nvSpPr>
-          <p:cNvPr id="3" name="Date Placeholder 2"/>
-          <p:cNvSpPr>
-            <a:spLocks noGrp="1"/>
-          </p:cNvSpPr>
-          <p:nvPr>
-            <p:ph type="dt" idx="1"/>
-          </p:nvPr>
-        </p:nvSpPr>
-        <p:spPr>
-          <a:xfrm>
-            <a:off x="3884613" y="0"/>
-            <a:ext cx="2971800" cy="457200"/>
-          </a:xfrm>
-          <a:prstGeom prst="rect">
-            <a:avLst/>
-          </a:prstGeom>
-        </p:spPr>
-        <p:txBody>
-          <a:bodyPr vert="horz" lIns="91440" tIns="45720" rIns="91440" bIns="45720" rtlCol="0"/>
-          <a:lstStyle>
-            <a:lvl1pPr algn="r">
-              <a:defRPr sz="1200"/>
-            </a:lvl1pPr>
-          </a:lstStyle>
-          <a:p>
-            <a:fld id="{0F89C1C7-3DCD-1040-A9CF-14679D8B5DDD}" type="datetimeFigureOut">
-              <a:rPr lang="en-US" smtClean="0"/>
-              <a:t>10/17/16</a:t>
-            </a:fld>
-            <a:endParaRPr lang="en-US"/>
-          </a:p>
-        </p:txBody>
-      </p:sp>
-      <p:sp>
-        <p:nvSpPr>
-          <p:cNvPr id="4" name="Slide Image Placeholder 3"/>
-          <p:cNvSpPr>
-            <a:spLocks noGrp="1" noRot="1" noChangeAspect="1"/>
-          </p:cNvSpPr>
-          <p:nvPr>
-            <p:ph type="sldImg" idx="2"/>
-          </p:nvPr>
-        </p:nvSpPr>
-        <p:spPr>
-          <a:xfrm>
-            <a:off x="1143000" y="685800"/>
-            <a:ext cx="4572000" cy="3429000"/>
-          </a:xfrm>
-          <a:prstGeom prst="rect">
-            <a:avLst/>
-          </a:prstGeom>
-          <a:noFill/>
-          <a:ln w="12700">
-            <a:solidFill>
-              <a:prstClr val="black"/>
-            </a:solidFill>
-          </a:ln>
-        </p:spPr>
-        <p:txBody>
-          <a:bodyPr vert="horz" lIns="91440" tIns="45720" rIns="91440" bIns="45720" rtlCol="0" anchor="ctr"/>
-          <a:lstStyle/>
-          <a:p>
-            <a:endParaRPr lang="en-US"/>
-          </a:p>
-        </p:txBody>
-      </p:sp>
-      <p:sp>
-        <p:nvSpPr>
-          <p:cNvPr id="5" name="Notes Placeholder 4"/>
-          <p:cNvSpPr>
-            <a:spLocks noGrp="1"/>
-          </p:cNvSpPr>
-          <p:nvPr>
-            <p:ph type="body" sz="quarter" idx="3"/>
-          </p:nvPr>
-        </p:nvSpPr>
-        <p:spPr>
-          <a:xfrm>
-            <a:off x="685800" y="4343400"/>
-            <a:ext cx="5486400" cy="4114800"/>
-          </a:xfrm>
-          <a:prstGeom prst="rect">
-            <a:avLst/>
-          </a:prstGeom>
-        </p:spPr>
-        <p:txBody>
-          <a:bodyPr vert="horz" lIns="91440" tIns="45720" rIns="91440" bIns="45720" rtlCol="0"/>
-          <a:lstStyle/>
-          <a:p>
-            <a:pPr lvl="0"/>
-            <a:r>
-              <a:rPr lang="en-US" smtClean="0"/>
-              <a:t>Click to edit Master text styles</a:t>
-            </a:r>
-          </a:p>
-          <a:p>
-            <a:pPr lvl="1"/>
-            <a:r>
-              <a:rPr lang="en-US" smtClean="0"/>
-              <a:t>Second level</a:t>
-            </a:r>
-          </a:p>
-          <a:p>
-            <a:pPr lvl="2"/>
-            <a:r>
-              <a:rPr lang="en-US" smtClean="0"/>
-              <a:t>Third level</a:t>
-            </a:r>
-          </a:p>
-          <a:p>
-            <a:pPr lvl="3"/>
-            <a:r>
-              <a:rPr lang="en-US" smtClean="0"/>
-              <a:t>Fourth level</a:t>
-            </a:r>
-          </a:p>
-          <a:p>
-            <a:pPr lvl="4"/>
-            <a:r>
-              <a:rPr lang="en-US" smtClean="0"/>
-              <a:t>Fifth level</a:t>
-            </a:r>
-            <a:endParaRPr lang="en-US"/>
-          </a:p>
-        </p:txBody>
-      </p:sp>
-      <p:sp>
-        <p:nvSpPr>
-          <p:cNvPr id="6" name="Footer Placeholder 5"/>
-          <p:cNvSpPr>
-            <a:spLocks noGrp="1"/>
-          </p:cNvSpPr>
-          <p:nvPr>
-            <p:ph type="ftr" sz="quarter" idx="4"/>
-          </p:nvPr>
-        </p:nvSpPr>
-        <p:spPr>
-          <a:xfrm>
-            <a:off x="0" y="8685213"/>
-            <a:ext cx="2971800" cy="457200"/>
-          </a:xfrm>
-          <a:prstGeom prst="rect">
-            <a:avLst/>
-          </a:prstGeom>
-        </p:spPr>
-        <p:txBody>
-          <a:bodyPr vert="horz" lIns="91440" tIns="45720" rIns="91440" bIns="45720" rtlCol="0" anchor="b"/>
-          <a:lstStyle>
-            <a:lvl1pPr algn="l">
-              <a:defRPr sz="1200"/>
-            </a:lvl1pPr>
-          </a:lstStyle>
-          <a:p>
-            <a:endParaRPr lang="en-US"/>
-          </a:p>
-        </p:txBody>
-      </p:sp>
-      <p:sp>
-        <p:nvSpPr>
-          <p:cNvPr id="7" name="Slide Number Placeholder 6"/>
-          <p:cNvSpPr>
-            <a:spLocks noGrp="1"/>
-          </p:cNvSpPr>
-          <p:nvPr>
-            <p:ph type="sldNum" sz="quarter" idx="5"/>
-          </p:nvPr>
-        </p:nvSpPr>
-        <p:spPr>
-          <a:xfrm>
-            <a:off x="3884613" y="8685213"/>
-            <a:ext cx="2971800" cy="457200"/>
-          </a:xfrm>
-          <a:prstGeom prst="rect">
-            <a:avLst/>
-          </a:prstGeom>
-        </p:spPr>
-        <p:txBody>
-          <a:bodyPr vert="horz" lIns="91440" tIns="45720" rIns="91440" bIns="45720" rtlCol="0" anchor="b"/>
-          <a:lstStyle>
-            <a:lvl1pPr algn="r">
-              <a:defRPr sz="1200"/>
-            </a:lvl1pPr>
-          </a:lstStyle>
-          <a:p>
-            <a:fld id="{BB5E49A5-4136-284D-997B-48E1D791AD67}" type="slidenum">
-              <a:rPr lang="en-US" smtClean="0"/>
-              <a:t>‹#›</a:t>
-            </a:fld>
-            <a:endParaRPr lang="en-US"/>
-          </a:p>
-        </p:txBody>
-      </p:sp>
     </p:spTree>
     <p:extLst>
       <p:ext uri="{BB962C8B-B14F-4D97-AF65-F5344CB8AC3E}">
-        <p14:creationId xmlns:p14="http://schemas.microsoft.com/office/powerpoint/2010/main" val="2623252185"/>
+        <p14:creationId xmlns:p14="http://schemas.microsoft.com/office/powerpoint/2010/main" val="3722845916"/>
       </p:ext>
     </p:extLst>
   </p:cSld>
   <p:clrMap bg1="lt1" tx1="dk1" bg2="lt2" tx2="dk2" accent1="accent1" accent2="accent2" accent3="accent3" accent4="accent4" accent5="accent5" accent6="accent6" hlink="hlink" folHlink="folHlink"/>
   <p:notesStyle>
-    <a:lvl1pPr marL="0" algn="l" defTabSz="457200" rtl="0" eaLnBrk="1" latinLnBrk="0" hangingPunct="1">
+    <a:lvl1pPr marL="0" algn="l" defTabSz="914400" rtl="0" eaLnBrk="1" latinLnBrk="0" hangingPunct="1">
       <a:defRPr sz="1200" kern="1200">
         <a:solidFill>
           <a:schemeClr val="tx1"/>
@@ -384,7 +177,7 @@
         <a:cs typeface="+mn-cs"/>
       </a:defRPr>
     </a:lvl1pPr>
-    <a:lvl2pPr marL="457200" algn="l" defTabSz="457200" rtl="0" eaLnBrk="1" latinLnBrk="0" hangingPunct="1">
+    <a:lvl2pPr marL="457200" algn="l" defTabSz="914400" rtl="0" eaLnBrk="1" latinLnBrk="0" hangingPunct="1">
       <a:defRPr sz="1200" kern="1200">
         <a:solidFill>
           <a:schemeClr val="tx1"/>
@@ -394,7 +187,7 @@
         <a:cs typeface="+mn-cs"/>
       </a:defRPr>
     </a:lvl2pPr>
-    <a:lvl3pPr marL="914400" algn="l" defTabSz="457200" rtl="0" eaLnBrk="1" latinLnBrk="0" hangingPunct="1">
+    <a:lvl3pPr marL="914400" algn="l" defTabSz="914400" rtl="0" eaLnBrk="1" latinLnBrk="0" hangingPunct="1">
       <a:defRPr sz="1200" kern="1200">
         <a:solidFill>
           <a:schemeClr val="tx1"/>
@@ -404,7 +197,7 @@
         <a:cs typeface="+mn-cs"/>
       </a:defRPr>
     </a:lvl3pPr>
-    <a:lvl4pPr marL="1371600" algn="l" defTabSz="457200" rtl="0" eaLnBrk="1" latinLnBrk="0" hangingPunct="1">
+    <a:lvl4pPr marL="1371600" algn="l" defTabSz="914400" rtl="0" eaLnBrk="1" latinLnBrk="0" hangingPunct="1">
       <a:defRPr sz="1200" kern="1200">
         <a:solidFill>
           <a:schemeClr val="tx1"/>
@@ -414,7 +207,7 @@
         <a:cs typeface="+mn-cs"/>
       </a:defRPr>
     </a:lvl4pPr>
-    <a:lvl5pPr marL="1828800" algn="l" defTabSz="457200" rtl="0" eaLnBrk="1" latinLnBrk="0" hangingPunct="1">
+    <a:lvl5pPr marL="1828800" algn="l" defTabSz="914400" rtl="0" eaLnBrk="1" latinLnBrk="0" hangingPunct="1">
       <a:defRPr sz="1200" kern="1200">
         <a:solidFill>
           <a:schemeClr val="tx1"/>
@@ -424,7 +217,7 @@
         <a:cs typeface="+mn-cs"/>
       </a:defRPr>
     </a:lvl5pPr>
-    <a:lvl6pPr marL="2286000" algn="l" defTabSz="457200" rtl="0" eaLnBrk="1" latinLnBrk="0" hangingPunct="1">
+    <a:lvl6pPr marL="2286000" algn="l" defTabSz="914400" rtl="0" eaLnBrk="1" latinLnBrk="0" hangingPunct="1">
       <a:defRPr sz="1200" kern="1200">
         <a:solidFill>
           <a:schemeClr val="tx1"/>
@@ -434,7 +227,7 @@
         <a:cs typeface="+mn-cs"/>
       </a:defRPr>
     </a:lvl6pPr>
-    <a:lvl7pPr marL="2743200" algn="l" defTabSz="457200" rtl="0" eaLnBrk="1" latinLnBrk="0" hangingPunct="1">
+    <a:lvl7pPr marL="2743200" algn="l" defTabSz="914400" rtl="0" eaLnBrk="1" latinLnBrk="0" hangingPunct="1">
       <a:defRPr sz="1200" kern="1200">
         <a:solidFill>
           <a:schemeClr val="tx1"/>
@@ -444,7 +237,7 @@
         <a:cs typeface="+mn-cs"/>
       </a:defRPr>
     </a:lvl7pPr>
-    <a:lvl8pPr marL="3200400" algn="l" defTabSz="457200" rtl="0" eaLnBrk="1" latinLnBrk="0" hangingPunct="1">
+    <a:lvl8pPr marL="3200400" algn="l" defTabSz="914400" rtl="0" eaLnBrk="1" latinLnBrk="0" hangingPunct="1">
       <a:defRPr sz="1200" kern="1200">
         <a:solidFill>
           <a:schemeClr val="tx1"/>
@@ -454,7 +247,7 @@
         <a:cs typeface="+mn-cs"/>
       </a:defRPr>
     </a:lvl8pPr>
-    <a:lvl9pPr marL="3657600" algn="l" defTabSz="457200" rtl="0" eaLnBrk="1" latinLnBrk="0" hangingPunct="1">
+    <a:lvl9pPr marL="3657600" algn="l" defTabSz="914400" rtl="0" eaLnBrk="1" latinLnBrk="0" hangingPunct="1">
       <a:defRPr sz="1200" kern="1200">
         <a:solidFill>
           <a:schemeClr val="tx1"/>
@@ -469,7 +262,7 @@
 </file>
 
 <file path=ppt/notesSlides/notesSlide1.xml><?xml version="1.0" encoding="utf-8"?>
-<p:notes xmlns:a="http://schemas.openxmlformats.org/drawingml/2006/main" xmlns:p="http://schemas.openxmlformats.org/presentationml/2006/main" xmlns:r="http://schemas.openxmlformats.org/officeDocument/2006/relationships">
+<p:notes xmlns:a="http://schemas.openxmlformats.org/drawingml/2006/main" xmlns:r="http://schemas.openxmlformats.org/officeDocument/2006/relationships" xmlns:p="http://schemas.openxmlformats.org/presentationml/2006/main">
   <p:cSld>
     <p:spTree>
       <p:nvGrpSpPr>
@@ -489,7 +282,7 @@
         <p:nvSpPr>
           <p:cNvPr id="2" name="Slide Image Placeholder 1"/>
           <p:cNvSpPr>
-            <a:spLocks noGrp="1"/>
+            <a:spLocks noGrp="1" noRot="1" noChangeAspect="1"/>
           </p:cNvSpPr>
           <p:nvPr>
             <p:ph type="sldImg" idx="2"/>
@@ -504,7 +297,7 @@
             <a:spLocks noGrp="1"/>
           </p:cNvSpPr>
           <p:nvPr>
-            <p:ph type="body" idx="3" sz="quarter"/>
+            <p:ph type="body" sz="quarter" idx="3"/>
           </p:nvPr>
         </p:nvSpPr>
         <p:spPr/>
@@ -525,7 +318,7 @@
             <a:spLocks noGrp="1"/>
           </p:cNvSpPr>
           <p:nvPr>
-            <p:ph type="sldNum" idx="5" sz="quarter"/>
+            <p:ph type="sldNum" sz="quarter" idx="5"/>
           </p:nvPr>
         </p:nvSpPr>
         <p:spPr/>
@@ -539,7 +332,7 @@
 </file>
 
 <file path=ppt/notesSlides/notesSlide10.xml><?xml version="1.0" encoding="utf-8"?>
-<p:notes xmlns:a="http://schemas.openxmlformats.org/drawingml/2006/main" xmlns:p="http://schemas.openxmlformats.org/presentationml/2006/main" xmlns:r="http://schemas.openxmlformats.org/officeDocument/2006/relationships">
+<p:notes xmlns:a="http://schemas.openxmlformats.org/drawingml/2006/main" xmlns:r="http://schemas.openxmlformats.org/officeDocument/2006/relationships" xmlns:p="http://schemas.openxmlformats.org/presentationml/2006/main">
   <p:cSld>
     <p:spTree>
       <p:nvGrpSpPr>
@@ -559,7 +352,7 @@
         <p:nvSpPr>
           <p:cNvPr id="2" name="Slide Image Placeholder 1"/>
           <p:cNvSpPr>
-            <a:spLocks noGrp="1"/>
+            <a:spLocks noGrp="1" noRot="1" noChangeAspect="1"/>
           </p:cNvSpPr>
           <p:nvPr>
             <p:ph type="sldImg" idx="2"/>
@@ -574,7 +367,7 @@
             <a:spLocks noGrp="1"/>
           </p:cNvSpPr>
           <p:nvPr>
-            <p:ph type="body" idx="3" sz="quarter"/>
+            <p:ph type="body" sz="quarter" idx="3"/>
           </p:nvPr>
         </p:nvSpPr>
         <p:spPr/>
@@ -595,7 +388,7 @@
             <a:spLocks noGrp="1"/>
           </p:cNvSpPr>
           <p:nvPr>
-            <p:ph type="sldNum" idx="5" sz="quarter"/>
+            <p:ph type="sldNum" sz="quarter" idx="5"/>
           </p:nvPr>
         </p:nvSpPr>
         <p:spPr/>
@@ -609,7 +402,7 @@
 </file>
 
 <file path=ppt/notesSlides/notesSlide11.xml><?xml version="1.0" encoding="utf-8"?>
-<p:notes xmlns:a="http://schemas.openxmlformats.org/drawingml/2006/main" xmlns:p="http://schemas.openxmlformats.org/presentationml/2006/main" xmlns:r="http://schemas.openxmlformats.org/officeDocument/2006/relationships">
+<p:notes xmlns:a="http://schemas.openxmlformats.org/drawingml/2006/main" xmlns:r="http://schemas.openxmlformats.org/officeDocument/2006/relationships" xmlns:p="http://schemas.openxmlformats.org/presentationml/2006/main">
   <p:cSld>
     <p:spTree>
       <p:nvGrpSpPr>
@@ -629,7 +422,7 @@
         <p:nvSpPr>
           <p:cNvPr id="2" name="Slide Image Placeholder 1"/>
           <p:cNvSpPr>
-            <a:spLocks noGrp="1"/>
+            <a:spLocks noGrp="1" noRot="1" noChangeAspect="1"/>
           </p:cNvSpPr>
           <p:nvPr>
             <p:ph type="sldImg" idx="2"/>
@@ -644,7 +437,7 @@
             <a:spLocks noGrp="1"/>
           </p:cNvSpPr>
           <p:nvPr>
-            <p:ph type="body" idx="3" sz="quarter"/>
+            <p:ph type="body" sz="quarter" idx="3"/>
           </p:nvPr>
         </p:nvSpPr>
         <p:spPr/>
@@ -653,7 +446,7 @@
           <a:lstStyle/>
           <a:p>
             <a:r>
-              <a:t>Cerrar con las cuatro decisiones del protocolo.</a:t>
+              <a:t>Referencias en Normas ICONTEC.</a:t>
             </a:r>
           </a:p>
         </p:txBody>
@@ -665,7 +458,7 @@
             <a:spLocks noGrp="1"/>
           </p:cNvSpPr>
           <p:nvPr>
-            <p:ph type="sldNum" idx="5" sz="quarter"/>
+            <p:ph type="sldNum" sz="quarter" idx="5"/>
           </p:nvPr>
         </p:nvSpPr>
         <p:spPr/>
@@ -678,8 +471,8 @@
 </p:notes>
 </file>
 
-<file path=ppt/notesSlides/notesSlide12.xml><?xml version="1.0" encoding="utf-8"?>
-<p:notes xmlns:a="http://schemas.openxmlformats.org/drawingml/2006/main" xmlns:p="http://schemas.openxmlformats.org/presentationml/2006/main" xmlns:r="http://schemas.openxmlformats.org/officeDocument/2006/relationships">
+<file path=ppt/notesSlides/notesSlide2.xml><?xml version="1.0" encoding="utf-8"?>
+<p:notes xmlns:a="http://schemas.openxmlformats.org/drawingml/2006/main" xmlns:r="http://schemas.openxmlformats.org/officeDocument/2006/relationships" xmlns:p="http://schemas.openxmlformats.org/presentationml/2006/main">
   <p:cSld>
     <p:spTree>
       <p:nvGrpSpPr>
@@ -699,7 +492,7 @@
         <p:nvSpPr>
           <p:cNvPr id="2" name="Slide Image Placeholder 1"/>
           <p:cNvSpPr>
-            <a:spLocks noGrp="1"/>
+            <a:spLocks noGrp="1" noRot="1" noChangeAspect="1"/>
           </p:cNvSpPr>
           <p:nvPr>
             <p:ph type="sldImg" idx="2"/>
@@ -714,7 +507,7 @@
             <a:spLocks noGrp="1"/>
           </p:cNvSpPr>
           <p:nvPr>
-            <p:ph type="body" idx="3" sz="quarter"/>
+            <p:ph type="body" sz="quarter" idx="3"/>
           </p:nvPr>
         </p:nvSpPr>
         <p:spPr/>
@@ -723,7 +516,7 @@
           <a:lstStyle/>
           <a:p>
             <a:r>
-              <a:t>Referencias en Normas ICONTEC.</a:t>
+              <a:t>El fabricante midió este láser al entregarlo (hoja de pruebas, tabla 5): ancho de pulso a cada corriente de bombeo. La pregunta es si hoy, nueve años después, sigue dando esos anchos. Es una pregunta por corriente: cada una tiene su valor de referencia y su propia prueba. Se eligieron 5, 6 y 7 A porque son las corrientes altas, con más señal de segundo armónico; 7,23 A supera el máximo del controlador (7,12 A). A 7 A la hoja da 70 fs en la tabla 4 y 54 fs en la tabla 5; se usa la tabla 5 porque mide las tres corrientes con el mismo método, y se declara. El patrón no trae tolerancia ni incertidumbre. Diseño de comparación simple, Montgomery sec. 2-4.6: la media de una muestra frente a un valor conocido, una comparación por corriente.</a:t>
             </a:r>
           </a:p>
         </p:txBody>
@@ -735,7 +528,7 @@
             <a:spLocks noGrp="1"/>
           </p:cNvSpPr>
           <p:nvPr>
-            <p:ph type="sldNum" idx="5" sz="quarter"/>
+            <p:ph type="sldNum" sz="quarter" idx="5"/>
           </p:nvPr>
         </p:nvSpPr>
         <p:spPr/>
@@ -748,8 +541,8 @@
 </p:notes>
 </file>
 
-<file path=ppt/notesSlides/notesSlide2.xml><?xml version="1.0" encoding="utf-8"?>
-<p:notes xmlns:a="http://schemas.openxmlformats.org/drawingml/2006/main" xmlns:p="http://schemas.openxmlformats.org/presentationml/2006/main" xmlns:r="http://schemas.openxmlformats.org/officeDocument/2006/relationships">
+<file path=ppt/notesSlides/notesSlide3.xml><?xml version="1.0" encoding="utf-8"?>
+<p:notes xmlns:a="http://schemas.openxmlformats.org/drawingml/2006/main" xmlns:r="http://schemas.openxmlformats.org/officeDocument/2006/relationships" xmlns:p="http://schemas.openxmlformats.org/presentationml/2006/main">
   <p:cSld>
     <p:spTree>
       <p:nvGrpSpPr>
@@ -769,7 +562,7 @@
         <p:nvSpPr>
           <p:cNvPr id="2" name="Slide Image Placeholder 1"/>
           <p:cNvSpPr>
-            <a:spLocks noGrp="1"/>
+            <a:spLocks noGrp="1" noRot="1" noChangeAspect="1"/>
           </p:cNvSpPr>
           <p:nvPr>
             <p:ph type="sldImg" idx="2"/>
@@ -784,7 +577,7 @@
             <a:spLocks noGrp="1"/>
           </p:cNvSpPr>
           <p:nvPr>
-            <p:ph type="body" idx="3" sz="quarter"/>
+            <p:ph type="body" sz="quarter" idx="3"/>
           </p:nvPr>
         </p:nvSpPr>
         <p:spPr/>
@@ -793,7 +586,7 @@
           <a:lstStyle/>
           <a:p>
             <a:r>
-              <a:t>El fabricante midió este láser al entregarlo (hoja de pruebas, tabla 5): ancho de pulso a cada corriente de bombeo. La pregunta es si hoy, nueve años después, sigue dando esos anchos. Es una pregunta por corriente: cada una tiene su valor de referencia y su propia prueba. Se eligieron 5, 6 y 7 A porque son las corrientes altas, con más señal de segundo armónico; 7,23 A supera el máximo del controlador (7,12 A). A 7 A la hoja da 70 fs en la tabla 4 y 54 fs en la tabla 5; se usa la tabla 5 porque mide las tres corrientes con el mismo método, y se declara. El patrón no trae tolerancia ni incertidumbre. Diseño de comparación simple, Montgomery sec. 2-4.6: la media de una muestra frente a un valor conocido, una comparación por corriente.</a:t>
+              <a:t>Tres muestras independientes, una por corriente; cada observación es la media de su corriente más un error normal; el parámetro de interés es μk − τ0,k. Hipótesis de dos colas porque τ0 es un valor medido de este láser, no un máximo: un pulso más corto también diría que algo cambió. De los nueve casos de la comparación simple es el caso 2: se compara una media, una población frente a un patrón fijo (τ0 no tiene varianza) y σ desconocida, estimada con S. No es el caso 6 (pareadas) porque el patrón no es una segunda medición; ni el 4 o 5 porque no hay dos muestras. Cada H0 se decide con su muestra, su S y su t0.</a:t>
             </a:r>
           </a:p>
         </p:txBody>
@@ -805,7 +598,7 @@
             <a:spLocks noGrp="1"/>
           </p:cNvSpPr>
           <p:nvPr>
-            <p:ph type="sldNum" idx="5" sz="quarter"/>
+            <p:ph type="sldNum" sz="quarter" idx="5"/>
           </p:nvPr>
         </p:nvSpPr>
         <p:spPr/>
@@ -818,8 +611,8 @@
 </p:notes>
 </file>
 
-<file path=ppt/notesSlides/notesSlide3.xml><?xml version="1.0" encoding="utf-8"?>
-<p:notes xmlns:a="http://schemas.openxmlformats.org/drawingml/2006/main" xmlns:p="http://schemas.openxmlformats.org/presentationml/2006/main" xmlns:r="http://schemas.openxmlformats.org/officeDocument/2006/relationships">
+<file path=ppt/notesSlides/notesSlide4.xml><?xml version="1.0" encoding="utf-8"?>
+<p:notes xmlns:a="http://schemas.openxmlformats.org/drawingml/2006/main" xmlns:r="http://schemas.openxmlformats.org/officeDocument/2006/relationships" xmlns:p="http://schemas.openxmlformats.org/presentationml/2006/main">
   <p:cSld>
     <p:spTree>
       <p:nvGrpSpPr>
@@ -839,7 +632,7 @@
         <p:nvSpPr>
           <p:cNvPr id="2" name="Slide Image Placeholder 1"/>
           <p:cNvSpPr>
-            <a:spLocks noGrp="1"/>
+            <a:spLocks noGrp="1" noRot="1" noChangeAspect="1"/>
           </p:cNvSpPr>
           <p:nvPr>
             <p:ph type="sldImg" idx="2"/>
@@ -854,7 +647,7 @@
             <a:spLocks noGrp="1"/>
           </p:cNvSpPr>
           <p:nvPr>
-            <p:ph type="body" idx="3" sz="quarter"/>
+            <p:ph type="body" sz="quarter" idx="3"/>
           </p:nvPr>
         </p:nvSpPr>
         <p:spPr/>
@@ -863,7 +656,7 @@
           <a:lstStyle/>
           <a:p>
             <a:r>
-              <a:t>Tres muestras independientes, una por corriente; cada observación es la media de su corriente más un error normal; el parámetro de interés es μk − τ0,k. Hipótesis de dos colas porque τ0 es un valor medido de este láser, no un máximo: un pulso más corto también diría que algo cambió. De los nueve casos de la comparación simple es el caso 2: se compara una media, una población frente a un patrón fijo (τ0 no tiene varianza) y σ desconocida, estimada con S. No es el caso 6 (pareadas) porque el patrón no es una segunda medición; ni el 4 o 5 porque no hay dos muestras. Cada H0 se decide con su muestra, su S y su t0.</a:t>
+              <a:t>La respuesta es el ancho de pulso τp, en fs, obtenido de la traza con el método del fabricante: sech² y factor 0,65 sobre el ancho a media altura. El eje de retardo sale del micrómetro con τ = 2Δx/c (6,67 fs por µm, brazo con retrorreflector). El cero de retardo es el pico de la autocorrelación: el centro ajustado; el ancho no depende de dónde se ponga el cero. Con paso de 10 µm (66,7 fs) el máximo leído puede caer hasta 33 fs lejos del pico: por eso el estimador principal es el ajuste por mínimos cuadrados de toda la traza y el FWHM interpolado es la comprobación. Unidad experimental: una traza completa a corriente fija. Réplica: una traza nueva e independiente: corriente fijada de nuevo y barrido nuevo desde el extremo, con lecturas nuevas. Dos lecturas del mismo barrido no son réplicas. No se apaga el láser entre réplicas: la variación del encendido entra a nivel de día.</a:t>
             </a:r>
           </a:p>
         </p:txBody>
@@ -875,7 +668,7 @@
             <a:spLocks noGrp="1"/>
           </p:cNvSpPr>
           <p:nvPr>
-            <p:ph type="sldNum" idx="5" sz="quarter"/>
+            <p:ph type="sldNum" sz="quarter" idx="5"/>
           </p:nvPr>
         </p:nvSpPr>
         <p:spPr/>
@@ -888,8 +681,8 @@
 </p:notes>
 </file>
 
-<file path=ppt/notesSlides/notesSlide4.xml><?xml version="1.0" encoding="utf-8"?>
-<p:notes xmlns:a="http://schemas.openxmlformats.org/drawingml/2006/main" xmlns:p="http://schemas.openxmlformats.org/presentationml/2006/main" xmlns:r="http://schemas.openxmlformats.org/officeDocument/2006/relationships">
+<file path=ppt/notesSlides/notesSlide5.xml><?xml version="1.0" encoding="utf-8"?>
+<p:notes xmlns:a="http://schemas.openxmlformats.org/drawingml/2006/main" xmlns:r="http://schemas.openxmlformats.org/officeDocument/2006/relationships" xmlns:p="http://schemas.openxmlformats.org/presentationml/2006/main">
   <p:cSld>
     <p:spTree>
       <p:nvGrpSpPr>
@@ -909,7 +702,7 @@
         <p:nvSpPr>
           <p:cNvPr id="2" name="Slide Image Placeholder 1"/>
           <p:cNvSpPr>
-            <a:spLocks noGrp="1"/>
+            <a:spLocks noGrp="1" noRot="1" noChangeAspect="1"/>
           </p:cNvSpPr>
           <p:nvPr>
             <p:ph type="sldImg" idx="2"/>
@@ -924,7 +717,7 @@
             <a:spLocks noGrp="1"/>
           </p:cNvSpPr>
           <p:nvPr>
-            <p:ph type="body" idx="3" sz="quarter"/>
+            <p:ph type="body" sz="quarter" idx="3"/>
           </p:nvPr>
         </p:nvSpPr>
         <p:spPr/>
@@ -933,7 +726,7 @@
           <a:lstStyle/>
           <a:p>
             <a:r>
-              <a:t>La respuesta es el ancho de pulso τp, en fs, obtenido de la traza con el método del fabricante: sech² y factor 0,65 sobre el ancho a media altura. El eje de retardo sale del micrómetro con τ = 2Δx/c (6,67 fs por µm, brazo con retrorreflector). El cero de retardo es el pico de la autocorrelación: el centro ajustado; el ancho no depende de dónde se ponga el cero. Con paso de 10 µm (66,7 fs) el máximo leído puede caer hasta 33 fs lejos del pico: por eso el estimador principal es el ajuste por mínimos cuadrados de toda la traza y el FWHM interpolado es la comprobación. Unidad experimental: una traza completa a corriente fija. Réplica: una traza nueva e independiente: corriente fijada de nuevo y barrido nuevo desde el extremo, con lecturas nuevas. Dos lecturas del mismo barrido no son réplicas. No se apaga el láser entre réplicas: la variación del encendido entra a nivel de día.</a:t>
+              <a:t>Quince trazas en orden sorteado, ocho válidas (R08 a R15). La dispersión entre trazas es pequeña, S de 2 a 5 fs (CV ≈ 2 %), y eso es lo que fija el número de réplicas. Las medias están 1,9 a 2,8 veces por encima de la hoja de fábrica y la razón crece con la corriente: no cambia n, pero es la pregunta abierta del informe (dispersión en el vidrio del montaje: un pulso de 54 fs se ensancha más que uno de 107 fs). Entre inicios de trazas válidas pasaron 6,1 min: caben 48 trazas en 5 h.</a:t>
             </a:r>
           </a:p>
         </p:txBody>
@@ -945,7 +738,7 @@
             <a:spLocks noGrp="1"/>
           </p:cNvSpPr>
           <p:nvPr>
-            <p:ph type="sldNum" idx="5" sz="quarter"/>
+            <p:ph type="sldNum" sz="quarter" idx="5"/>
           </p:nvPr>
         </p:nvSpPr>
         <p:spPr/>
@@ -958,8 +751,8 @@
 </p:notes>
 </file>
 
-<file path=ppt/notesSlides/notesSlide5.xml><?xml version="1.0" encoding="utf-8"?>
-<p:notes xmlns:a="http://schemas.openxmlformats.org/drawingml/2006/main" xmlns:p="http://schemas.openxmlformats.org/presentationml/2006/main" xmlns:r="http://schemas.openxmlformats.org/officeDocument/2006/relationships">
+<file path=ppt/notesSlides/notesSlide6.xml><?xml version="1.0" encoding="utf-8"?>
+<p:notes xmlns:a="http://schemas.openxmlformats.org/drawingml/2006/main" xmlns:r="http://schemas.openxmlformats.org/officeDocument/2006/relationships" xmlns:p="http://schemas.openxmlformats.org/presentationml/2006/main">
   <p:cSld>
     <p:spTree>
       <p:nvGrpSpPr>
@@ -979,7 +772,7 @@
         <p:nvSpPr>
           <p:cNvPr id="2" name="Slide Image Placeholder 1"/>
           <p:cNvSpPr>
-            <a:spLocks noGrp="1"/>
+            <a:spLocks noGrp="1" noRot="1" noChangeAspect="1"/>
           </p:cNvSpPr>
           <p:nvPr>
             <p:ph type="sldImg" idx="2"/>
@@ -994,7 +787,7 @@
             <a:spLocks noGrp="1"/>
           </p:cNvSpPr>
           <p:nvPr>
-            <p:ph type="body" idx="3" sz="quarter"/>
+            <p:ph type="body" sz="quarter" idx="3"/>
           </p:nvPr>
         </p:nvSpPr>
         <p:spPr/>
@@ -1003,7 +796,7 @@
           <a:lstStyle/>
           <a:p>
             <a:r>
-              <a:t>Quince trazas en orden sorteado, ocho válidas (R08 a R15). La dispersión entre trazas es pequeña, S de 2 a 5 fs (CV ≈ 2 %), y eso es lo que fija el número de réplicas. Las medias están 1,9 a 2,8 veces por encima de la hoja de fábrica y la razón crece con la corriente: no cambia n, pero es la pregunta abierta del informe (dispersión en el vidrio del montaje: un pulso de 54 fs se ensancha más que uno de 107 fs). Entre inicios de trazas válidas pasaron 6,1 min: caben 48 trazas en 5 h.</a:t>
+              <a:t>Método de Montgomery, sec. 2-4.2, curva OC de la t de una muestra. σ conservadora: la mayor S del piloto (4,58 fs, 5 A, n = 5) por 1,558, límite superior de confianza del 80 %. δ = 10 fs tiene tres bases: (1) el margen del propio fabricante, tabla 4 a 7 A: límite &lt; 80 fs y resultado 70 fs, regla 2 del protocolo δ = τmáx − τ0; (2) el error del método: cambiar la forma supuesta de sech² a gaussiana mueve τp un 8,8 %, 9,4 fs a 107 fs, menos que eso no se puede atribuir al láser; (3) está por encima del ruido (S de 2 a 5 fs). α = 0,05 es el nivel convencional; β = 0,10 es más exigente que el 0,20 habitual porque el error tipo II, no ver 10 fs de más, es el que más pesa en una verificación: seguir usando un láser con pulsos más largos sin saberlo. Con d = 1,40 sale n = 8; el plan toma 9 por corriente, con potencia 0,96 para 10 fs y ≈ 1 para 15 fs. Límites: β nunca es cero con n finito (β = 0,001 pediría 16; 0,00001, 22); β depende de δ (con n = 9 es 0,54 para 5 fs); y más réplicas no quitan el sesgo del montaje. Con α = 0,01 harían falta 12 para mantener 0,90.</a:t>
             </a:r>
           </a:p>
         </p:txBody>
@@ -1015,7 +808,7 @@
             <a:spLocks noGrp="1"/>
           </p:cNvSpPr>
           <p:nvPr>
-            <p:ph type="sldNum" idx="5" sz="quarter"/>
+            <p:ph type="sldNum" sz="quarter" idx="5"/>
           </p:nvPr>
         </p:nvSpPr>
         <p:spPr/>
@@ -1028,8 +821,8 @@
 </p:notes>
 </file>
 
-<file path=ppt/notesSlides/notesSlide6.xml><?xml version="1.0" encoding="utf-8"?>
-<p:notes xmlns:a="http://schemas.openxmlformats.org/drawingml/2006/main" xmlns:p="http://schemas.openxmlformats.org/presentationml/2006/main" xmlns:r="http://schemas.openxmlformats.org/officeDocument/2006/relationships">
+<file path=ppt/notesSlides/notesSlide7.xml><?xml version="1.0" encoding="utf-8"?>
+<p:notes xmlns:a="http://schemas.openxmlformats.org/drawingml/2006/main" xmlns:r="http://schemas.openxmlformats.org/officeDocument/2006/relationships" xmlns:p="http://schemas.openxmlformats.org/presentationml/2006/main">
   <p:cSld>
     <p:spTree>
       <p:nvGrpSpPr>
@@ -1049,7 +842,7 @@
         <p:nvSpPr>
           <p:cNvPr id="2" name="Slide Image Placeholder 1"/>
           <p:cNvSpPr>
-            <a:spLocks noGrp="1"/>
+            <a:spLocks noGrp="1" noRot="1" noChangeAspect="1"/>
           </p:cNvSpPr>
           <p:nvPr>
             <p:ph type="sldImg" idx="2"/>
@@ -1064,7 +857,7 @@
             <a:spLocks noGrp="1"/>
           </p:cNvSpPr>
           <p:nvPr>
-            <p:ph type="body" idx="3" sz="quarter"/>
+            <p:ph type="body" sz="quarter" idx="3"/>
           </p:nvPr>
         </p:nvSpPr>
         <p:spPr/>
@@ -1073,7 +866,7 @@
           <a:lstStyle/>
           <a:p>
             <a:r>
-              <a:t>Método de Montgomery, sec. 2-4.2, curva OC de la t de una muestra. σ conservadora: la mayor S del piloto (4,58 fs, 5 A, n = 5) por 1,558, límite superior de confianza del 80 %. δ = 10 fs tiene tres bases: (1) el margen del propio fabricante, tabla 4 a 7 A: límite &lt; 80 fs y resultado 70 fs, regla 2 del protocolo δ = τmáx − τ0; (2) el error del método: cambiar la forma supuesta de sech² a gaussiana mueve τp un 8,8 %, 9,4 fs a 107 fs, menos que eso no se puede atribuir al láser; (3) está por encima del ruido (S de 2 a 5 fs). α = 0,05 es el nivel convencional; β = 0,10 es más exigente que el 0,20 habitual porque el error tipo II, no ver 10 fs de más, es el que más pesa en una verificación: seguir usando un láser con pulsos más largos sin saberlo. Con d = 1,40 sale n = 8; el plan toma 9 por corriente, con potencia 0,96 para 10 fs y ≈ 1 para 15 fs. Límites: β nunca es cero con n finito (β = 0,001 pediría 16; 0,00001, 22); β depende de δ (con n = 9 es 0,54 para 5 fs); y más réplicas no quitan el sesgo del montaje. Con α = 0,01 harían falta 12 para mantener 0,90.</a:t>
+              <a:t>Notación: ȳₖ es la media de las réplicas de la corriente k (k = 1, 2, 3 para 5, 6 y 7 A) y Sₖ su desviación estándar. Deriva: un cambio lento del montaje a lo largo de la tarde (alineación, temperatura del cuarto, detector que se calienta) que no depende de la corriente. Cada traza mide τ real de su corriente + deriva del momento en que se tomó + ruido. Ejemplo: 9 trazas en una tarde y una deriva de +2 fs por traza (0, 2, …, 16 fs). Agrupadas por corriente, I₁ recibe 0, 2 y 4 fs (sesgo +2 fs), I₂ 6, 8 y 10 (+8 fs) e I₃ 12, 14 y 16 (+14 fs): a 7 A se mediría 14 fs de más solo por ir al final, más que δ = 10 fs. Además las tres réplicas de cada corriente se tomaron seguidas y se parecen demasiado: Sₖ queda subestimada y t0 = (ȳₖ − τ0)/(Sₖ/√n) se infla en numerador y denominador. Con el orden sorteado cada corriente cae en momentos repartidos de la tarde: ninguna se lleva la parte alta de la deriva, la deriva pasa a la variación entre réplicas (Sₖ la incluye) y el error de cada traza se comporta como aleatorio e independiente, que es lo que supone la prueba t (Montgomery, sec. 1-3). Matiz: el sorteo reparte la deriva pero no borra su nivel promedio; si en toda la tarde el montaje mide en promedio 8 fs de más, eso le pasa a las tres corrientes por igual y es un error sistemático del instrumento frente a τ0, que se controla con el calentamiento de 30 min, el montaje fijo y se discute en el informe. Lo que el sorteo garantiza es que la deriva no favorezca a una corriente y que Sₖ sea realista. Las corrientes no interfieren: cada traza es una realización separada y el láser no guarda memoria de la corriente anterior tras 5 min.</a:t>
             </a:r>
           </a:p>
         </p:txBody>
@@ -1085,7 +878,7 @@
             <a:spLocks noGrp="1"/>
           </p:cNvSpPr>
           <p:nvPr>
-            <p:ph type="sldNum" idx="5" sz="quarter"/>
+            <p:ph type="sldNum" sz="quarter" idx="5"/>
           </p:nvPr>
         </p:nvSpPr>
         <p:spPr/>
@@ -1098,8 +891,8 @@
 </p:notes>
 </file>
 
-<file path=ppt/notesSlides/notesSlide7.xml><?xml version="1.0" encoding="utf-8"?>
-<p:notes xmlns:a="http://schemas.openxmlformats.org/drawingml/2006/main" xmlns:p="http://schemas.openxmlformats.org/presentationml/2006/main" xmlns:r="http://schemas.openxmlformats.org/officeDocument/2006/relationships">
+<file path=ppt/notesSlides/notesSlide8.xml><?xml version="1.0" encoding="utf-8"?>
+<p:notes xmlns:a="http://schemas.openxmlformats.org/drawingml/2006/main" xmlns:r="http://schemas.openxmlformats.org/officeDocument/2006/relationships" xmlns:p="http://schemas.openxmlformats.org/presentationml/2006/main">
   <p:cSld>
     <p:spTree>
       <p:nvGrpSpPr>
@@ -1119,7 +912,7 @@
         <p:nvSpPr>
           <p:cNvPr id="2" name="Slide Image Placeholder 1"/>
           <p:cNvSpPr>
-            <a:spLocks noGrp="1"/>
+            <a:spLocks noGrp="1" noRot="1" noChangeAspect="1"/>
           </p:cNvSpPr>
           <p:nvPr>
             <p:ph type="sldImg" idx="2"/>
@@ -1134,7 +927,7 @@
             <a:spLocks noGrp="1"/>
           </p:cNvSpPr>
           <p:nvPr>
-            <p:ph type="body" idx="3" sz="quarter"/>
+            <p:ph type="body" sz="quarter" idx="3"/>
           </p:nvPr>
         </p:nvSpPr>
         <p:spPr/>
@@ -1143,7 +936,7 @@
           <a:lstStyle/>
           <a:p>
             <a:r>
-              <a:t>Tres días, tres réplicas por corriente y por día, nueve trazas al día en orden sorteado con semilla anotada. Las tres pruebas t son independientes, pero las tres muestras comparten montaje, detector y reloj. Si el montaje deriva (alineación, temperatura), con las réplicas agrupadas por corriente la deriva de una hora entra entera en la media de esa corriente (sesgo) y sus réplicas se parecen demasiado (S subestimada): t0 queda mal en numerador y denominador. Con el sorteo el momento de cada traza es aleatorio e intercambiable entre corrientes: lo que el tiempo aporte pasa al error, con media cero en cada muestra, que es lo que supone la prueba t (Montgomery, sec. 1-3). Las corrientes no interfieren: cada traza es una realización física separada y el láser no guarda memoria de la corriente anterior tras 5 min. Es la misma aleatorización de un diseño de un solo factor pero con otro fin: proteger cada muestra del tiempo, no comparar niveles.</a:t>
+              <a:t>Procedimiento fijo. Fijar la corriente del turno, llevar el micrómetro más allá del extremo del barrido y avanzar siempre en el mismo sentido para que el juego del micrómetro no cambie la posición. El recorrido llega a 2 o 3 anchos de la autocorrelación a cada lado; con el paso de 10 µm (resolución del micrómetro, confirmada) son de 15 a 29 lecturas y 4 o 5 dentro del ancho; por eso el ajuste de toda la traza es el estimador principal. Se fija lo demás: forma y factor del fabricante, 30 min de calentamiento, mismo programa de análisis; temperatura y humedad no se miden, se anota la hora y se declara. Registro: una fila por réplica (día, turno, corriente, potencia, horas, hoja, Δτ_AC, τp, válida, observaciones). Se descarta solo por causa anotada en el momento; nunca por el valor que dio; toda traza descartada se repone el jueves.</a:t>
             </a:r>
           </a:p>
         </p:txBody>
@@ -1155,7 +948,7 @@
             <a:spLocks noGrp="1"/>
           </p:cNvSpPr>
           <p:nvPr>
-            <p:ph type="sldNum" idx="5" sz="quarter"/>
+            <p:ph type="sldNum" sz="quarter" idx="5"/>
           </p:nvPr>
         </p:nvSpPr>
         <p:spPr/>
@@ -1168,8 +961,8 @@
 </p:notes>
 </file>
 
-<file path=ppt/notesSlides/notesSlide8.xml><?xml version="1.0" encoding="utf-8"?>
-<p:notes xmlns:a="http://schemas.openxmlformats.org/drawingml/2006/main" xmlns:p="http://schemas.openxmlformats.org/presentationml/2006/main" xmlns:r="http://schemas.openxmlformats.org/officeDocument/2006/relationships">
+<file path=ppt/notesSlides/notesSlide9.xml><?xml version="1.0" encoding="utf-8"?>
+<p:notes xmlns:a="http://schemas.openxmlformats.org/drawingml/2006/main" xmlns:r="http://schemas.openxmlformats.org/officeDocument/2006/relationships" xmlns:p="http://schemas.openxmlformats.org/presentationml/2006/main">
   <p:cSld>
     <p:spTree>
       <p:nvGrpSpPr>
@@ -1189,7 +982,7 @@
         <p:nvSpPr>
           <p:cNvPr id="2" name="Slide Image Placeholder 1"/>
           <p:cNvSpPr>
-            <a:spLocks noGrp="1"/>
+            <a:spLocks noGrp="1" noRot="1" noChangeAspect="1"/>
           </p:cNvSpPr>
           <p:nvPr>
             <p:ph type="sldImg" idx="2"/>
@@ -1204,7 +997,7 @@
             <a:spLocks noGrp="1"/>
           </p:cNvSpPr>
           <p:nvPr>
-            <p:ph type="body" idx="3" sz="quarter"/>
+            <p:ph type="body" sz="quarter" idx="3"/>
           </p:nvPr>
         </p:nvSpPr>
         <p:spPr/>
@@ -1213,7 +1006,7 @@
           <a:lstStyle/>
           <a:p>
             <a:r>
-              <a:t>Procedimiento fijo. Fijar la corriente del turno, llevar el micrómetro más allá del extremo del barrido y avanzar siempre en el mismo sentido para que el juego del micrómetro no cambie la posición. El recorrido llega a 2 o 3 anchos de la autocorrelación a cada lado; con el paso de 10 µm (resolución del micrómetro, confirmada) son de 15 a 29 lecturas y 4 o 5 dentro del ancho; por eso el ajuste de toda la traza es el estimador principal. Se fija lo demás: forma y factor del fabricante, 30 min de calentamiento, mismo programa de análisis; temperatura y humedad no se miden, se anota la hora y se declara. Registro: una fila por réplica (día, turno, corriente, potencia, horas, hoja, Δτ_AC, τp, válida, observaciones). Se descarta solo por causa anotada en el momento; nunca por el valor que dio; toda traza descartada se repone el jueves.</a:t>
+              <a:t>Todo por corriente. Gráficas: diagrama de puntos con τ0 marcado y τp contra el orden. Supuestos de la t: normalidad con gráfica de probabilidad y Anderson-Darling (con n = 9 manda la gráfica), independencia con τp contra el orden de medición, atípicos con residuos estandarizados y la causa anotada; si falla la normalidad se reporta igual la t y se añade la prueba de signos o Wilcoxon. Prueba t de una muestra con la salida literal de Minitab: n, media, S, error estándar, IC, t, P. La prueba dice si hay diferencia; la verificación pregunta cuánto, por eso se lee el IC del 95 % de μk − τ0,k frente a la banda de ±10 fs: dentro, conforme; fuera, desviación; cruza, no concluyente. No rechazar H0 no prueba conformidad; se puede leer así porque n se fijó con potencia 0,90 para 10 fs. Se reporta también la potencia lograda con el n y la S reales. Tabla de ejemplos con n = 9 y S = 5 fs (semiancho 0,77·S = 3,8 fs): con 9 fs de diferencia la t rechaza H0 porque el IC excluye el cero, pero el IC va de 5 a 13 fs y no se puede afirmar que supere 10 fs: no concluyente. Con 6 fs la diferencia es significativa pero pequeña frente a lo que importa: conforme. La prueba dice si hay diferencia; el intervalo dice si es grande.</a:t>
             </a:r>
           </a:p>
         </p:txBody>
@@ -1225,77 +1018,7 @@
             <a:spLocks noGrp="1"/>
           </p:cNvSpPr>
           <p:nvPr>
-            <p:ph type="sldNum" idx="5" sz="quarter"/>
-          </p:nvPr>
-        </p:nvSpPr>
-        <p:spPr/>
-      </p:sp>
-    </p:spTree>
-  </p:cSld>
-  <p:clrMapOvr>
-    <a:masterClrMapping/>
-  </p:clrMapOvr>
-</p:notes>
-</file>
-
-<file path=ppt/notesSlides/notesSlide9.xml><?xml version="1.0" encoding="utf-8"?>
-<p:notes xmlns:a="http://schemas.openxmlformats.org/drawingml/2006/main" xmlns:p="http://schemas.openxmlformats.org/presentationml/2006/main" xmlns:r="http://schemas.openxmlformats.org/officeDocument/2006/relationships">
-  <p:cSld>
-    <p:spTree>
-      <p:nvGrpSpPr>
-        <p:cNvPr id="1" name=""/>
-        <p:cNvGrpSpPr/>
-        <p:nvPr/>
-      </p:nvGrpSpPr>
-      <p:grpSpPr>
-        <a:xfrm>
-          <a:off x="0" y="0"/>
-          <a:ext cx="0" cy="0"/>
-          <a:chOff x="0" y="0"/>
-          <a:chExt cx="0" cy="0"/>
-        </a:xfrm>
-      </p:grpSpPr>
-      <p:sp>
-        <p:nvSpPr>
-          <p:cNvPr id="2" name="Slide Image Placeholder 1"/>
-          <p:cNvSpPr>
-            <a:spLocks noGrp="1"/>
-          </p:cNvSpPr>
-          <p:nvPr>
-            <p:ph type="sldImg" idx="2"/>
-          </p:nvPr>
-        </p:nvSpPr>
-        <p:spPr/>
-      </p:sp>
-      <p:sp>
-        <p:nvSpPr>
-          <p:cNvPr id="3" name="Notes Placeholder 2"/>
-          <p:cNvSpPr>
-            <a:spLocks noGrp="1"/>
-          </p:cNvSpPr>
-          <p:nvPr>
-            <p:ph type="body" idx="3" sz="quarter"/>
-          </p:nvPr>
-        </p:nvSpPr>
-        <p:spPr/>
-        <p:txBody>
-          <a:bodyPr/>
-          <a:lstStyle/>
-          <a:p>
-            <a:r>
-              <a:t>Todo por corriente. Gráficas: diagrama de puntos con τ0 marcado y τp contra el orden. Supuestos de la t: normalidad con gráfica de probabilidad y Anderson-Darling (con n = 9 manda la gráfica), independencia con τp contra el orden de medición, atípicos con residuos estandarizados y la causa anotada; si falla la normalidad se reporta igual la t y se añade la prueba de signos o Wilcoxon. Prueba t de una muestra con la salida literal de Minitab: n, media, S, error estándar, IC, t, P. La prueba dice si hay diferencia; la verificación pregunta cuánto, por eso se lee el IC del 95 % de μk − τ0,k frente a la banda de ±10 fs: dentro, conforme; fuera, desviación; cruza, no concluyente. No rechazar H0 no prueba conformidad; se puede leer así porque n se fijó con potencia 0,90 para 10 fs. Se reporta también la potencia lograda con el n y la S reales. Tabla de ejemplos con n = 9 y S = 5 fs (semiancho 0,77·S = 3,8 fs): con 9 fs de diferencia la t rechaza H0 porque el IC excluye el cero, pero el IC va de 5 a 13 fs y no se puede afirmar que supere 10 fs: no concluyente. Con 6 fs la diferencia es significativa pero pequeña frente a lo que importa: conforme. La prueba dice si hay diferencia; el intervalo dice si es grande.</a:t>
-            </a:r>
-          </a:p>
-        </p:txBody>
-      </p:sp>
-      <p:sp>
-        <p:nvSpPr>
-          <p:cNvPr id="4" name="Slide Number Placeholder 3"/>
-          <p:cNvSpPr>
-            <a:spLocks noGrp="1"/>
-          </p:cNvSpPr>
-          <p:nvPr>
-            <p:ph type="sldNum" idx="5" sz="quarter"/>
+            <p:ph type="sldNum" sz="quarter" idx="5"/>
           </p:nvPr>
         </p:nvSpPr>
         <p:spPr/>
@@ -1346,10 +1069,9 @@
           <a:lstStyle/>
           <a:p>
             <a:r>
-              <a:rPr lang="en-US" smtClean="0"/>
+              <a:rPr lang="en-US"/>
               <a:t>Click to edit Master title style</a:t>
             </a:r>
-            <a:endParaRPr lang="en-US"/>
           </a:p>
         </p:txBody>
       </p:sp>
@@ -1465,10 +1187,9 @@
           </a:lstStyle>
           <a:p>
             <a:r>
-              <a:rPr lang="en-US" smtClean="0"/>
+              <a:rPr lang="en-US"/>
               <a:t>Click to edit Master subtitle style</a:t>
             </a:r>
-            <a:endParaRPr lang="en-US"/>
           </a:p>
         </p:txBody>
       </p:sp>
@@ -1489,7 +1210,7 @@
           <a:p>
             <a:fld id="{5BCAD085-E8A6-8845-BD4E-CB4CCA059FC4}" type="datetimeFigureOut">
               <a:rPr lang="en-US" smtClean="0"/>
-              <a:t>1/27/13</a:t>
+              <a:t>10/26/2026</a:t>
             </a:fld>
             <a:endParaRPr lang="en-US"/>
           </a:p>
@@ -1531,7 +1252,7 @@
           <a:p>
             <a:fld id="{C1FF6DA9-008F-8B48-92A6-B652298478BF}" type="slidenum">
               <a:rPr lang="en-US" smtClean="0"/>
-              <a:t>‹#›</a:t>
+              <a:t>‹Nº›</a:t>
             </a:fld>
             <a:endParaRPr lang="en-US"/>
           </a:p>
@@ -1583,10 +1304,9 @@
           <a:lstStyle/>
           <a:p>
             <a:r>
-              <a:rPr lang="en-US" smtClean="0"/>
+              <a:rPr lang="en-US"/>
               <a:t>Click to edit Master title style</a:t>
             </a:r>
-            <a:endParaRPr lang="en-US"/>
           </a:p>
         </p:txBody>
       </p:sp>
@@ -1607,38 +1327,37 @@
           <a:p>
             <a:pPr lvl="0"/>
             <a:r>
-              <a:rPr lang="en-US" smtClean="0"/>
+              <a:rPr lang="en-US"/>
               <a:t>Click to edit Master text styles</a:t>
             </a:r>
           </a:p>
           <a:p>
             <a:pPr lvl="1"/>
             <a:r>
-              <a:rPr lang="en-US" smtClean="0"/>
+              <a:rPr lang="en-US"/>
               <a:t>Second level</a:t>
             </a:r>
           </a:p>
           <a:p>
             <a:pPr lvl="2"/>
             <a:r>
-              <a:rPr lang="en-US" smtClean="0"/>
+              <a:rPr lang="en-US"/>
               <a:t>Third level</a:t>
             </a:r>
           </a:p>
           <a:p>
             <a:pPr lvl="3"/>
             <a:r>
-              <a:rPr lang="en-US" smtClean="0"/>
+              <a:rPr lang="en-US"/>
               <a:t>Fourth level</a:t>
             </a:r>
           </a:p>
           <a:p>
             <a:pPr lvl="4"/>
             <a:r>
-              <a:rPr lang="en-US" smtClean="0"/>
+              <a:rPr lang="en-US"/>
               <a:t>Fifth level</a:t>
             </a:r>
-            <a:endParaRPr lang="en-US"/>
           </a:p>
         </p:txBody>
       </p:sp>
@@ -1659,7 +1378,7 @@
           <a:p>
             <a:fld id="{5BCAD085-E8A6-8845-BD4E-CB4CCA059FC4}" type="datetimeFigureOut">
               <a:rPr lang="en-US" smtClean="0"/>
-              <a:t>1/27/13</a:t>
+              <a:t>10/26/2026</a:t>
             </a:fld>
             <a:endParaRPr lang="en-US"/>
           </a:p>
@@ -1701,7 +1420,7 @@
           <a:p>
             <a:fld id="{C1FF6DA9-008F-8B48-92A6-B652298478BF}" type="slidenum">
               <a:rPr lang="en-US" smtClean="0"/>
-              <a:t>‹#›</a:t>
+              <a:t>‹Nº›</a:t>
             </a:fld>
             <a:endParaRPr lang="en-US"/>
           </a:p>
@@ -1758,10 +1477,9 @@
           <a:lstStyle/>
           <a:p>
             <a:r>
-              <a:rPr lang="en-US" smtClean="0"/>
+              <a:rPr lang="en-US"/>
               <a:t>Click to edit Master title style</a:t>
             </a:r>
-            <a:endParaRPr lang="en-US"/>
           </a:p>
         </p:txBody>
       </p:sp>
@@ -1787,38 +1505,37 @@
           <a:p>
             <a:pPr lvl="0"/>
             <a:r>
-              <a:rPr lang="en-US" smtClean="0"/>
+              <a:rPr lang="en-US"/>
               <a:t>Click to edit Master text styles</a:t>
             </a:r>
           </a:p>
           <a:p>
             <a:pPr lvl="1"/>
             <a:r>
-              <a:rPr lang="en-US" smtClean="0"/>
+              <a:rPr lang="en-US"/>
               <a:t>Second level</a:t>
             </a:r>
           </a:p>
           <a:p>
             <a:pPr lvl="2"/>
             <a:r>
-              <a:rPr lang="en-US" smtClean="0"/>
+              <a:rPr lang="en-US"/>
               <a:t>Third level</a:t>
             </a:r>
           </a:p>
           <a:p>
             <a:pPr lvl="3"/>
             <a:r>
-              <a:rPr lang="en-US" smtClean="0"/>
+              <a:rPr lang="en-US"/>
               <a:t>Fourth level</a:t>
             </a:r>
           </a:p>
           <a:p>
             <a:pPr lvl="4"/>
             <a:r>
-              <a:rPr lang="en-US" smtClean="0"/>
+              <a:rPr lang="en-US"/>
               <a:t>Fifth level</a:t>
             </a:r>
-            <a:endParaRPr lang="en-US"/>
           </a:p>
         </p:txBody>
       </p:sp>
@@ -1839,7 +1556,7 @@
           <a:p>
             <a:fld id="{5BCAD085-E8A6-8845-BD4E-CB4CCA059FC4}" type="datetimeFigureOut">
               <a:rPr lang="en-US" smtClean="0"/>
-              <a:t>1/27/13</a:t>
+              <a:t>10/26/2026</a:t>
             </a:fld>
             <a:endParaRPr lang="en-US"/>
           </a:p>
@@ -1881,7 +1598,7 @@
           <a:p>
             <a:fld id="{C1FF6DA9-008F-8B48-92A6-B652298478BF}" type="slidenum">
               <a:rPr lang="en-US" smtClean="0"/>
-              <a:t>‹#›</a:t>
+              <a:t>‹Nº›</a:t>
             </a:fld>
             <a:endParaRPr lang="en-US"/>
           </a:p>
@@ -1933,10 +1650,9 @@
           <a:lstStyle/>
           <a:p>
             <a:r>
-              <a:rPr lang="en-US" smtClean="0"/>
+              <a:rPr lang="en-US"/>
               <a:t>Click to edit Master title style</a:t>
             </a:r>
-            <a:endParaRPr lang="en-US"/>
           </a:p>
         </p:txBody>
       </p:sp>
@@ -1957,38 +1673,37 @@
           <a:p>
             <a:pPr lvl="0"/>
             <a:r>
-              <a:rPr lang="en-US" smtClean="0"/>
+              <a:rPr lang="en-US"/>
               <a:t>Click to edit Master text styles</a:t>
             </a:r>
           </a:p>
           <a:p>
             <a:pPr lvl="1"/>
             <a:r>
-              <a:rPr lang="en-US" smtClean="0"/>
+              <a:rPr lang="en-US"/>
               <a:t>Second level</a:t>
             </a:r>
           </a:p>
           <a:p>
             <a:pPr lvl="2"/>
             <a:r>
-              <a:rPr lang="en-US" smtClean="0"/>
+              <a:rPr lang="en-US"/>
               <a:t>Third level</a:t>
             </a:r>
           </a:p>
           <a:p>
             <a:pPr lvl="3"/>
             <a:r>
-              <a:rPr lang="en-US" smtClean="0"/>
+              <a:rPr lang="en-US"/>
               <a:t>Fourth level</a:t>
             </a:r>
           </a:p>
           <a:p>
             <a:pPr lvl="4"/>
             <a:r>
-              <a:rPr lang="en-US" smtClean="0"/>
+              <a:rPr lang="en-US"/>
               <a:t>Fifth level</a:t>
             </a:r>
-            <a:endParaRPr lang="en-US"/>
           </a:p>
         </p:txBody>
       </p:sp>
@@ -2009,7 +1724,7 @@
           <a:p>
             <a:fld id="{5BCAD085-E8A6-8845-BD4E-CB4CCA059FC4}" type="datetimeFigureOut">
               <a:rPr lang="en-US" smtClean="0"/>
-              <a:t>1/27/13</a:t>
+              <a:t>10/26/2026</a:t>
             </a:fld>
             <a:endParaRPr lang="en-US"/>
           </a:p>
@@ -2051,7 +1766,7 @@
           <a:p>
             <a:fld id="{C1FF6DA9-008F-8B48-92A6-B652298478BF}" type="slidenum">
               <a:rPr lang="en-US" smtClean="0"/>
-              <a:t>‹#›</a:t>
+              <a:t>‹Nº›</a:t>
             </a:fld>
             <a:endParaRPr lang="en-US"/>
           </a:p>
@@ -2112,10 +1827,9 @@
           </a:lstStyle>
           <a:p>
             <a:r>
-              <a:rPr lang="en-US" smtClean="0"/>
+              <a:rPr lang="en-US"/>
               <a:t>Click to edit Master title style</a:t>
             </a:r>
-            <a:endParaRPr lang="en-US"/>
           </a:p>
         </p:txBody>
       </p:sp>
@@ -2232,7 +1946,7 @@
           <a:p>
             <a:pPr lvl="0"/>
             <a:r>
-              <a:rPr lang="en-US" smtClean="0"/>
+              <a:rPr lang="en-US"/>
               <a:t>Click to edit Master text styles</a:t>
             </a:r>
           </a:p>
@@ -2255,7 +1969,7 @@
           <a:p>
             <a:fld id="{5BCAD085-E8A6-8845-BD4E-CB4CCA059FC4}" type="datetimeFigureOut">
               <a:rPr lang="en-US" smtClean="0"/>
-              <a:t>1/27/13</a:t>
+              <a:t>10/26/2026</a:t>
             </a:fld>
             <a:endParaRPr lang="en-US"/>
           </a:p>
@@ -2297,7 +2011,7 @@
           <a:p>
             <a:fld id="{C1FF6DA9-008F-8B48-92A6-B652298478BF}" type="slidenum">
               <a:rPr lang="en-US" smtClean="0"/>
-              <a:t>‹#›</a:t>
+              <a:t>‹Nº›</a:t>
             </a:fld>
             <a:endParaRPr lang="en-US"/>
           </a:p>
@@ -2349,10 +2063,9 @@
           <a:lstStyle/>
           <a:p>
             <a:r>
-              <a:rPr lang="en-US" smtClean="0"/>
+              <a:rPr lang="en-US"/>
               <a:t>Click to edit Master title style</a:t>
             </a:r>
-            <a:endParaRPr lang="en-US"/>
           </a:p>
         </p:txBody>
       </p:sp>
@@ -2406,38 +2119,37 @@
           <a:p>
             <a:pPr lvl="0"/>
             <a:r>
-              <a:rPr lang="en-US" smtClean="0"/>
+              <a:rPr lang="en-US"/>
               <a:t>Click to edit Master text styles</a:t>
             </a:r>
           </a:p>
           <a:p>
             <a:pPr lvl="1"/>
             <a:r>
-              <a:rPr lang="en-US" smtClean="0"/>
+              <a:rPr lang="en-US"/>
               <a:t>Second level</a:t>
             </a:r>
           </a:p>
           <a:p>
             <a:pPr lvl="2"/>
             <a:r>
-              <a:rPr lang="en-US" smtClean="0"/>
+              <a:rPr lang="en-US"/>
               <a:t>Third level</a:t>
             </a:r>
           </a:p>
           <a:p>
             <a:pPr lvl="3"/>
             <a:r>
-              <a:rPr lang="en-US" smtClean="0"/>
+              <a:rPr lang="en-US"/>
               <a:t>Fourth level</a:t>
             </a:r>
           </a:p>
           <a:p>
             <a:pPr lvl="4"/>
             <a:r>
-              <a:rPr lang="en-US" smtClean="0"/>
+              <a:rPr lang="en-US"/>
               <a:t>Fifth level</a:t>
             </a:r>
-            <a:endParaRPr lang="en-US"/>
           </a:p>
         </p:txBody>
       </p:sp>
@@ -2491,38 +2203,37 @@
           <a:p>
             <a:pPr lvl="0"/>
             <a:r>
-              <a:rPr lang="en-US" smtClean="0"/>
+              <a:rPr lang="en-US"/>
               <a:t>Click to edit Master text styles</a:t>
             </a:r>
           </a:p>
           <a:p>
             <a:pPr lvl="1"/>
             <a:r>
-              <a:rPr lang="en-US" smtClean="0"/>
+              <a:rPr lang="en-US"/>
               <a:t>Second level</a:t>
             </a:r>
           </a:p>
           <a:p>
             <a:pPr lvl="2"/>
             <a:r>
-              <a:rPr lang="en-US" smtClean="0"/>
+              <a:rPr lang="en-US"/>
               <a:t>Third level</a:t>
             </a:r>
           </a:p>
           <a:p>
             <a:pPr lvl="3"/>
             <a:r>
-              <a:rPr lang="en-US" smtClean="0"/>
+              <a:rPr lang="en-US"/>
               <a:t>Fourth level</a:t>
             </a:r>
           </a:p>
           <a:p>
             <a:pPr lvl="4"/>
             <a:r>
-              <a:rPr lang="en-US" smtClean="0"/>
+              <a:rPr lang="en-US"/>
               <a:t>Fifth level</a:t>
             </a:r>
-            <a:endParaRPr lang="en-US"/>
           </a:p>
         </p:txBody>
       </p:sp>
@@ -2543,7 +2254,7 @@
           <a:p>
             <a:fld id="{5BCAD085-E8A6-8845-BD4E-CB4CCA059FC4}" type="datetimeFigureOut">
               <a:rPr lang="en-US" smtClean="0"/>
-              <a:t>1/27/13</a:t>
+              <a:t>10/26/2026</a:t>
             </a:fld>
             <a:endParaRPr lang="en-US"/>
           </a:p>
@@ -2585,7 +2296,7 @@
           <a:p>
             <a:fld id="{C1FF6DA9-008F-8B48-92A6-B652298478BF}" type="slidenum">
               <a:rPr lang="en-US" smtClean="0"/>
-              <a:t>‹#›</a:t>
+              <a:t>‹Nº›</a:t>
             </a:fld>
             <a:endParaRPr lang="en-US"/>
           </a:p>
@@ -2641,10 +2352,9 @@
           </a:lstStyle>
           <a:p>
             <a:r>
-              <a:rPr lang="en-US" smtClean="0"/>
+              <a:rPr lang="en-US"/>
               <a:t>Click to edit Master title style</a:t>
             </a:r>
-            <a:endParaRPr lang="en-US"/>
           </a:p>
         </p:txBody>
       </p:sp>
@@ -2707,7 +2417,7 @@
           <a:p>
             <a:pPr lvl="0"/>
             <a:r>
-              <a:rPr lang="en-US" smtClean="0"/>
+              <a:rPr lang="en-US"/>
               <a:t>Click to edit Master text styles</a:t>
             </a:r>
           </a:p>
@@ -2763,38 +2473,37 @@
           <a:p>
             <a:pPr lvl="0"/>
             <a:r>
-              <a:rPr lang="en-US" smtClean="0"/>
+              <a:rPr lang="en-US"/>
               <a:t>Click to edit Master text styles</a:t>
             </a:r>
           </a:p>
           <a:p>
             <a:pPr lvl="1"/>
             <a:r>
-              <a:rPr lang="en-US" smtClean="0"/>
+              <a:rPr lang="en-US"/>
               <a:t>Second level</a:t>
             </a:r>
           </a:p>
           <a:p>
             <a:pPr lvl="2"/>
             <a:r>
-              <a:rPr lang="en-US" smtClean="0"/>
+              <a:rPr lang="en-US"/>
               <a:t>Third level</a:t>
             </a:r>
           </a:p>
           <a:p>
             <a:pPr lvl="3"/>
             <a:r>
-              <a:rPr lang="en-US" smtClean="0"/>
+              <a:rPr lang="en-US"/>
               <a:t>Fourth level</a:t>
             </a:r>
           </a:p>
           <a:p>
             <a:pPr lvl="4"/>
             <a:r>
-              <a:rPr lang="en-US" smtClean="0"/>
+              <a:rPr lang="en-US"/>
               <a:t>Fifth level</a:t>
             </a:r>
-            <a:endParaRPr lang="en-US"/>
           </a:p>
         </p:txBody>
       </p:sp>
@@ -2857,7 +2566,7 @@
           <a:p>
             <a:pPr lvl="0"/>
             <a:r>
-              <a:rPr lang="en-US" smtClean="0"/>
+              <a:rPr lang="en-US"/>
               <a:t>Click to edit Master text styles</a:t>
             </a:r>
           </a:p>
@@ -2913,38 +2622,37 @@
           <a:p>
             <a:pPr lvl="0"/>
             <a:r>
-              <a:rPr lang="en-US" smtClean="0"/>
+              <a:rPr lang="en-US"/>
               <a:t>Click to edit Master text styles</a:t>
             </a:r>
           </a:p>
           <a:p>
             <a:pPr lvl="1"/>
             <a:r>
-              <a:rPr lang="en-US" smtClean="0"/>
+              <a:rPr lang="en-US"/>
               <a:t>Second level</a:t>
             </a:r>
           </a:p>
           <a:p>
             <a:pPr lvl="2"/>
             <a:r>
-              <a:rPr lang="en-US" smtClean="0"/>
+              <a:rPr lang="en-US"/>
               <a:t>Third level</a:t>
             </a:r>
           </a:p>
           <a:p>
             <a:pPr lvl="3"/>
             <a:r>
-              <a:rPr lang="en-US" smtClean="0"/>
+              <a:rPr lang="en-US"/>
               <a:t>Fourth level</a:t>
             </a:r>
           </a:p>
           <a:p>
             <a:pPr lvl="4"/>
             <a:r>
-              <a:rPr lang="en-US" smtClean="0"/>
+              <a:rPr lang="en-US"/>
               <a:t>Fifth level</a:t>
             </a:r>
-            <a:endParaRPr lang="en-US"/>
           </a:p>
         </p:txBody>
       </p:sp>
@@ -2965,7 +2673,7 @@
           <a:p>
             <a:fld id="{5BCAD085-E8A6-8845-BD4E-CB4CCA059FC4}" type="datetimeFigureOut">
               <a:rPr lang="en-US" smtClean="0"/>
-              <a:t>1/27/13</a:t>
+              <a:t>10/26/2026</a:t>
             </a:fld>
             <a:endParaRPr lang="en-US"/>
           </a:p>
@@ -3007,7 +2715,7 @@
           <a:p>
             <a:fld id="{C1FF6DA9-008F-8B48-92A6-B652298478BF}" type="slidenum">
               <a:rPr lang="en-US" smtClean="0"/>
-              <a:t>‹#›</a:t>
+              <a:t>‹Nº›</a:t>
             </a:fld>
             <a:endParaRPr lang="en-US"/>
           </a:p>
@@ -3059,10 +2767,9 @@
           <a:lstStyle/>
           <a:p>
             <a:r>
-              <a:rPr lang="en-US" smtClean="0"/>
+              <a:rPr lang="en-US"/>
               <a:t>Click to edit Master title style</a:t>
             </a:r>
-            <a:endParaRPr lang="en-US"/>
           </a:p>
         </p:txBody>
       </p:sp>
@@ -3083,7 +2790,7 @@
           <a:p>
             <a:fld id="{5BCAD085-E8A6-8845-BD4E-CB4CCA059FC4}" type="datetimeFigureOut">
               <a:rPr lang="en-US" smtClean="0"/>
-              <a:t>1/27/13</a:t>
+              <a:t>10/26/2026</a:t>
             </a:fld>
             <a:endParaRPr lang="en-US"/>
           </a:p>
@@ -3125,7 +2832,7 @@
           <a:p>
             <a:fld id="{C1FF6DA9-008F-8B48-92A6-B652298478BF}" type="slidenum">
               <a:rPr lang="en-US" smtClean="0"/>
-              <a:t>‹#›</a:t>
+              <a:t>‹Nº›</a:t>
             </a:fld>
             <a:endParaRPr lang="en-US"/>
           </a:p>
@@ -3178,7 +2885,7 @@
           <a:p>
             <a:fld id="{5BCAD085-E8A6-8845-BD4E-CB4CCA059FC4}" type="datetimeFigureOut">
               <a:rPr lang="en-US" smtClean="0"/>
-              <a:t>1/27/13</a:t>
+              <a:t>10/26/2026</a:t>
             </a:fld>
             <a:endParaRPr lang="en-US"/>
           </a:p>
@@ -3220,7 +2927,7 @@
           <a:p>
             <a:fld id="{C1FF6DA9-008F-8B48-92A6-B652298478BF}" type="slidenum">
               <a:rPr lang="en-US" smtClean="0"/>
-              <a:t>‹#›</a:t>
+              <a:t>‹Nº›</a:t>
             </a:fld>
             <a:endParaRPr lang="en-US"/>
           </a:p>
@@ -3281,10 +2988,9 @@
           </a:lstStyle>
           <a:p>
             <a:r>
-              <a:rPr lang="en-US" smtClean="0"/>
+              <a:rPr lang="en-US"/>
               <a:t>Click to edit Master title style</a:t>
             </a:r>
-            <a:endParaRPr lang="en-US"/>
           </a:p>
         </p:txBody>
       </p:sp>
@@ -3338,38 +3044,37 @@
           <a:p>
             <a:pPr lvl="0"/>
             <a:r>
-              <a:rPr lang="en-US" smtClean="0"/>
+              <a:rPr lang="en-US"/>
               <a:t>Click to edit Master text styles</a:t>
             </a:r>
           </a:p>
           <a:p>
             <a:pPr lvl="1"/>
             <a:r>
-              <a:rPr lang="en-US" smtClean="0"/>
+              <a:rPr lang="en-US"/>
               <a:t>Second level</a:t>
             </a:r>
           </a:p>
           <a:p>
             <a:pPr lvl="2"/>
             <a:r>
-              <a:rPr lang="en-US" smtClean="0"/>
+              <a:rPr lang="en-US"/>
               <a:t>Third level</a:t>
             </a:r>
           </a:p>
           <a:p>
             <a:pPr lvl="3"/>
             <a:r>
-              <a:rPr lang="en-US" smtClean="0"/>
+              <a:rPr lang="en-US"/>
               <a:t>Fourth level</a:t>
             </a:r>
           </a:p>
           <a:p>
             <a:pPr lvl="4"/>
             <a:r>
-              <a:rPr lang="en-US" smtClean="0"/>
+              <a:rPr lang="en-US"/>
               <a:t>Fifth level</a:t>
             </a:r>
-            <a:endParaRPr lang="en-US"/>
           </a:p>
         </p:txBody>
       </p:sp>
@@ -3432,7 +3137,7 @@
           <a:p>
             <a:pPr lvl="0"/>
             <a:r>
-              <a:rPr lang="en-US" smtClean="0"/>
+              <a:rPr lang="en-US"/>
               <a:t>Click to edit Master text styles</a:t>
             </a:r>
           </a:p>
@@ -3455,7 +3160,7 @@
           <a:p>
             <a:fld id="{5BCAD085-E8A6-8845-BD4E-CB4CCA059FC4}" type="datetimeFigureOut">
               <a:rPr lang="en-US" smtClean="0"/>
-              <a:t>1/27/13</a:t>
+              <a:t>10/26/2026</a:t>
             </a:fld>
             <a:endParaRPr lang="en-US"/>
           </a:p>
@@ -3497,7 +3202,7 @@
           <a:p>
             <a:fld id="{C1FF6DA9-008F-8B48-92A6-B652298478BF}" type="slidenum">
               <a:rPr lang="en-US" smtClean="0"/>
-              <a:t>‹#›</a:t>
+              <a:t>‹Nº›</a:t>
             </a:fld>
             <a:endParaRPr lang="en-US"/>
           </a:p>
@@ -3558,10 +3263,9 @@
           </a:lstStyle>
           <a:p>
             <a:r>
-              <a:rPr lang="en-US" smtClean="0"/>
+              <a:rPr lang="en-US"/>
               <a:t>Click to edit Master title style</a:t>
             </a:r>
-            <a:endParaRPr lang="en-US"/>
           </a:p>
         </p:txBody>
       </p:sp>
@@ -3685,7 +3389,7 @@
           <a:p>
             <a:pPr lvl="0"/>
             <a:r>
-              <a:rPr lang="en-US" smtClean="0"/>
+              <a:rPr lang="en-US"/>
               <a:t>Click to edit Master text styles</a:t>
             </a:r>
           </a:p>
@@ -3708,7 +3412,7 @@
           <a:p>
             <a:fld id="{5BCAD085-E8A6-8845-BD4E-CB4CCA059FC4}" type="datetimeFigureOut">
               <a:rPr lang="en-US" smtClean="0"/>
-              <a:t>1/27/13</a:t>
+              <a:t>10/26/2026</a:t>
             </a:fld>
             <a:endParaRPr lang="en-US"/>
           </a:p>
@@ -3750,7 +3454,7 @@
           <a:p>
             <a:fld id="{C1FF6DA9-008F-8B48-92A6-B652298478BF}" type="slidenum">
               <a:rPr lang="en-US" smtClean="0"/>
-              <a:t>‹#›</a:t>
+              <a:t>‹Nº›</a:t>
             </a:fld>
             <a:endParaRPr lang="en-US"/>
           </a:p>
@@ -3817,10 +3521,9 @@
           <a:lstStyle/>
           <a:p>
             <a:r>
-              <a:rPr lang="en-US" smtClean="0"/>
+              <a:rPr lang="en-US"/>
               <a:t>Click to edit Master title style</a:t>
             </a:r>
-            <a:endParaRPr lang="en-US"/>
           </a:p>
         </p:txBody>
       </p:sp>
@@ -3851,38 +3554,37 @@
           <a:p>
             <a:pPr lvl="0"/>
             <a:r>
-              <a:rPr lang="en-US" smtClean="0"/>
+              <a:rPr lang="en-US"/>
               <a:t>Click to edit Master text styles</a:t>
             </a:r>
           </a:p>
           <a:p>
             <a:pPr lvl="1"/>
             <a:r>
-              <a:rPr lang="en-US" smtClean="0"/>
+              <a:rPr lang="en-US"/>
               <a:t>Second level</a:t>
             </a:r>
           </a:p>
           <a:p>
             <a:pPr lvl="2"/>
             <a:r>
-              <a:rPr lang="en-US" smtClean="0"/>
+              <a:rPr lang="en-US"/>
               <a:t>Third level</a:t>
             </a:r>
           </a:p>
           <a:p>
             <a:pPr lvl="3"/>
             <a:r>
-              <a:rPr lang="en-US" smtClean="0"/>
+              <a:rPr lang="en-US"/>
               <a:t>Fourth level</a:t>
             </a:r>
           </a:p>
           <a:p>
             <a:pPr lvl="4"/>
             <a:r>
-              <a:rPr lang="en-US" smtClean="0"/>
+              <a:rPr lang="en-US"/>
               <a:t>Fifth level</a:t>
             </a:r>
-            <a:endParaRPr lang="en-US"/>
           </a:p>
         </p:txBody>
       </p:sp>
@@ -3921,7 +3623,7 @@
           <a:p>
             <a:fld id="{5BCAD085-E8A6-8845-BD4E-CB4CCA059FC4}" type="datetimeFigureOut">
               <a:rPr lang="en-US" smtClean="0"/>
-              <a:t>1/27/13</a:t>
+              <a:t>10/26/2026</a:t>
             </a:fld>
             <a:endParaRPr lang="en-US"/>
           </a:p>
@@ -3999,7 +3701,7 @@
           <a:p>
             <a:fld id="{C1FF6DA9-008F-8B48-92A6-B652298478BF}" type="slidenum">
               <a:rPr lang="en-US" smtClean="0"/>
-              <a:t>‹#›</a:t>
+              <a:t>‹Nº›</a:t>
             </a:fld>
             <a:endParaRPr lang="en-US"/>
           </a:p>
@@ -4280,7 +3982,7 @@
 </file>
 
 <file path=ppt/slides/slide1.xml><?xml version="1.0" encoding="utf-8"?>
-<p:sld xmlns:a="http://schemas.openxmlformats.org/drawingml/2006/main" xmlns:p="http://schemas.openxmlformats.org/presentationml/2006/main" xmlns:r="http://schemas.openxmlformats.org/officeDocument/2006/relationships">
+<p:sld xmlns:a="http://schemas.openxmlformats.org/drawingml/2006/main" xmlns:r="http://schemas.openxmlformats.org/officeDocument/2006/relationships" xmlns:p="http://schemas.openxmlformats.org/presentationml/2006/main">
   <p:cSld>
     <p:bg>
       <p:bgPr>
@@ -4296,7 +3998,14 @@
         <p:cNvGrpSpPr/>
         <p:nvPr/>
       </p:nvGrpSpPr>
-      <p:grpSpPr/>
+      <p:grpSpPr>
+        <a:xfrm>
+          <a:off x="0" y="0"/>
+          <a:ext cx="0" cy="0"/>
+          <a:chOff x="0" y="0"/>
+          <a:chExt cx="0" cy="0"/>
+        </a:xfrm>
+      </p:grpSpPr>
       <p:pic>
         <p:nvPicPr>
           <p:cNvPr id="2" name="Picture 1" descr="traza.png"/>
@@ -4338,7 +4047,7 @@
           <a:noFill/>
         </p:spPr>
         <p:txBody>
-          <a:bodyPr wrap="square" anchor="t" lIns="0" rIns="0" tIns="0" bIns="0">
+          <a:bodyPr wrap="square" lIns="0" tIns="0" rIns="0" bIns="0" anchor="t">
             <a:spAutoFit/>
           </a:bodyPr>
           <a:lstStyle/>
@@ -4377,7 +4086,7 @@
           <a:noFill/>
         </p:spPr>
         <p:txBody>
-          <a:bodyPr wrap="square" anchor="t" lIns="0" rIns="0" tIns="0" bIns="0">
+          <a:bodyPr wrap="square" lIns="0" tIns="0" rIns="0" bIns="0" anchor="t">
             <a:spAutoFit/>
           </a:bodyPr>
           <a:lstStyle/>
@@ -4419,7 +4128,7 @@
           <a:noFill/>
         </p:spPr>
         <p:txBody>
-          <a:bodyPr wrap="square" anchor="t" lIns="0" rIns="0" tIns="0" bIns="0">
+          <a:bodyPr wrap="square" lIns="0" tIns="0" rIns="0" bIns="0" anchor="t">
             <a:spAutoFit/>
           </a:bodyPr>
           <a:lstStyle/>
@@ -4458,7 +4167,7 @@
           <a:noFill/>
         </p:spPr>
         <p:txBody>
-          <a:bodyPr wrap="square" anchor="t" lIns="0" rIns="0" tIns="0" bIns="0">
+          <a:bodyPr wrap="square" lIns="0" tIns="0" rIns="0" bIns="0" anchor="t">
             <a:spAutoFit/>
           </a:bodyPr>
           <a:lstStyle/>
@@ -4513,7 +4222,7 @@
           <a:noFill/>
         </p:spPr>
         <p:txBody>
-          <a:bodyPr wrap="square" anchor="t" lIns="0" rIns="0" tIns="0" bIns="0">
+          <a:bodyPr wrap="square" lIns="0" tIns="0" rIns="0" bIns="0" anchor="t">
             <a:spAutoFit/>
           </a:bodyPr>
           <a:lstStyle/>
@@ -4544,7 +4253,7 @@
 </file>
 
 <file path=ppt/slides/slide10.xml><?xml version="1.0" encoding="utf-8"?>
-<p:sld xmlns:a="http://schemas.openxmlformats.org/drawingml/2006/main" xmlns:p="http://schemas.openxmlformats.org/presentationml/2006/main" xmlns:r="http://schemas.openxmlformats.org/officeDocument/2006/relationships">
+<p:sld xmlns:a="http://schemas.openxmlformats.org/drawingml/2006/main" xmlns:r="http://schemas.openxmlformats.org/officeDocument/2006/relationships" xmlns:p="http://schemas.openxmlformats.org/presentationml/2006/main">
   <p:cSld>
     <p:bg>
       <p:bgPr>
@@ -4560,7 +4269,14 @@
         <p:cNvGrpSpPr/>
         <p:nvPr/>
       </p:nvGrpSpPr>
-      <p:grpSpPr/>
+      <p:grpSpPr>
+        <a:xfrm>
+          <a:off x="0" y="0"/>
+          <a:ext cx="0" cy="0"/>
+          <a:chOff x="0" y="0"/>
+          <a:chExt cx="0" cy="0"/>
+        </a:xfrm>
+      </p:grpSpPr>
       <p:sp>
         <p:nvSpPr>
           <p:cNvPr id="2" name="TextBox 1"/>
@@ -4578,7 +4294,7 @@
           <a:noFill/>
         </p:spPr>
         <p:txBody>
-          <a:bodyPr wrap="square" anchor="t" lIns="0" rIns="0" tIns="0" bIns="0">
+          <a:bodyPr wrap="square" lIns="0" tIns="0" rIns="0" bIns="0" anchor="t">
             <a:spAutoFit/>
           </a:bodyPr>
           <a:lstStyle/>
@@ -4617,7 +4333,7 @@
           <a:noFill/>
         </p:spPr>
         <p:txBody>
-          <a:bodyPr wrap="square" anchor="t" lIns="0" rIns="0" tIns="0" bIns="0">
+          <a:bodyPr wrap="square" lIns="0" tIns="0" rIns="0" bIns="0" anchor="t">
             <a:spAutoFit/>
           </a:bodyPr>
           <a:lstStyle/>
@@ -4648,7 +4364,7 @@
           <p:nvPr/>
         </p:nvPicPr>
         <p:blipFill>
-          <a:blip r:embed="rId2"/>
+          <a:blip r:embed="rId3"/>
           <a:stretch>
             <a:fillRect/>
           </a:stretch>
@@ -4680,7 +4396,7 @@
           <a:noFill/>
         </p:spPr>
         <p:txBody>
-          <a:bodyPr wrap="square" anchor="t" lIns="0" rIns="0" tIns="0" bIns="0">
+          <a:bodyPr wrap="square" lIns="0" tIns="0" rIns="0" bIns="0" anchor="t">
             <a:spAutoFit/>
           </a:bodyPr>
           <a:lstStyle/>
@@ -4719,7 +4435,7 @@
           <a:noFill/>
         </p:spPr>
         <p:txBody>
-          <a:bodyPr wrap="square" anchor="t" lIns="0" rIns="0" tIns="0" bIns="0">
+          <a:bodyPr wrap="square" lIns="0" tIns="0" rIns="0" bIns="0" anchor="t">
             <a:spAutoFit/>
           </a:bodyPr>
           <a:lstStyle/>
@@ -4758,7 +4474,7 @@
           <a:noFill/>
         </p:spPr>
         <p:txBody>
-          <a:bodyPr wrap="square" anchor="t" lIns="0" rIns="0" tIns="0" bIns="0">
+          <a:bodyPr wrap="square" lIns="0" tIns="0" rIns="0" bIns="0" anchor="t">
             <a:spAutoFit/>
           </a:bodyPr>
           <a:lstStyle/>
@@ -4775,7 +4491,7 @@
                 </a:solidFill>
                 <a:latin typeface="Bahnschrift"/>
               </a:rPr>
-              <a:t>10</a:t>
+              <a:t>11</a:t>
             </a:r>
           </a:p>
         </p:txBody>
@@ -4799,13 +4515,25 @@
                 <a:tableStyleId>{2D5ABB26-0587-4C30-8999-92F81FD0307C}</a:tableStyleId>
               </a:tblPr>
               <a:tblGrid>
-                <a:gridCol w="1280160"/>
-                <a:gridCol w="4389120"/>
+                <a:gridCol w="1280160">
+                  <a:extLst>
+                    <a:ext uri="{9D8B030D-6E8A-4147-A177-3AD203B41FA5}">
+                      <a16:colId xmlns:a16="http://schemas.microsoft.com/office/drawing/2014/main" val="20000"/>
+                    </a:ext>
+                  </a:extLst>
+                </a:gridCol>
+                <a:gridCol w="4389120">
+                  <a:extLst>
+                    <a:ext uri="{9D8B030D-6E8A-4147-A177-3AD203B41FA5}">
+                      <a16:colId xmlns:a16="http://schemas.microsoft.com/office/drawing/2014/main" val="20001"/>
+                    </a:ext>
+                  </a:extLst>
+                </a:gridCol>
               </a:tblGrid>
               <a:tr h="548640">
                 <a:tc>
                   <a:txBody>
-                    <a:bodyPr wrap="square"/>
+                    <a:bodyPr/>
                     <a:lstStyle/>
                     <a:p>
                       <a:r>
@@ -4819,7 +4547,7 @@
                       </a:r>
                     </a:p>
                   </a:txBody>
-                  <a:tcPr marL="91440" marR="91440" marT="36576" marB="36576" anchor="ctr">
+                  <a:tcPr marT="36576" marB="36576" anchor="ctr">
                     <a:solidFill>
                       <a:srgbClr val="0E1726"/>
                     </a:solidFill>
@@ -4827,7 +4555,7 @@
                 </a:tc>
                 <a:tc>
                   <a:txBody>
-                    <a:bodyPr wrap="square"/>
+                    <a:bodyPr/>
                     <a:lstStyle/>
                     <a:p>
                       <a:r>
@@ -4841,17 +4569,22 @@
                       </a:r>
                     </a:p>
                   </a:txBody>
-                  <a:tcPr marL="91440" marR="91440" marT="36576" marB="36576" anchor="ctr">
+                  <a:tcPr marT="36576" marB="36576" anchor="ctr">
                     <a:solidFill>
                       <a:srgbClr val="0E1726"/>
                     </a:solidFill>
                   </a:tcPr>
                 </a:tc>
+                <a:extLst>
+                  <a:ext uri="{0D108BD9-81ED-4DB2-BD59-A6C34878D82A}">
+                    <a16:rowId xmlns:a16="http://schemas.microsoft.com/office/drawing/2014/main" val="10000"/>
+                  </a:ext>
+                </a:extLst>
               </a:tr>
               <a:tr h="548640">
                 <a:tc>
                   <a:txBody>
-                    <a:bodyPr wrap="square"/>
+                    <a:bodyPr/>
                     <a:lstStyle/>
                     <a:p>
                       <a:r>
@@ -4865,7 +4598,7 @@
                       </a:r>
                     </a:p>
                   </a:txBody>
-                  <a:tcPr marL="91440" marR="91440" marT="36576" marB="36576" anchor="ctr">
+                  <a:tcPr marT="36576" marB="36576" anchor="ctr">
                     <a:solidFill>
                       <a:srgbClr val="FFFFFF"/>
                     </a:solidFill>
@@ -4873,7 +4606,7 @@
                 </a:tc>
                 <a:tc>
                   <a:txBody>
-                    <a:bodyPr wrap="square"/>
+                    <a:bodyPr/>
                     <a:lstStyle/>
                     <a:p>
                       <a:r>
@@ -4887,17 +4620,22 @@
                       </a:r>
                     </a:p>
                   </a:txBody>
-                  <a:tcPr marL="91440" marR="91440" marT="36576" marB="36576" anchor="ctr">
+                  <a:tcPr marT="36576" marB="36576" anchor="ctr">
                     <a:solidFill>
                       <a:srgbClr val="FFFFFF"/>
                     </a:solidFill>
                   </a:tcPr>
                 </a:tc>
+                <a:extLst>
+                  <a:ext uri="{0D108BD9-81ED-4DB2-BD59-A6C34878D82A}">
+                    <a16:rowId xmlns:a16="http://schemas.microsoft.com/office/drawing/2014/main" val="10001"/>
+                  </a:ext>
+                </a:extLst>
               </a:tr>
               <a:tr h="548640">
                 <a:tc>
                   <a:txBody>
-                    <a:bodyPr wrap="square"/>
+                    <a:bodyPr/>
                     <a:lstStyle/>
                     <a:p>
                       <a:r>
@@ -4911,7 +4649,7 @@
                       </a:r>
                     </a:p>
                   </a:txBody>
-                  <a:tcPr marL="91440" marR="91440" marT="36576" marB="36576" anchor="ctr">
+                  <a:tcPr marT="36576" marB="36576" anchor="ctr">
                     <a:solidFill>
                       <a:srgbClr val="F2F4F7"/>
                     </a:solidFill>
@@ -4919,7 +4657,7 @@
                 </a:tc>
                 <a:tc>
                   <a:txBody>
-                    <a:bodyPr wrap="square"/>
+                    <a:bodyPr/>
                     <a:lstStyle/>
                     <a:p>
                       <a:r>
@@ -4933,17 +4671,22 @@
                       </a:r>
                     </a:p>
                   </a:txBody>
-                  <a:tcPr marL="91440" marR="91440" marT="36576" marB="36576" anchor="ctr">
+                  <a:tcPr marT="36576" marB="36576" anchor="ctr">
                     <a:solidFill>
                       <a:srgbClr val="F2F4F7"/>
                     </a:solidFill>
                   </a:tcPr>
                 </a:tc>
+                <a:extLst>
+                  <a:ext uri="{0D108BD9-81ED-4DB2-BD59-A6C34878D82A}">
+                    <a16:rowId xmlns:a16="http://schemas.microsoft.com/office/drawing/2014/main" val="10002"/>
+                  </a:ext>
+                </a:extLst>
               </a:tr>
               <a:tr h="548640">
                 <a:tc>
                   <a:txBody>
-                    <a:bodyPr wrap="square"/>
+                    <a:bodyPr/>
                     <a:lstStyle/>
                     <a:p>
                       <a:r>
@@ -4957,7 +4700,7 @@
                       </a:r>
                     </a:p>
                   </a:txBody>
-                  <a:tcPr marL="91440" marR="91440" marT="36576" marB="36576" anchor="ctr">
+                  <a:tcPr marT="36576" marB="36576" anchor="ctr">
                     <a:solidFill>
                       <a:srgbClr val="FFFFFF"/>
                     </a:solidFill>
@@ -4965,7 +4708,7 @@
                 </a:tc>
                 <a:tc>
                   <a:txBody>
-                    <a:bodyPr wrap="square"/>
+                    <a:bodyPr/>
                     <a:lstStyle/>
                     <a:p>
                       <a:r>
@@ -4979,17 +4722,22 @@
                       </a:r>
                     </a:p>
                   </a:txBody>
-                  <a:tcPr marL="91440" marR="91440" marT="36576" marB="36576" anchor="ctr">
+                  <a:tcPr marT="36576" marB="36576" anchor="ctr">
                     <a:solidFill>
                       <a:srgbClr val="FFFFFF"/>
                     </a:solidFill>
                   </a:tcPr>
                 </a:tc>
+                <a:extLst>
+                  <a:ext uri="{0D108BD9-81ED-4DB2-BD59-A6C34878D82A}">
+                    <a16:rowId xmlns:a16="http://schemas.microsoft.com/office/drawing/2014/main" val="10003"/>
+                  </a:ext>
+                </a:extLst>
               </a:tr>
               <a:tr h="548640">
                 <a:tc>
                   <a:txBody>
-                    <a:bodyPr wrap="square"/>
+                    <a:bodyPr/>
                     <a:lstStyle/>
                     <a:p>
                       <a:r>
@@ -5003,7 +4751,7 @@
                       </a:r>
                     </a:p>
                   </a:txBody>
-                  <a:tcPr marL="91440" marR="91440" marT="36576" marB="36576" anchor="ctr">
+                  <a:tcPr marT="36576" marB="36576" anchor="ctr">
                     <a:solidFill>
                       <a:srgbClr val="F2F4F7"/>
                     </a:solidFill>
@@ -5011,7 +4759,7 @@
                 </a:tc>
                 <a:tc>
                   <a:txBody>
-                    <a:bodyPr wrap="square"/>
+                    <a:bodyPr/>
                     <a:lstStyle/>
                     <a:p>
                       <a:r>
@@ -5025,12 +4773,17 @@
                       </a:r>
                     </a:p>
                   </a:txBody>
-                  <a:tcPr marL="91440" marR="91440" marT="36576" marB="36576" anchor="ctr">
+                  <a:tcPr marT="36576" marB="36576" anchor="ctr">
                     <a:solidFill>
                       <a:srgbClr val="F2F4F7"/>
                     </a:solidFill>
                   </a:tcPr>
                 </a:tc>
+                <a:extLst>
+                  <a:ext uri="{0D108BD9-81ED-4DB2-BD59-A6C34878D82A}">
+                    <a16:rowId xmlns:a16="http://schemas.microsoft.com/office/drawing/2014/main" val="10004"/>
+                  </a:ext>
+                </a:extLst>
               </a:tr>
             </a:tbl>
           </a:graphicData>
@@ -5053,7 +4806,7 @@
           <a:noFill/>
         </p:spPr>
         <p:txBody>
-          <a:bodyPr wrap="square" anchor="t" lIns="0" rIns="0" tIns="0" bIns="0">
+          <a:bodyPr wrap="square" lIns="0" tIns="0" rIns="0" bIns="0" anchor="t">
             <a:spAutoFit/>
           </a:bodyPr>
           <a:lstStyle/>
@@ -5132,7 +4885,9 @@
         <p:txBody>
           <a:bodyPr rtlCol="0" anchor="ctr"/>
           <a:lstStyle/>
-          <a:p/>
+          <a:p>
+            <a:endParaRPr/>
+          </a:p>
         </p:txBody>
       </p:sp>
       <p:sp>
@@ -5152,7 +4907,7 @@
           <a:noFill/>
         </p:spPr>
         <p:txBody>
-          <a:bodyPr wrap="square" anchor="t" lIns="0" rIns="0" tIns="0" bIns="0">
+          <a:bodyPr wrap="square" lIns="0" tIns="0" rIns="0" bIns="0" anchor="t">
             <a:spAutoFit/>
           </a:bodyPr>
           <a:lstStyle/>
@@ -5191,7 +4946,7 @@
           <a:noFill/>
         </p:spPr>
         <p:txBody>
-          <a:bodyPr wrap="square" anchor="t" lIns="0" rIns="0" tIns="0" bIns="0">
+          <a:bodyPr wrap="square" lIns="0" tIns="0" rIns="0" bIns="0" anchor="t">
             <a:spAutoFit/>
           </a:bodyPr>
           <a:lstStyle/>
@@ -5252,7 +5007,9 @@
         <p:txBody>
           <a:bodyPr rtlCol="0" anchor="ctr"/>
           <a:lstStyle/>
-          <a:p/>
+          <a:p>
+            <a:endParaRPr/>
+          </a:p>
         </p:txBody>
       </p:sp>
       <p:sp>
@@ -5272,7 +5029,7 @@
           <a:noFill/>
         </p:spPr>
         <p:txBody>
-          <a:bodyPr wrap="square" anchor="t" lIns="0" rIns="0" tIns="0" bIns="0">
+          <a:bodyPr wrap="square" lIns="0" tIns="0" rIns="0" bIns="0" anchor="t">
             <a:spAutoFit/>
           </a:bodyPr>
           <a:lstStyle/>
@@ -5311,7 +5068,7 @@
           <a:noFill/>
         </p:spPr>
         <p:txBody>
-          <a:bodyPr wrap="square" anchor="t" lIns="0" rIns="0" tIns="0" bIns="0">
+          <a:bodyPr wrap="square" lIns="0" tIns="0" rIns="0" bIns="0" anchor="t">
             <a:spAutoFit/>
           </a:bodyPr>
           <a:lstStyle/>
@@ -5372,7 +5129,9 @@
         <p:txBody>
           <a:bodyPr rtlCol="0" anchor="ctr"/>
           <a:lstStyle/>
-          <a:p/>
+          <a:p>
+            <a:endParaRPr/>
+          </a:p>
         </p:txBody>
       </p:sp>
       <p:sp>
@@ -5392,7 +5151,7 @@
           <a:noFill/>
         </p:spPr>
         <p:txBody>
-          <a:bodyPr wrap="square" anchor="t" lIns="0" rIns="0" tIns="0" bIns="0">
+          <a:bodyPr wrap="square" lIns="0" tIns="0" rIns="0" bIns="0" anchor="t">
             <a:spAutoFit/>
           </a:bodyPr>
           <a:lstStyle/>
@@ -5431,7 +5190,7 @@
           <a:noFill/>
         </p:spPr>
         <p:txBody>
-          <a:bodyPr wrap="square" anchor="t" lIns="0" rIns="0" tIns="0" bIns="0">
+          <a:bodyPr wrap="square" lIns="0" tIns="0" rIns="0" bIns="0" anchor="t">
             <a:spAutoFit/>
           </a:bodyPr>
           <a:lstStyle/>
@@ -5492,7 +5251,9 @@
         <p:txBody>
           <a:bodyPr rtlCol="0" anchor="ctr"/>
           <a:lstStyle/>
-          <a:p/>
+          <a:p>
+            <a:endParaRPr/>
+          </a:p>
         </p:txBody>
       </p:sp>
       <p:sp>
@@ -5512,7 +5273,7 @@
           <a:noFill/>
         </p:spPr>
         <p:txBody>
-          <a:bodyPr wrap="square" anchor="t" lIns="0" rIns="0" tIns="0" bIns="0">
+          <a:bodyPr wrap="square" lIns="0" tIns="0" rIns="0" bIns="0" anchor="t">
             <a:spAutoFit/>
           </a:bodyPr>
           <a:lstStyle/>
@@ -5551,7 +5312,7 @@
           <a:noFill/>
         </p:spPr>
         <p:txBody>
-          <a:bodyPr wrap="square" anchor="t" lIns="0" rIns="0" tIns="0" bIns="0">
+          <a:bodyPr wrap="square" lIns="0" tIns="0" rIns="0" bIns="0" anchor="t">
             <a:spAutoFit/>
           </a:bodyPr>
           <a:lstStyle/>
@@ -5582,866 +5343,7 @@
 </file>
 
 <file path=ppt/slides/slide11.xml><?xml version="1.0" encoding="utf-8"?>
-<p:sld xmlns:a="http://schemas.openxmlformats.org/drawingml/2006/main" xmlns:p="http://schemas.openxmlformats.org/presentationml/2006/main" xmlns:r="http://schemas.openxmlformats.org/officeDocument/2006/relationships">
-  <p:cSld>
-    <p:bg>
-      <p:bgPr>
-        <a:solidFill>
-          <a:srgbClr val="0B1020"/>
-        </a:solidFill>
-        <a:effectLst/>
-      </p:bgPr>
-    </p:bg>
-    <p:spTree>
-      <p:nvGrpSpPr>
-        <p:cNvPr id="1" name=""/>
-        <p:cNvGrpSpPr/>
-        <p:nvPr/>
-      </p:nvGrpSpPr>
-      <p:grpSpPr/>
-      <p:sp>
-        <p:nvSpPr>
-          <p:cNvPr id="2" name="TextBox 1"/>
-          <p:cNvSpPr txBox="1"/>
-          <p:nvPr/>
-        </p:nvSpPr>
-        <p:spPr>
-          <a:xfrm>
-            <a:off x="548640" y="822960"/>
-            <a:ext cx="9144000" cy="365760"/>
-          </a:xfrm>
-          <a:prstGeom prst="rect">
-            <a:avLst/>
-          </a:prstGeom>
-          <a:noFill/>
-        </p:spPr>
-        <p:txBody>
-          <a:bodyPr wrap="square" anchor="t" lIns="0" rIns="0" tIns="0" bIns="0">
-            <a:spAutoFit/>
-          </a:bodyPr>
-          <a:lstStyle/>
-          <a:p>
-            <a:pPr algn="l">
-              <a:spcAft>
-                <a:spcPts val="600"/>
-              </a:spcAft>
-            </a:pPr>
-            <a:r>
-              <a:rPr sz="1300" b="0" i="0">
-                <a:solidFill>
-                  <a:srgbClr val="A99BFF"/>
-                </a:solidFill>
-                <a:latin typeface="Bahnschrift SemiBold"/>
-              </a:rPr>
-              <a:t>EN UNA PANTALLA</a:t>
-            </a:r>
-          </a:p>
-        </p:txBody>
-      </p:sp>
-      <p:sp>
-        <p:nvSpPr>
-          <p:cNvPr id="3" name="TextBox 2"/>
-          <p:cNvSpPr txBox="1"/>
-          <p:nvPr/>
-        </p:nvSpPr>
-        <p:spPr>
-          <a:xfrm>
-            <a:off x="548640" y="1188720"/>
-            <a:ext cx="10515600" cy="822960"/>
-          </a:xfrm>
-          <a:prstGeom prst="rect">
-            <a:avLst/>
-          </a:prstGeom>
-          <a:noFill/>
-        </p:spPr>
-        <p:txBody>
-          <a:bodyPr wrap="square" anchor="t" lIns="0" rIns="0" tIns="0" bIns="0">
-            <a:spAutoFit/>
-          </a:bodyPr>
-          <a:lstStyle/>
-          <a:p>
-            <a:pPr algn="l">
-              <a:spcAft>
-                <a:spcPts val="600"/>
-              </a:spcAft>
-            </a:pPr>
-            <a:r>
-              <a:rPr sz="4000" b="0" i="0">
-                <a:solidFill>
-                  <a:srgbClr val="FFFFFF"/>
-                </a:solidFill>
-                <a:latin typeface="Bahnschrift SemiBold"/>
-              </a:rPr>
-              <a:t>¿Qué queda decidido?</a:t>
-            </a:r>
-          </a:p>
-        </p:txBody>
-      </p:sp>
-      <p:sp>
-        <p:nvSpPr>
-          <p:cNvPr id="4" name="Rounded Rectangle 3"/>
-          <p:cNvSpPr/>
-          <p:nvPr/>
-        </p:nvSpPr>
-        <p:spPr>
-          <a:xfrm>
-            <a:off x="548640" y="2377440"/>
-            <a:ext cx="2651760" cy="2834640"/>
-          </a:xfrm>
-          <a:prstGeom prst="roundRect">
-            <a:avLst>
-              <a:gd name="adj" fmla="val 6000"/>
-            </a:avLst>
-          </a:prstGeom>
-          <a:solidFill>
-            <a:srgbClr val="161D33"/>
-          </a:solidFill>
-          <a:ln>
-            <a:noFill/>
-          </a:ln>
-          <a:effectLst/>
-        </p:spPr>
-        <p:style>
-          <a:lnRef idx="1">
-            <a:schemeClr val="accent1"/>
-          </a:lnRef>
-          <a:fillRef idx="3">
-            <a:schemeClr val="accent1"/>
-          </a:fillRef>
-          <a:effectRef idx="2">
-            <a:schemeClr val="accent1"/>
-          </a:effectRef>
-          <a:fontRef idx="minor">
-            <a:schemeClr val="lt1"/>
-          </a:fontRef>
-        </p:style>
-        <p:txBody>
-          <a:bodyPr rtlCol="0" anchor="ctr"/>
-          <a:lstStyle/>
-          <a:p/>
-        </p:txBody>
-      </p:sp>
-      <p:sp>
-        <p:nvSpPr>
-          <p:cNvPr id="5" name="TextBox 4"/>
-          <p:cNvSpPr txBox="1"/>
-          <p:nvPr/>
-        </p:nvSpPr>
-        <p:spPr>
-          <a:xfrm>
-            <a:off x="777240" y="2560320"/>
-            <a:ext cx="2194560" cy="640080"/>
-          </a:xfrm>
-          <a:prstGeom prst="rect">
-            <a:avLst/>
-          </a:prstGeom>
-          <a:noFill/>
-        </p:spPr>
-        <p:txBody>
-          <a:bodyPr wrap="square" anchor="t" lIns="0" rIns="0" tIns="0" bIns="0">
-            <a:spAutoFit/>
-          </a:bodyPr>
-          <a:lstStyle/>
-          <a:p>
-            <a:pPr algn="l">
-              <a:spcAft>
-                <a:spcPts val="600"/>
-              </a:spcAft>
-            </a:pPr>
-            <a:r>
-              <a:rPr sz="3400" b="0" i="0">
-                <a:solidFill>
-                  <a:srgbClr val="D7263D"/>
-                </a:solidFill>
-                <a:latin typeface="Bahnschrift SemiBold"/>
-              </a:rPr>
-              <a:t>1</a:t>
-            </a:r>
-          </a:p>
-        </p:txBody>
-      </p:sp>
-      <p:sp>
-        <p:nvSpPr>
-          <p:cNvPr id="6" name="TextBox 5"/>
-          <p:cNvSpPr txBox="1"/>
-          <p:nvPr/>
-        </p:nvSpPr>
-        <p:spPr>
-          <a:xfrm>
-            <a:off x="777240" y="3200400"/>
-            <a:ext cx="2194560" cy="822960"/>
-          </a:xfrm>
-          <a:prstGeom prst="rect">
-            <a:avLst/>
-          </a:prstGeom>
-          <a:noFill/>
-        </p:spPr>
-        <p:txBody>
-          <a:bodyPr wrap="square" anchor="t" lIns="0" rIns="0" tIns="0" bIns="0">
-            <a:spAutoFit/>
-          </a:bodyPr>
-          <a:lstStyle/>
-          <a:p>
-            <a:pPr algn="l">
-              <a:spcAft>
-                <a:spcPts val="600"/>
-              </a:spcAft>
-            </a:pPr>
-            <a:r>
-              <a:rPr sz="1800" b="0" i="0">
-                <a:solidFill>
-                  <a:srgbClr val="FFFFFF"/>
-                </a:solidFill>
-                <a:latin typeface="Bahnschrift SemiBold"/>
-              </a:rPr>
-              <a:t>Una prueba por corriente</a:t>
-            </a:r>
-          </a:p>
-        </p:txBody>
-      </p:sp>
-      <p:sp>
-        <p:nvSpPr>
-          <p:cNvPr id="7" name="TextBox 6"/>
-          <p:cNvSpPr txBox="1"/>
-          <p:nvPr/>
-        </p:nvSpPr>
-        <p:spPr>
-          <a:xfrm>
-            <a:off x="777240" y="4069080"/>
-            <a:ext cx="2194560" cy="1097280"/>
-          </a:xfrm>
-          <a:prstGeom prst="rect">
-            <a:avLst/>
-          </a:prstGeom>
-          <a:noFill/>
-        </p:spPr>
-        <p:txBody>
-          <a:bodyPr wrap="square" anchor="t" lIns="0" rIns="0" tIns="0" bIns="0">
-            <a:spAutoFit/>
-          </a:bodyPr>
-          <a:lstStyle/>
-          <a:p>
-            <a:pPr algn="l">
-              <a:spcAft>
-                <a:spcPts val="600"/>
-              </a:spcAft>
-            </a:pPr>
-            <a:r>
-              <a:rPr sz="1350" b="0" i="0">
-                <a:solidFill>
-                  <a:srgbClr val="C9D1DE"/>
-                </a:solidFill>
-                <a:latin typeface="Bahnschrift"/>
-              </a:rPr>
-              <a:t>H₀: μ</a:t>
-            </a:r>
-            <a:r>
-              <a:rPr sz="1350" b="0" i="0" baseline="-25000">
-                <a:solidFill>
-                  <a:srgbClr val="C9D1DE"/>
-                </a:solidFill>
-                <a:latin typeface="Bahnschrift"/>
-              </a:rPr>
-              <a:t>k</a:t>
-            </a:r>
-            <a:r>
-              <a:rPr sz="1350" b="0" i="0">
-                <a:solidFill>
-                  <a:srgbClr val="C9D1DE"/>
-                </a:solidFill>
-                <a:latin typeface="Bahnschrift"/>
-              </a:rPr>
-              <a:t> = τ</a:t>
-            </a:r>
-            <a:r>
-              <a:rPr sz="1350" b="0" i="0" baseline="-25000">
-                <a:solidFill>
-                  <a:srgbClr val="C9D1DE"/>
-                </a:solidFill>
-                <a:latin typeface="Bahnschrift"/>
-              </a:rPr>
-              <a:t>0,k</a:t>
-            </a:r>
-            <a:r>
-              <a:rPr sz="1350" b="0" i="0">
-                <a:solidFill>
-                  <a:srgbClr val="C9D1DE"/>
-                </a:solidFill>
-                <a:latin typeface="Bahnschrift"/>
-              </a:rPr>
-              <a:t> · dos colas · t de una muestra</a:t>
-            </a:r>
-          </a:p>
-        </p:txBody>
-      </p:sp>
-      <p:sp>
-        <p:nvSpPr>
-          <p:cNvPr id="8" name="Rounded Rectangle 7"/>
-          <p:cNvSpPr/>
-          <p:nvPr/>
-        </p:nvSpPr>
-        <p:spPr>
-          <a:xfrm>
-            <a:off x="3355848" y="2377440"/>
-            <a:ext cx="2651760" cy="2834640"/>
-          </a:xfrm>
-          <a:prstGeom prst="roundRect">
-            <a:avLst>
-              <a:gd name="adj" fmla="val 6000"/>
-            </a:avLst>
-          </a:prstGeom>
-          <a:solidFill>
-            <a:srgbClr val="161D33"/>
-          </a:solidFill>
-          <a:ln>
-            <a:noFill/>
-          </a:ln>
-          <a:effectLst/>
-        </p:spPr>
-        <p:style>
-          <a:lnRef idx="1">
-            <a:schemeClr val="accent1"/>
-          </a:lnRef>
-          <a:fillRef idx="3">
-            <a:schemeClr val="accent1"/>
-          </a:fillRef>
-          <a:effectRef idx="2">
-            <a:schemeClr val="accent1"/>
-          </a:effectRef>
-          <a:fontRef idx="minor">
-            <a:schemeClr val="lt1"/>
-          </a:fontRef>
-        </p:style>
-        <p:txBody>
-          <a:bodyPr rtlCol="0" anchor="ctr"/>
-          <a:lstStyle/>
-          <a:p/>
-        </p:txBody>
-      </p:sp>
-      <p:sp>
-        <p:nvSpPr>
-          <p:cNvPr id="9" name="TextBox 8"/>
-          <p:cNvSpPr txBox="1"/>
-          <p:nvPr/>
-        </p:nvSpPr>
-        <p:spPr>
-          <a:xfrm>
-            <a:off x="3584448" y="2560320"/>
-            <a:ext cx="2194560" cy="640080"/>
-          </a:xfrm>
-          <a:prstGeom prst="rect">
-            <a:avLst/>
-          </a:prstGeom>
-          <a:noFill/>
-        </p:spPr>
-        <p:txBody>
-          <a:bodyPr wrap="square" anchor="t" lIns="0" rIns="0" tIns="0" bIns="0">
-            <a:spAutoFit/>
-          </a:bodyPr>
-          <a:lstStyle/>
-          <a:p>
-            <a:pPr algn="l">
-              <a:spcAft>
-                <a:spcPts val="600"/>
-              </a:spcAft>
-            </a:pPr>
-            <a:r>
-              <a:rPr sz="3400" b="0" i="0">
-                <a:solidFill>
-                  <a:srgbClr val="D7263D"/>
-                </a:solidFill>
-                <a:latin typeface="Bahnschrift SemiBold"/>
-              </a:rPr>
-              <a:t>2</a:t>
-            </a:r>
-          </a:p>
-        </p:txBody>
-      </p:sp>
-      <p:sp>
-        <p:nvSpPr>
-          <p:cNvPr id="10" name="TextBox 9"/>
-          <p:cNvSpPr txBox="1"/>
-          <p:nvPr/>
-        </p:nvSpPr>
-        <p:spPr>
-          <a:xfrm>
-            <a:off x="3584448" y="3200400"/>
-            <a:ext cx="2194560" cy="822960"/>
-          </a:xfrm>
-          <a:prstGeom prst="rect">
-            <a:avLst/>
-          </a:prstGeom>
-          <a:noFill/>
-        </p:spPr>
-        <p:txBody>
-          <a:bodyPr wrap="square" anchor="t" lIns="0" rIns="0" tIns="0" bIns="0">
-            <a:spAutoFit/>
-          </a:bodyPr>
-          <a:lstStyle/>
-          <a:p>
-            <a:pPr algn="l">
-              <a:spcAft>
-                <a:spcPts val="600"/>
-              </a:spcAft>
-            </a:pPr>
-            <a:r>
-              <a:rPr sz="1800" b="0" i="0">
-                <a:solidFill>
-                  <a:srgbClr val="FFFFFF"/>
-                </a:solidFill>
-                <a:latin typeface="Bahnschrift SemiBold"/>
-              </a:rPr>
-              <a:t>9 réplicas por corriente</a:t>
-            </a:r>
-          </a:p>
-        </p:txBody>
-      </p:sp>
-      <p:sp>
-        <p:nvSpPr>
-          <p:cNvPr id="11" name="TextBox 10"/>
-          <p:cNvSpPr txBox="1"/>
-          <p:nvPr/>
-        </p:nvSpPr>
-        <p:spPr>
-          <a:xfrm>
-            <a:off x="3584448" y="4069080"/>
-            <a:ext cx="2194560" cy="1097280"/>
-          </a:xfrm>
-          <a:prstGeom prst="rect">
-            <a:avLst/>
-          </a:prstGeom>
-          <a:noFill/>
-        </p:spPr>
-        <p:txBody>
-          <a:bodyPr wrap="square" anchor="t" lIns="0" rIns="0" tIns="0" bIns="0">
-            <a:spAutoFit/>
-          </a:bodyPr>
-          <a:lstStyle/>
-          <a:p>
-            <a:pPr algn="l">
-              <a:spcAft>
-                <a:spcPts val="600"/>
-              </a:spcAft>
-            </a:pPr>
-            <a:r>
-              <a:rPr sz="1350" b="0" i="0">
-                <a:solidFill>
-                  <a:srgbClr val="C9D1DE"/>
-                </a:solidFill>
-                <a:latin typeface="Bahnschrift"/>
-              </a:rPr>
-              <a:t>σ = 7,13 fs · δ = 10 fs · α = 0,05 · potencia 0,96</a:t>
-            </a:r>
-          </a:p>
-        </p:txBody>
-      </p:sp>
-      <p:sp>
-        <p:nvSpPr>
-          <p:cNvPr id="12" name="Rounded Rectangle 11"/>
-          <p:cNvSpPr/>
-          <p:nvPr/>
-        </p:nvSpPr>
-        <p:spPr>
-          <a:xfrm>
-            <a:off x="6163055" y="2377440"/>
-            <a:ext cx="2651760" cy="2834640"/>
-          </a:xfrm>
-          <a:prstGeom prst="roundRect">
-            <a:avLst>
-              <a:gd name="adj" fmla="val 6000"/>
-            </a:avLst>
-          </a:prstGeom>
-          <a:solidFill>
-            <a:srgbClr val="161D33"/>
-          </a:solidFill>
-          <a:ln>
-            <a:noFill/>
-          </a:ln>
-          <a:effectLst/>
-        </p:spPr>
-        <p:style>
-          <a:lnRef idx="1">
-            <a:schemeClr val="accent1"/>
-          </a:lnRef>
-          <a:fillRef idx="3">
-            <a:schemeClr val="accent1"/>
-          </a:fillRef>
-          <a:effectRef idx="2">
-            <a:schemeClr val="accent1"/>
-          </a:effectRef>
-          <a:fontRef idx="minor">
-            <a:schemeClr val="lt1"/>
-          </a:fontRef>
-        </p:style>
-        <p:txBody>
-          <a:bodyPr rtlCol="0" anchor="ctr"/>
-          <a:lstStyle/>
-          <a:p/>
-        </p:txBody>
-      </p:sp>
-      <p:sp>
-        <p:nvSpPr>
-          <p:cNvPr id="13" name="TextBox 12"/>
-          <p:cNvSpPr txBox="1"/>
-          <p:nvPr/>
-        </p:nvSpPr>
-        <p:spPr>
-          <a:xfrm>
-            <a:off x="6391655" y="2560320"/>
-            <a:ext cx="2194560" cy="640080"/>
-          </a:xfrm>
-          <a:prstGeom prst="rect">
-            <a:avLst/>
-          </a:prstGeom>
-          <a:noFill/>
-        </p:spPr>
-        <p:txBody>
-          <a:bodyPr wrap="square" anchor="t" lIns="0" rIns="0" tIns="0" bIns="0">
-            <a:spAutoFit/>
-          </a:bodyPr>
-          <a:lstStyle/>
-          <a:p>
-            <a:pPr algn="l">
-              <a:spcAft>
-                <a:spcPts val="600"/>
-              </a:spcAft>
-            </a:pPr>
-            <a:r>
-              <a:rPr sz="3400" b="0" i="0">
-                <a:solidFill>
-                  <a:srgbClr val="A99BFF"/>
-                </a:solidFill>
-                <a:latin typeface="Bahnschrift SemiBold"/>
-              </a:rPr>
-              <a:t>3</a:t>
-            </a:r>
-          </a:p>
-        </p:txBody>
-      </p:sp>
-      <p:sp>
-        <p:nvSpPr>
-          <p:cNvPr id="14" name="TextBox 13"/>
-          <p:cNvSpPr txBox="1"/>
-          <p:nvPr/>
-        </p:nvSpPr>
-        <p:spPr>
-          <a:xfrm>
-            <a:off x="6391655" y="3200400"/>
-            <a:ext cx="2194560" cy="822960"/>
-          </a:xfrm>
-          <a:prstGeom prst="rect">
-            <a:avLst/>
-          </a:prstGeom>
-          <a:noFill/>
-        </p:spPr>
-        <p:txBody>
-          <a:bodyPr wrap="square" anchor="t" lIns="0" rIns="0" tIns="0" bIns="0">
-            <a:spAutoFit/>
-          </a:bodyPr>
-          <a:lstStyle/>
-          <a:p>
-            <a:pPr algn="l">
-              <a:spcAft>
-                <a:spcPts val="600"/>
-              </a:spcAft>
-            </a:pPr>
-            <a:r>
-              <a:rPr sz="1800" b="0" i="0">
-                <a:solidFill>
-                  <a:srgbClr val="FFFFFF"/>
-                </a:solidFill>
-                <a:latin typeface="Bahnschrift SemiBold"/>
-              </a:rPr>
-              <a:t>Orden sorteado</a:t>
-            </a:r>
-          </a:p>
-        </p:txBody>
-      </p:sp>
-      <p:sp>
-        <p:nvSpPr>
-          <p:cNvPr id="15" name="TextBox 14"/>
-          <p:cNvSpPr txBox="1"/>
-          <p:nvPr/>
-        </p:nvSpPr>
-        <p:spPr>
-          <a:xfrm>
-            <a:off x="6391655" y="4069080"/>
-            <a:ext cx="2194560" cy="1097280"/>
-          </a:xfrm>
-          <a:prstGeom prst="rect">
-            <a:avLst/>
-          </a:prstGeom>
-          <a:noFill/>
-        </p:spPr>
-        <p:txBody>
-          <a:bodyPr wrap="square" anchor="t" lIns="0" rIns="0" tIns="0" bIns="0">
-            <a:spAutoFit/>
-          </a:bodyPr>
-          <a:lstStyle/>
-          <a:p>
-            <a:pPr algn="l">
-              <a:spcAft>
-                <a:spcPts val="600"/>
-              </a:spcAft>
-            </a:pPr>
-            <a:r>
-              <a:rPr sz="1350" b="0" i="0">
-                <a:solidFill>
-                  <a:srgbClr val="C9D1DE"/>
-                </a:solidFill>
-                <a:latin typeface="Bahnschrift"/>
-              </a:rPr>
-              <a:t>3 días × (3 + 3 + 3) · traza completa por réplica · descarte solo con causa</a:t>
-            </a:r>
-          </a:p>
-        </p:txBody>
-      </p:sp>
-      <p:sp>
-        <p:nvSpPr>
-          <p:cNvPr id="16" name="Rounded Rectangle 15"/>
-          <p:cNvSpPr/>
-          <p:nvPr/>
-        </p:nvSpPr>
-        <p:spPr>
-          <a:xfrm>
-            <a:off x="8970263" y="2377440"/>
-            <a:ext cx="2651760" cy="2834640"/>
-          </a:xfrm>
-          <a:prstGeom prst="roundRect">
-            <a:avLst>
-              <a:gd name="adj" fmla="val 6000"/>
-            </a:avLst>
-          </a:prstGeom>
-          <a:solidFill>
-            <a:srgbClr val="161D33"/>
-          </a:solidFill>
-          <a:ln>
-            <a:noFill/>
-          </a:ln>
-          <a:effectLst/>
-        </p:spPr>
-        <p:style>
-          <a:lnRef idx="1">
-            <a:schemeClr val="accent1"/>
-          </a:lnRef>
-          <a:fillRef idx="3">
-            <a:schemeClr val="accent1"/>
-          </a:fillRef>
-          <a:effectRef idx="2">
-            <a:schemeClr val="accent1"/>
-          </a:effectRef>
-          <a:fontRef idx="minor">
-            <a:schemeClr val="lt1"/>
-          </a:fontRef>
-        </p:style>
-        <p:txBody>
-          <a:bodyPr rtlCol="0" anchor="ctr"/>
-          <a:lstStyle/>
-          <a:p/>
-        </p:txBody>
-      </p:sp>
-      <p:sp>
-        <p:nvSpPr>
-          <p:cNvPr id="17" name="TextBox 16"/>
-          <p:cNvSpPr txBox="1"/>
-          <p:nvPr/>
-        </p:nvSpPr>
-        <p:spPr>
-          <a:xfrm>
-            <a:off x="9198863" y="2560320"/>
-            <a:ext cx="2194560" cy="640080"/>
-          </a:xfrm>
-          <a:prstGeom prst="rect">
-            <a:avLst/>
-          </a:prstGeom>
-          <a:noFill/>
-        </p:spPr>
-        <p:txBody>
-          <a:bodyPr wrap="square" anchor="t" lIns="0" rIns="0" tIns="0" bIns="0">
-            <a:spAutoFit/>
-          </a:bodyPr>
-          <a:lstStyle/>
-          <a:p>
-            <a:pPr algn="l">
-              <a:spcAft>
-                <a:spcPts val="600"/>
-              </a:spcAft>
-            </a:pPr>
-            <a:r>
-              <a:rPr sz="3400" b="0" i="0">
-                <a:solidFill>
-                  <a:srgbClr val="A99BFF"/>
-                </a:solidFill>
-                <a:latin typeface="Bahnschrift SemiBold"/>
-              </a:rPr>
-              <a:t>4</a:t>
-            </a:r>
-          </a:p>
-        </p:txBody>
-      </p:sp>
-      <p:sp>
-        <p:nvSpPr>
-          <p:cNvPr id="18" name="TextBox 17"/>
-          <p:cNvSpPr txBox="1"/>
-          <p:nvPr/>
-        </p:nvSpPr>
-        <p:spPr>
-          <a:xfrm>
-            <a:off x="9198863" y="3200400"/>
-            <a:ext cx="2194560" cy="822960"/>
-          </a:xfrm>
-          <a:prstGeom prst="rect">
-            <a:avLst/>
-          </a:prstGeom>
-          <a:noFill/>
-        </p:spPr>
-        <p:txBody>
-          <a:bodyPr wrap="square" anchor="t" lIns="0" rIns="0" tIns="0" bIns="0">
-            <a:spAutoFit/>
-          </a:bodyPr>
-          <a:lstStyle/>
-          <a:p>
-            <a:pPr algn="l">
-              <a:spcAft>
-                <a:spcPts val="600"/>
-              </a:spcAft>
-            </a:pPr>
-            <a:r>
-              <a:rPr sz="1800" b="0" i="0">
-                <a:solidFill>
-                  <a:srgbClr val="FFFFFF"/>
-                </a:solidFill>
-                <a:latin typeface="Bahnschrift SemiBold"/>
-              </a:rPr>
-              <a:t>Decisión con el IC</a:t>
-            </a:r>
-          </a:p>
-        </p:txBody>
-      </p:sp>
-      <p:sp>
-        <p:nvSpPr>
-          <p:cNvPr id="19" name="TextBox 18"/>
-          <p:cNvSpPr txBox="1"/>
-          <p:nvPr/>
-        </p:nvSpPr>
-        <p:spPr>
-          <a:xfrm>
-            <a:off x="9198863" y="4069080"/>
-            <a:ext cx="2194560" cy="1097280"/>
-          </a:xfrm>
-          <a:prstGeom prst="rect">
-            <a:avLst/>
-          </a:prstGeom>
-          <a:noFill/>
-        </p:spPr>
-        <p:txBody>
-          <a:bodyPr wrap="square" anchor="t" lIns="0" rIns="0" tIns="0" bIns="0">
-            <a:spAutoFit/>
-          </a:bodyPr>
-          <a:lstStyle/>
-          <a:p>
-            <a:pPr algn="l">
-              <a:spcAft>
-                <a:spcPts val="600"/>
-              </a:spcAft>
-            </a:pPr>
-            <a:r>
-              <a:rPr sz="1350" b="0" i="0">
-                <a:solidFill>
-                  <a:srgbClr val="C9D1DE"/>
-                </a:solidFill>
-                <a:latin typeface="Bahnschrift"/>
-              </a:rPr>
-              <a:t>IC de μ</a:t>
-            </a:r>
-            <a:r>
-              <a:rPr sz="1350" b="0" i="0" baseline="-25000">
-                <a:solidFill>
-                  <a:srgbClr val="C9D1DE"/>
-                </a:solidFill>
-                <a:latin typeface="Bahnschrift"/>
-              </a:rPr>
-              <a:t>k</a:t>
-            </a:r>
-            <a:r>
-              <a:rPr sz="1350" b="0" i="0">
-                <a:solidFill>
-                  <a:srgbClr val="C9D1DE"/>
-                </a:solidFill>
-                <a:latin typeface="Bahnschrift"/>
-              </a:rPr>
-              <a:t> − τ</a:t>
-            </a:r>
-            <a:r>
-              <a:rPr sz="1350" b="0" i="0" baseline="-25000">
-                <a:solidFill>
-                  <a:srgbClr val="C9D1DE"/>
-                </a:solidFill>
-                <a:latin typeface="Bahnschrift"/>
-              </a:rPr>
-              <a:t>0,k</a:t>
-            </a:r>
-            <a:r>
-              <a:rPr sz="1350" b="0" i="0">
-                <a:solidFill>
-                  <a:srgbClr val="C9D1DE"/>
-                </a:solidFill>
-                <a:latin typeface="Bahnschrift"/>
-              </a:rPr>
-              <a:t> frente a ±10 fs: conforme, desviación o no concluyente</a:t>
-            </a:r>
-          </a:p>
-        </p:txBody>
-      </p:sp>
-      <p:sp>
-        <p:nvSpPr>
-          <p:cNvPr id="20" name="TextBox 19"/>
-          <p:cNvSpPr txBox="1"/>
-          <p:nvPr/>
-        </p:nvSpPr>
-        <p:spPr>
-          <a:xfrm>
-            <a:off x="548640" y="5577840"/>
-            <a:ext cx="11064240" cy="548640"/>
-          </a:xfrm>
-          <a:prstGeom prst="rect">
-            <a:avLst/>
-          </a:prstGeom>
-          <a:noFill/>
-        </p:spPr>
-        <p:txBody>
-          <a:bodyPr wrap="square" anchor="t" lIns="0" rIns="0" tIns="0" bIns="0">
-            <a:spAutoFit/>
-          </a:bodyPr>
-          <a:lstStyle/>
-          <a:p>
-            <a:pPr algn="l">
-              <a:spcAft>
-                <a:spcPts val="600"/>
-              </a:spcAft>
-            </a:pPr>
-            <a:r>
-              <a:rPr sz="1500" b="0" i="1">
-                <a:solidFill>
-                  <a:srgbClr val="C9D1DE"/>
-                </a:solidFill>
-                <a:latin typeface="Bahnschrift Light"/>
-              </a:rPr>
-              <a:t>Pendiente: confirmar el brazo de 2 pasos y declarar la discrepancia de la hoja a 7 A.</a:t>
-            </a:r>
-          </a:p>
-        </p:txBody>
-      </p:sp>
-    </p:spTree>
-  </p:cSld>
-  <p:clrMapOvr>
-    <a:masterClrMapping/>
-  </p:clrMapOvr>
-</p:sld>
-</file>
-
-<file path=ppt/slides/slide12.xml><?xml version="1.0" encoding="utf-8"?>
-<p:sld xmlns:a="http://schemas.openxmlformats.org/drawingml/2006/main" xmlns:p="http://schemas.openxmlformats.org/presentationml/2006/main" xmlns:r="http://schemas.openxmlformats.org/officeDocument/2006/relationships">
+<p:sld xmlns:a="http://schemas.openxmlformats.org/drawingml/2006/main" xmlns:r="http://schemas.openxmlformats.org/officeDocument/2006/relationships" xmlns:p="http://schemas.openxmlformats.org/presentationml/2006/main">
   <p:cSld>
     <p:bg>
       <p:bgPr>
@@ -6457,7 +5359,14 @@
         <p:cNvGrpSpPr/>
         <p:nvPr/>
       </p:nvGrpSpPr>
-      <p:grpSpPr/>
+      <p:grpSpPr>
+        <a:xfrm>
+          <a:off x="0" y="0"/>
+          <a:ext cx="0" cy="0"/>
+          <a:chOff x="0" y="0"/>
+          <a:chExt cx="0" cy="0"/>
+        </a:xfrm>
+      </p:grpSpPr>
       <p:sp>
         <p:nvSpPr>
           <p:cNvPr id="2" name="TextBox 1"/>
@@ -6475,7 +5384,7 @@
           <a:noFill/>
         </p:spPr>
         <p:txBody>
-          <a:bodyPr wrap="square" anchor="t" lIns="0" rIns="0" tIns="0" bIns="0">
+          <a:bodyPr wrap="square" lIns="0" tIns="0" rIns="0" bIns="0" anchor="t">
             <a:spAutoFit/>
           </a:bodyPr>
           <a:lstStyle/>
@@ -6514,7 +5423,7 @@
           <a:noFill/>
         </p:spPr>
         <p:txBody>
-          <a:bodyPr wrap="square" anchor="t" lIns="0" rIns="0" tIns="0" bIns="0">
+          <a:bodyPr wrap="square" lIns="0" tIns="0" rIns="0" bIns="0" anchor="t">
             <a:spAutoFit/>
           </a:bodyPr>
           <a:lstStyle/>
@@ -6545,7 +5454,7 @@
           <p:nvPr/>
         </p:nvPicPr>
         <p:blipFill>
-          <a:blip r:embed="rId2"/>
+          <a:blip r:embed="rId3"/>
           <a:stretch>
             <a:fillRect/>
           </a:stretch>
@@ -6577,7 +5486,7 @@
           <a:noFill/>
         </p:spPr>
         <p:txBody>
-          <a:bodyPr wrap="square" anchor="t" lIns="0" rIns="0" tIns="0" bIns="0">
+          <a:bodyPr wrap="square" lIns="0" tIns="0" rIns="0" bIns="0" anchor="t">
             <a:spAutoFit/>
           </a:bodyPr>
           <a:lstStyle/>
@@ -6616,7 +5525,7 @@
           <a:noFill/>
         </p:spPr>
         <p:txBody>
-          <a:bodyPr wrap="square" anchor="t" lIns="0" rIns="0" tIns="0" bIns="0">
+          <a:bodyPr wrap="square" lIns="0" tIns="0" rIns="0" bIns="0" anchor="t">
             <a:spAutoFit/>
           </a:bodyPr>
           <a:lstStyle/>
@@ -6633,7 +5542,7 @@
                 </a:solidFill>
                 <a:latin typeface="Bahnschrift"/>
               </a:rPr>
-              <a:t>12</a:t>
+              <a:t>13</a:t>
             </a:r>
           </a:p>
         </p:txBody>
@@ -6655,7 +5564,7 @@
           <a:noFill/>
         </p:spPr>
         <p:txBody>
-          <a:bodyPr wrap="square" anchor="t" lIns="0" rIns="0" tIns="0" bIns="0">
+          <a:bodyPr wrap="square" lIns="0" tIns="0" rIns="0" bIns="0" anchor="t">
             <a:spAutoFit/>
           </a:bodyPr>
           <a:lstStyle/>
@@ -6766,7 +5675,7 @@
 </file>
 
 <file path=ppt/slides/slide2.xml><?xml version="1.0" encoding="utf-8"?>
-<p:sld xmlns:a="http://schemas.openxmlformats.org/drawingml/2006/main" xmlns:p="http://schemas.openxmlformats.org/presentationml/2006/main" xmlns:r="http://schemas.openxmlformats.org/officeDocument/2006/relationships">
+<p:sld xmlns:a="http://schemas.openxmlformats.org/drawingml/2006/main" xmlns:r="http://schemas.openxmlformats.org/officeDocument/2006/relationships" xmlns:p="http://schemas.openxmlformats.org/presentationml/2006/main">
   <p:cSld>
     <p:bg>
       <p:bgPr>
@@ -6782,7 +5691,14 @@
         <p:cNvGrpSpPr/>
         <p:nvPr/>
       </p:nvGrpSpPr>
-      <p:grpSpPr/>
+      <p:grpSpPr>
+        <a:xfrm>
+          <a:off x="0" y="0"/>
+          <a:ext cx="0" cy="0"/>
+          <a:chOff x="0" y="0"/>
+          <a:chExt cx="0" cy="0"/>
+        </a:xfrm>
+      </p:grpSpPr>
       <p:sp>
         <p:nvSpPr>
           <p:cNvPr id="2" name="TextBox 1"/>
@@ -6800,7 +5716,7 @@
           <a:noFill/>
         </p:spPr>
         <p:txBody>
-          <a:bodyPr wrap="square" anchor="t" lIns="0" rIns="0" tIns="0" bIns="0">
+          <a:bodyPr wrap="square" lIns="0" tIns="0" rIns="0" bIns="0" anchor="t">
             <a:spAutoFit/>
           </a:bodyPr>
           <a:lstStyle/>
@@ -6839,7 +5755,7 @@
           <a:noFill/>
         </p:spPr>
         <p:txBody>
-          <a:bodyPr wrap="square" anchor="t" lIns="0" rIns="0" tIns="0" bIns="0">
+          <a:bodyPr wrap="square" lIns="0" tIns="0" rIns="0" bIns="0" anchor="t">
             <a:spAutoFit/>
           </a:bodyPr>
           <a:lstStyle/>
@@ -6870,7 +5786,7 @@
           <p:nvPr/>
         </p:nvPicPr>
         <p:blipFill>
-          <a:blip r:embed="rId2"/>
+          <a:blip r:embed="rId3"/>
           <a:stretch>
             <a:fillRect/>
           </a:stretch>
@@ -6902,7 +5818,7 @@
           <a:noFill/>
         </p:spPr>
         <p:txBody>
-          <a:bodyPr wrap="square" anchor="t" lIns="0" rIns="0" tIns="0" bIns="0">
+          <a:bodyPr wrap="square" lIns="0" tIns="0" rIns="0" bIns="0" anchor="t">
             <a:spAutoFit/>
           </a:bodyPr>
           <a:lstStyle/>
@@ -6941,7 +5857,7 @@
           <a:noFill/>
         </p:spPr>
         <p:txBody>
-          <a:bodyPr wrap="square" anchor="t" lIns="0" rIns="0" tIns="0" bIns="0">
+          <a:bodyPr wrap="square" lIns="0" tIns="0" rIns="0" bIns="0" anchor="t">
             <a:spAutoFit/>
           </a:bodyPr>
           <a:lstStyle/>
@@ -6980,7 +5896,7 @@
           <a:noFill/>
         </p:spPr>
         <p:txBody>
-          <a:bodyPr wrap="square" anchor="t" lIns="0" rIns="0" tIns="0" bIns="0">
+          <a:bodyPr wrap="square" lIns="0" tIns="0" rIns="0" bIns="0" anchor="t">
             <a:spAutoFit/>
           </a:bodyPr>
           <a:lstStyle/>
@@ -7043,7 +5959,9 @@
         <p:txBody>
           <a:bodyPr rtlCol="0" anchor="ctr"/>
           <a:lstStyle/>
-          <a:p/>
+          <a:p>
+            <a:endParaRPr/>
+          </a:p>
         </p:txBody>
       </p:sp>
       <p:sp>
@@ -7063,7 +5981,7 @@
           <a:noFill/>
         </p:spPr>
         <p:txBody>
-          <a:bodyPr wrap="square" anchor="ctr" lIns="0" rIns="0" tIns="0" bIns="0">
+          <a:bodyPr wrap="square" lIns="0" tIns="0" rIns="0" bIns="0" anchor="ctr">
             <a:spAutoFit/>
           </a:bodyPr>
           <a:lstStyle/>
@@ -7122,14 +6040,32 @@
                 <a:tableStyleId>{2D5ABB26-0587-4C30-8999-92F81FD0307C}</a:tableStyleId>
               </a:tblPr>
               <a:tblGrid>
-                <a:gridCol w="1280160"/>
-                <a:gridCol w="1828800"/>
-                <a:gridCol w="2011680"/>
+                <a:gridCol w="1280160">
+                  <a:extLst>
+                    <a:ext uri="{9D8B030D-6E8A-4147-A177-3AD203B41FA5}">
+                      <a16:colId xmlns:a16="http://schemas.microsoft.com/office/drawing/2014/main" val="20000"/>
+                    </a:ext>
+                  </a:extLst>
+                </a:gridCol>
+                <a:gridCol w="1828800">
+                  <a:extLst>
+                    <a:ext uri="{9D8B030D-6E8A-4147-A177-3AD203B41FA5}">
+                      <a16:colId xmlns:a16="http://schemas.microsoft.com/office/drawing/2014/main" val="20001"/>
+                    </a:ext>
+                  </a:extLst>
+                </a:gridCol>
+                <a:gridCol w="2011680">
+                  <a:extLst>
+                    <a:ext uri="{9D8B030D-6E8A-4147-A177-3AD203B41FA5}">
+                      <a16:colId xmlns:a16="http://schemas.microsoft.com/office/drawing/2014/main" val="20002"/>
+                    </a:ext>
+                  </a:extLst>
+                </a:gridCol>
               </a:tblGrid>
               <a:tr h="502920">
                 <a:tc>
                   <a:txBody>
-                    <a:bodyPr wrap="square"/>
+                    <a:bodyPr/>
                     <a:lstStyle/>
                     <a:p>
                       <a:r>
@@ -7143,7 +6079,7 @@
                       </a:r>
                     </a:p>
                   </a:txBody>
-                  <a:tcPr marL="91440" marR="91440" marT="36576" marB="36576" anchor="ctr">
+                  <a:tcPr marT="36576" marB="36576" anchor="ctr">
                     <a:solidFill>
                       <a:srgbClr val="0E1726"/>
                     </a:solidFill>
@@ -7151,7 +6087,7 @@
                 </a:tc>
                 <a:tc>
                   <a:txBody>
-                    <a:bodyPr wrap="square"/>
+                    <a:bodyPr/>
                     <a:lstStyle/>
                     <a:p>
                       <a:r>
@@ -7165,7 +6101,7 @@
                       </a:r>
                     </a:p>
                   </a:txBody>
-                  <a:tcPr marL="91440" marR="91440" marT="36576" marB="36576" anchor="ctr">
+                  <a:tcPr marT="36576" marB="36576" anchor="ctr">
                     <a:solidFill>
                       <a:srgbClr val="0E1726"/>
                     </a:solidFill>
@@ -7173,7 +6109,7 @@
                 </a:tc>
                 <a:tc>
                   <a:txBody>
-                    <a:bodyPr wrap="square"/>
+                    <a:bodyPr/>
                     <a:lstStyle/>
                     <a:p>
                       <a:r>
@@ -7187,17 +6123,22 @@
                       </a:r>
                     </a:p>
                   </a:txBody>
-                  <a:tcPr marL="91440" marR="91440" marT="36576" marB="36576" anchor="ctr">
+                  <a:tcPr marT="36576" marB="36576" anchor="ctr">
                     <a:solidFill>
                       <a:srgbClr val="0E1726"/>
                     </a:solidFill>
                   </a:tcPr>
                 </a:tc>
+                <a:extLst>
+                  <a:ext uri="{0D108BD9-81ED-4DB2-BD59-A6C34878D82A}">
+                    <a16:rowId xmlns:a16="http://schemas.microsoft.com/office/drawing/2014/main" val="10000"/>
+                  </a:ext>
+                </a:extLst>
               </a:tr>
               <a:tr h="502920">
                 <a:tc>
                   <a:txBody>
-                    <a:bodyPr wrap="square"/>
+                    <a:bodyPr/>
                     <a:lstStyle/>
                     <a:p>
                       <a:r>
@@ -7211,7 +6152,7 @@
                       </a:r>
                     </a:p>
                   </a:txBody>
-                  <a:tcPr marL="91440" marR="91440" marT="36576" marB="36576" anchor="ctr">
+                  <a:tcPr marT="36576" marB="36576" anchor="ctr">
                     <a:solidFill>
                       <a:srgbClr val="FFFFFF"/>
                     </a:solidFill>
@@ -7219,7 +6160,7 @@
                 </a:tc>
                 <a:tc>
                   <a:txBody>
-                    <a:bodyPr wrap="square"/>
+                    <a:bodyPr/>
                     <a:lstStyle/>
                     <a:p>
                       <a:r>
@@ -7233,7 +6174,7 @@
                       </a:r>
                     </a:p>
                   </a:txBody>
-                  <a:tcPr marL="91440" marR="91440" marT="36576" marB="36576" anchor="ctr">
+                  <a:tcPr marT="36576" marB="36576" anchor="ctr">
                     <a:solidFill>
                       <a:srgbClr val="FFFFFF"/>
                     </a:solidFill>
@@ -7241,7 +6182,7 @@
                 </a:tc>
                 <a:tc>
                   <a:txBody>
-                    <a:bodyPr wrap="square"/>
+                    <a:bodyPr/>
                     <a:lstStyle/>
                     <a:p>
                       <a:r>
@@ -7255,17 +6196,22 @@
                       </a:r>
                     </a:p>
                   </a:txBody>
-                  <a:tcPr marL="91440" marR="91440" marT="36576" marB="36576" anchor="ctr">
+                  <a:tcPr marT="36576" marB="36576" anchor="ctr">
                     <a:solidFill>
                       <a:srgbClr val="FFFFFF"/>
                     </a:solidFill>
                   </a:tcPr>
                 </a:tc>
+                <a:extLst>
+                  <a:ext uri="{0D108BD9-81ED-4DB2-BD59-A6C34878D82A}">
+                    <a16:rowId xmlns:a16="http://schemas.microsoft.com/office/drawing/2014/main" val="10001"/>
+                  </a:ext>
+                </a:extLst>
               </a:tr>
               <a:tr h="502920">
                 <a:tc>
                   <a:txBody>
-                    <a:bodyPr wrap="square"/>
+                    <a:bodyPr/>
                     <a:lstStyle/>
                     <a:p>
                       <a:r>
@@ -7279,7 +6225,7 @@
                       </a:r>
                     </a:p>
                   </a:txBody>
-                  <a:tcPr marL="91440" marR="91440" marT="36576" marB="36576" anchor="ctr">
+                  <a:tcPr marT="36576" marB="36576" anchor="ctr">
                     <a:solidFill>
                       <a:srgbClr val="F2F4F7"/>
                     </a:solidFill>
@@ -7287,7 +6233,7 @@
                 </a:tc>
                 <a:tc>
                   <a:txBody>
-                    <a:bodyPr wrap="square"/>
+                    <a:bodyPr/>
                     <a:lstStyle/>
                     <a:p>
                       <a:r>
@@ -7301,7 +6247,7 @@
                       </a:r>
                     </a:p>
                   </a:txBody>
-                  <a:tcPr marL="91440" marR="91440" marT="36576" marB="36576" anchor="ctr">
+                  <a:tcPr marT="36576" marB="36576" anchor="ctr">
                     <a:solidFill>
                       <a:srgbClr val="F2F4F7"/>
                     </a:solidFill>
@@ -7309,7 +6255,7 @@
                 </a:tc>
                 <a:tc>
                   <a:txBody>
-                    <a:bodyPr wrap="square"/>
+                    <a:bodyPr/>
                     <a:lstStyle/>
                     <a:p>
                       <a:r>
@@ -7323,17 +6269,22 @@
                       </a:r>
                     </a:p>
                   </a:txBody>
-                  <a:tcPr marL="91440" marR="91440" marT="36576" marB="36576" anchor="ctr">
+                  <a:tcPr marT="36576" marB="36576" anchor="ctr">
                     <a:solidFill>
                       <a:srgbClr val="F2F4F7"/>
                     </a:solidFill>
                   </a:tcPr>
                 </a:tc>
+                <a:extLst>
+                  <a:ext uri="{0D108BD9-81ED-4DB2-BD59-A6C34878D82A}">
+                    <a16:rowId xmlns:a16="http://schemas.microsoft.com/office/drawing/2014/main" val="10002"/>
+                  </a:ext>
+                </a:extLst>
               </a:tr>
               <a:tr h="502920">
                 <a:tc>
                   <a:txBody>
-                    <a:bodyPr wrap="square"/>
+                    <a:bodyPr/>
                     <a:lstStyle/>
                     <a:p>
                       <a:r>
@@ -7347,7 +6298,7 @@
                       </a:r>
                     </a:p>
                   </a:txBody>
-                  <a:tcPr marL="91440" marR="91440" marT="36576" marB="36576" anchor="ctr">
+                  <a:tcPr marT="36576" marB="36576" anchor="ctr">
                     <a:solidFill>
                       <a:srgbClr val="FFFFFF"/>
                     </a:solidFill>
@@ -7355,7 +6306,7 @@
                 </a:tc>
                 <a:tc>
                   <a:txBody>
-                    <a:bodyPr wrap="square"/>
+                    <a:bodyPr/>
                     <a:lstStyle/>
                     <a:p>
                       <a:r>
@@ -7369,7 +6320,7 @@
                       </a:r>
                     </a:p>
                   </a:txBody>
-                  <a:tcPr marL="91440" marR="91440" marT="36576" marB="36576" anchor="ctr">
+                  <a:tcPr marT="36576" marB="36576" anchor="ctr">
                     <a:solidFill>
                       <a:srgbClr val="FFFFFF"/>
                     </a:solidFill>
@@ -7377,7 +6328,7 @@
                 </a:tc>
                 <a:tc>
                   <a:txBody>
-                    <a:bodyPr wrap="square"/>
+                    <a:bodyPr/>
                     <a:lstStyle/>
                     <a:p>
                       <a:r>
@@ -7391,12 +6342,17 @@
                       </a:r>
                     </a:p>
                   </a:txBody>
-                  <a:tcPr marL="91440" marR="91440" marT="36576" marB="36576" anchor="ctr">
+                  <a:tcPr marT="36576" marB="36576" anchor="ctr">
                     <a:solidFill>
                       <a:srgbClr val="FFFFFF"/>
                     </a:solidFill>
                   </a:tcPr>
                 </a:tc>
+                <a:extLst>
+                  <a:ext uri="{0D108BD9-81ED-4DB2-BD59-A6C34878D82A}">
+                    <a16:rowId xmlns:a16="http://schemas.microsoft.com/office/drawing/2014/main" val="10003"/>
+                  </a:ext>
+                </a:extLst>
               </a:tr>
             </a:tbl>
           </a:graphicData>
@@ -7443,7 +6399,9 @@
         <p:txBody>
           <a:bodyPr rtlCol="0" anchor="ctr"/>
           <a:lstStyle/>
-          <a:p/>
+          <a:p>
+            <a:endParaRPr/>
+          </a:p>
         </p:txBody>
       </p:sp>
       <p:sp>
@@ -7463,7 +6421,7 @@
           <a:noFill/>
         </p:spPr>
         <p:txBody>
-          <a:bodyPr wrap="square" anchor="t" lIns="0" rIns="0" tIns="0" bIns="0">
+          <a:bodyPr wrap="square" lIns="0" tIns="0" rIns="0" bIns="0" anchor="t">
             <a:spAutoFit/>
           </a:bodyPr>
           <a:lstStyle/>
@@ -7502,7 +6460,7 @@
           <a:noFill/>
         </p:spPr>
         <p:txBody>
-          <a:bodyPr wrap="square" anchor="t" lIns="0" rIns="0" tIns="0" bIns="0">
+          <a:bodyPr wrap="square" lIns="0" tIns="0" rIns="0" bIns="0" anchor="t">
             <a:spAutoFit/>
           </a:bodyPr>
           <a:lstStyle/>
@@ -7565,7 +6523,9 @@
         <p:txBody>
           <a:bodyPr rtlCol="0" anchor="ctr"/>
           <a:lstStyle/>
-          <a:p/>
+          <a:p>
+            <a:endParaRPr/>
+          </a:p>
         </p:txBody>
       </p:sp>
       <p:sp>
@@ -7585,7 +6545,7 @@
           <a:noFill/>
         </p:spPr>
         <p:txBody>
-          <a:bodyPr wrap="square" anchor="t" lIns="0" rIns="0" tIns="0" bIns="0">
+          <a:bodyPr wrap="square" lIns="0" tIns="0" rIns="0" bIns="0" anchor="t">
             <a:spAutoFit/>
           </a:bodyPr>
           <a:lstStyle/>
@@ -7624,7 +6584,7 @@
           <a:noFill/>
         </p:spPr>
         <p:txBody>
-          <a:bodyPr wrap="square" anchor="t" lIns="0" rIns="0" tIns="0" bIns="0">
+          <a:bodyPr wrap="square" lIns="0" tIns="0" rIns="0" bIns="0" anchor="t">
             <a:spAutoFit/>
           </a:bodyPr>
           <a:lstStyle/>
@@ -7687,7 +6647,9 @@
         <p:txBody>
           <a:bodyPr rtlCol="0" anchor="ctr"/>
           <a:lstStyle/>
-          <a:p/>
+          <a:p>
+            <a:endParaRPr/>
+          </a:p>
         </p:txBody>
       </p:sp>
       <p:sp>
@@ -7707,7 +6669,7 @@
           <a:noFill/>
         </p:spPr>
         <p:txBody>
-          <a:bodyPr wrap="square" anchor="t" lIns="0" rIns="0" tIns="0" bIns="0">
+          <a:bodyPr wrap="square" lIns="0" tIns="0" rIns="0" bIns="0" anchor="t">
             <a:spAutoFit/>
           </a:bodyPr>
           <a:lstStyle/>
@@ -7746,7 +6708,7 @@
           <a:noFill/>
         </p:spPr>
         <p:txBody>
-          <a:bodyPr wrap="square" anchor="t" lIns="0" rIns="0" tIns="0" bIns="0">
+          <a:bodyPr wrap="square" lIns="0" tIns="0" rIns="0" bIns="0" anchor="t">
             <a:spAutoFit/>
           </a:bodyPr>
           <a:lstStyle/>
@@ -7777,7 +6739,7 @@
 </file>
 
 <file path=ppt/slides/slide3.xml><?xml version="1.0" encoding="utf-8"?>
-<p:sld xmlns:a="http://schemas.openxmlformats.org/drawingml/2006/main" xmlns:p="http://schemas.openxmlformats.org/presentationml/2006/main" xmlns:r="http://schemas.openxmlformats.org/officeDocument/2006/relationships">
+<p:sld xmlns:a="http://schemas.openxmlformats.org/drawingml/2006/main" xmlns:r="http://schemas.openxmlformats.org/officeDocument/2006/relationships" xmlns:p="http://schemas.openxmlformats.org/presentationml/2006/main">
   <p:cSld>
     <p:bg>
       <p:bgPr>
@@ -7793,7 +6755,14 @@
         <p:cNvGrpSpPr/>
         <p:nvPr/>
       </p:nvGrpSpPr>
-      <p:grpSpPr/>
+      <p:grpSpPr>
+        <a:xfrm>
+          <a:off x="0" y="0"/>
+          <a:ext cx="0" cy="0"/>
+          <a:chOff x="0" y="0"/>
+          <a:chExt cx="0" cy="0"/>
+        </a:xfrm>
+      </p:grpSpPr>
       <p:sp>
         <p:nvSpPr>
           <p:cNvPr id="2" name="TextBox 1"/>
@@ -7811,7 +6780,7 @@
           <a:noFill/>
         </p:spPr>
         <p:txBody>
-          <a:bodyPr wrap="square" anchor="t" lIns="0" rIns="0" tIns="0" bIns="0">
+          <a:bodyPr wrap="square" lIns="0" tIns="0" rIns="0" bIns="0" anchor="t">
             <a:spAutoFit/>
           </a:bodyPr>
           <a:lstStyle/>
@@ -7850,7 +6819,7 @@
           <a:noFill/>
         </p:spPr>
         <p:txBody>
-          <a:bodyPr wrap="square" anchor="t" lIns="0" rIns="0" tIns="0" bIns="0">
+          <a:bodyPr wrap="square" lIns="0" tIns="0" rIns="0" bIns="0" anchor="t">
             <a:spAutoFit/>
           </a:bodyPr>
           <a:lstStyle/>
@@ -7881,7 +6850,7 @@
           <p:nvPr/>
         </p:nvPicPr>
         <p:blipFill>
-          <a:blip r:embed="rId2"/>
+          <a:blip r:embed="rId3"/>
           <a:stretch>
             <a:fillRect/>
           </a:stretch>
@@ -7913,7 +6882,7 @@
           <a:noFill/>
         </p:spPr>
         <p:txBody>
-          <a:bodyPr wrap="square" anchor="t" lIns="0" rIns="0" tIns="0" bIns="0">
+          <a:bodyPr wrap="square" lIns="0" tIns="0" rIns="0" bIns="0" anchor="t">
             <a:spAutoFit/>
           </a:bodyPr>
           <a:lstStyle/>
@@ -7952,7 +6921,7 @@
           <a:noFill/>
         </p:spPr>
         <p:txBody>
-          <a:bodyPr wrap="square" anchor="t" lIns="0" rIns="0" tIns="0" bIns="0">
+          <a:bodyPr wrap="square" lIns="0" tIns="0" rIns="0" bIns="0" anchor="t">
             <a:spAutoFit/>
           </a:bodyPr>
           <a:lstStyle/>
@@ -7991,7 +6960,7 @@
           <a:noFill/>
         </p:spPr>
         <p:txBody>
-          <a:bodyPr wrap="square" anchor="t" lIns="0" rIns="0" tIns="0" bIns="0">
+          <a:bodyPr wrap="square" lIns="0" tIns="0" rIns="0" bIns="0" anchor="t">
             <a:spAutoFit/>
           </a:bodyPr>
           <a:lstStyle/>
@@ -8054,7 +7023,9 @@
         <p:txBody>
           <a:bodyPr rtlCol="0" anchor="ctr"/>
           <a:lstStyle/>
-          <a:p/>
+          <a:p>
+            <a:endParaRPr/>
+          </a:p>
         </p:txBody>
       </p:sp>
       <p:sp>
@@ -8074,7 +7045,7 @@
           <a:noFill/>
         </p:spPr>
         <p:txBody>
-          <a:bodyPr wrap="square" anchor="ctr" lIns="0" rIns="0" tIns="0" bIns="0">
+          <a:bodyPr wrap="square" lIns="0" tIns="0" rIns="0" bIns="0" anchor="ctr">
             <a:spAutoFit/>
           </a:bodyPr>
           <a:lstStyle/>
@@ -8212,14 +7183,32 @@
                 <a:tableStyleId>{2D5ABB26-0587-4C30-8999-92F81FD0307C}</a:tableStyleId>
               </a:tblPr>
               <a:tblGrid>
-                <a:gridCol w="1371600"/>
-                <a:gridCol w="2011680"/>
-                <a:gridCol w="2011680"/>
+                <a:gridCol w="1371600">
+                  <a:extLst>
+                    <a:ext uri="{9D8B030D-6E8A-4147-A177-3AD203B41FA5}">
+                      <a16:colId xmlns:a16="http://schemas.microsoft.com/office/drawing/2014/main" val="20000"/>
+                    </a:ext>
+                  </a:extLst>
+                </a:gridCol>
+                <a:gridCol w="2011680">
+                  <a:extLst>
+                    <a:ext uri="{9D8B030D-6E8A-4147-A177-3AD203B41FA5}">
+                      <a16:colId xmlns:a16="http://schemas.microsoft.com/office/drawing/2014/main" val="20001"/>
+                    </a:ext>
+                  </a:extLst>
+                </a:gridCol>
+                <a:gridCol w="2011680">
+                  <a:extLst>
+                    <a:ext uri="{9D8B030D-6E8A-4147-A177-3AD203B41FA5}">
+                      <a16:colId xmlns:a16="http://schemas.microsoft.com/office/drawing/2014/main" val="20002"/>
+                    </a:ext>
+                  </a:extLst>
+                </a:gridCol>
               </a:tblGrid>
               <a:tr h="475488">
                 <a:tc>
                   <a:txBody>
-                    <a:bodyPr wrap="square"/>
+                    <a:bodyPr/>
                     <a:lstStyle/>
                     <a:p>
                       <a:r>
@@ -8233,7 +7222,7 @@
                       </a:r>
                     </a:p>
                   </a:txBody>
-                  <a:tcPr marL="91440" marR="91440" marT="36576" marB="36576" anchor="ctr">
+                  <a:tcPr marT="36576" marB="36576" anchor="ctr">
                     <a:solidFill>
                       <a:srgbClr val="0E1726"/>
                     </a:solidFill>
@@ -8241,7 +7230,7 @@
                 </a:tc>
                 <a:tc>
                   <a:txBody>
-                    <a:bodyPr wrap="square"/>
+                    <a:bodyPr/>
                     <a:lstStyle/>
                     <a:p>
                       <a:r>
@@ -8255,7 +7244,7 @@
                       </a:r>
                     </a:p>
                   </a:txBody>
-                  <a:tcPr marL="91440" marR="91440" marT="36576" marB="36576" anchor="ctr">
+                  <a:tcPr marT="36576" marB="36576" anchor="ctr">
                     <a:solidFill>
                       <a:srgbClr val="0E1726"/>
                     </a:solidFill>
@@ -8263,7 +7252,7 @@
                 </a:tc>
                 <a:tc>
                   <a:txBody>
-                    <a:bodyPr wrap="square"/>
+                    <a:bodyPr/>
                     <a:lstStyle/>
                     <a:p>
                       <a:r>
@@ -8286,17 +7275,22 @@
                       </a:r>
                     </a:p>
                   </a:txBody>
-                  <a:tcPr marL="91440" marR="91440" marT="36576" marB="36576" anchor="ctr">
+                  <a:tcPr marT="36576" marB="36576" anchor="ctr">
                     <a:solidFill>
                       <a:srgbClr val="0E1726"/>
                     </a:solidFill>
                   </a:tcPr>
                 </a:tc>
+                <a:extLst>
+                  <a:ext uri="{0D108BD9-81ED-4DB2-BD59-A6C34878D82A}">
+                    <a16:rowId xmlns:a16="http://schemas.microsoft.com/office/drawing/2014/main" val="10000"/>
+                  </a:ext>
+                </a:extLst>
               </a:tr>
               <a:tr h="475488">
                 <a:tc>
                   <a:txBody>
-                    <a:bodyPr wrap="square"/>
+                    <a:bodyPr/>
                     <a:lstStyle/>
                     <a:p>
                       <a:r>
@@ -8310,7 +7304,7 @@
                       </a:r>
                     </a:p>
                   </a:txBody>
-                  <a:tcPr marL="91440" marR="91440" marT="36576" marB="36576" anchor="ctr">
+                  <a:tcPr marT="36576" marB="36576" anchor="ctr">
                     <a:solidFill>
                       <a:srgbClr val="FFFFFF"/>
                     </a:solidFill>
@@ -8318,7 +7312,7 @@
                 </a:tc>
                 <a:tc>
                   <a:txBody>
-                    <a:bodyPr wrap="square"/>
+                    <a:bodyPr/>
                     <a:lstStyle/>
                     <a:p>
                       <a:r>
@@ -8332,7 +7326,7 @@
                       </a:r>
                     </a:p>
                   </a:txBody>
-                  <a:tcPr marL="91440" marR="91440" marT="36576" marB="36576" anchor="ctr">
+                  <a:tcPr marT="36576" marB="36576" anchor="ctr">
                     <a:solidFill>
                       <a:srgbClr val="FFFFFF"/>
                     </a:solidFill>
@@ -8340,7 +7334,7 @@
                 </a:tc>
                 <a:tc>
                   <a:txBody>
-                    <a:bodyPr wrap="square"/>
+                    <a:bodyPr/>
                     <a:lstStyle/>
                     <a:p>
                       <a:r>
@@ -8354,17 +7348,22 @@
                       </a:r>
                     </a:p>
                   </a:txBody>
-                  <a:tcPr marL="91440" marR="91440" marT="36576" marB="36576" anchor="ctr">
+                  <a:tcPr marT="36576" marB="36576" anchor="ctr">
                     <a:solidFill>
                       <a:srgbClr val="FFFFFF"/>
                     </a:solidFill>
                   </a:tcPr>
                 </a:tc>
+                <a:extLst>
+                  <a:ext uri="{0D108BD9-81ED-4DB2-BD59-A6C34878D82A}">
+                    <a16:rowId xmlns:a16="http://schemas.microsoft.com/office/drawing/2014/main" val="10001"/>
+                  </a:ext>
+                </a:extLst>
               </a:tr>
               <a:tr h="475488">
                 <a:tc>
                   <a:txBody>
-                    <a:bodyPr wrap="square"/>
+                    <a:bodyPr/>
                     <a:lstStyle/>
                     <a:p>
                       <a:r>
@@ -8378,7 +7377,7 @@
                       </a:r>
                     </a:p>
                   </a:txBody>
-                  <a:tcPr marL="91440" marR="91440" marT="36576" marB="36576" anchor="ctr">
+                  <a:tcPr marT="36576" marB="36576" anchor="ctr">
                     <a:solidFill>
                       <a:srgbClr val="F2F4F7"/>
                     </a:solidFill>
@@ -8386,7 +7385,7 @@
                 </a:tc>
                 <a:tc>
                   <a:txBody>
-                    <a:bodyPr wrap="square"/>
+                    <a:bodyPr/>
                     <a:lstStyle/>
                     <a:p>
                       <a:r>
@@ -8400,7 +7399,7 @@
                       </a:r>
                     </a:p>
                   </a:txBody>
-                  <a:tcPr marL="91440" marR="91440" marT="36576" marB="36576" anchor="ctr">
+                  <a:tcPr marT="36576" marB="36576" anchor="ctr">
                     <a:solidFill>
                       <a:srgbClr val="F2F4F7"/>
                     </a:solidFill>
@@ -8408,7 +7407,7 @@
                 </a:tc>
                 <a:tc>
                   <a:txBody>
-                    <a:bodyPr wrap="square"/>
+                    <a:bodyPr/>
                     <a:lstStyle/>
                     <a:p>
                       <a:r>
@@ -8422,17 +7421,22 @@
                       </a:r>
                     </a:p>
                   </a:txBody>
-                  <a:tcPr marL="91440" marR="91440" marT="36576" marB="36576" anchor="ctr">
+                  <a:tcPr marT="36576" marB="36576" anchor="ctr">
                     <a:solidFill>
                       <a:srgbClr val="F2F4F7"/>
                     </a:solidFill>
                   </a:tcPr>
                 </a:tc>
+                <a:extLst>
+                  <a:ext uri="{0D108BD9-81ED-4DB2-BD59-A6C34878D82A}">
+                    <a16:rowId xmlns:a16="http://schemas.microsoft.com/office/drawing/2014/main" val="10002"/>
+                  </a:ext>
+                </a:extLst>
               </a:tr>
               <a:tr h="475488">
                 <a:tc>
                   <a:txBody>
-                    <a:bodyPr wrap="square"/>
+                    <a:bodyPr/>
                     <a:lstStyle/>
                     <a:p>
                       <a:r>
@@ -8446,7 +7450,7 @@
                       </a:r>
                     </a:p>
                   </a:txBody>
-                  <a:tcPr marL="91440" marR="91440" marT="36576" marB="36576" anchor="ctr">
+                  <a:tcPr marT="36576" marB="36576" anchor="ctr">
                     <a:solidFill>
                       <a:srgbClr val="FFFFFF"/>
                     </a:solidFill>
@@ -8454,7 +7458,7 @@
                 </a:tc>
                 <a:tc>
                   <a:txBody>
-                    <a:bodyPr wrap="square"/>
+                    <a:bodyPr/>
                     <a:lstStyle/>
                     <a:p>
                       <a:r>
@@ -8468,7 +7472,7 @@
                       </a:r>
                     </a:p>
                   </a:txBody>
-                  <a:tcPr marL="91440" marR="91440" marT="36576" marB="36576" anchor="ctr">
+                  <a:tcPr marT="36576" marB="36576" anchor="ctr">
                     <a:solidFill>
                       <a:srgbClr val="FFFFFF"/>
                     </a:solidFill>
@@ -8476,7 +7480,7 @@
                 </a:tc>
                 <a:tc>
                   <a:txBody>
-                    <a:bodyPr wrap="square"/>
+                    <a:bodyPr/>
                     <a:lstStyle/>
                     <a:p>
                       <a:r>
@@ -8490,12 +7494,17 @@
                       </a:r>
                     </a:p>
                   </a:txBody>
-                  <a:tcPr marL="91440" marR="91440" marT="36576" marB="36576" anchor="ctr">
+                  <a:tcPr marT="36576" marB="36576" anchor="ctr">
                     <a:solidFill>
                       <a:srgbClr val="FFFFFF"/>
                     </a:solidFill>
                   </a:tcPr>
                 </a:tc>
+                <a:extLst>
+                  <a:ext uri="{0D108BD9-81ED-4DB2-BD59-A6C34878D82A}">
+                    <a16:rowId xmlns:a16="http://schemas.microsoft.com/office/drawing/2014/main" val="10003"/>
+                  </a:ext>
+                </a:extLst>
               </a:tr>
             </a:tbl>
           </a:graphicData>
@@ -8518,7 +7527,7 @@
           <a:noFill/>
         </p:spPr>
         <p:txBody>
-          <a:bodyPr wrap="square" anchor="t" lIns="0" rIns="0" tIns="0" bIns="0">
+          <a:bodyPr wrap="square" lIns="0" tIns="0" rIns="0" bIns="0" anchor="t">
             <a:spAutoFit/>
           </a:bodyPr>
           <a:lstStyle/>
@@ -8599,7 +7608,9 @@
         <p:txBody>
           <a:bodyPr rtlCol="0" anchor="ctr"/>
           <a:lstStyle/>
-          <a:p/>
+          <a:p>
+            <a:endParaRPr/>
+          </a:p>
         </p:txBody>
       </p:sp>
       <p:sp>
@@ -8619,7 +7630,7 @@
           <a:noFill/>
         </p:spPr>
         <p:txBody>
-          <a:bodyPr wrap="square" anchor="ctr" lIns="0" rIns="0" tIns="0" bIns="0">
+          <a:bodyPr wrap="square" lIns="0" tIns="0" rIns="0" bIns="0" anchor="ctr">
             <a:spAutoFit/>
           </a:bodyPr>
           <a:lstStyle/>
@@ -8718,7 +7729,9 @@
         <p:txBody>
           <a:bodyPr rtlCol="0" anchor="ctr"/>
           <a:lstStyle/>
-          <a:p/>
+          <a:p>
+            <a:endParaRPr/>
+          </a:p>
         </p:txBody>
       </p:sp>
       <p:sp>
@@ -8738,7 +7751,7 @@
           <a:noFill/>
         </p:spPr>
         <p:txBody>
-          <a:bodyPr wrap="square" anchor="ctr" lIns="0" rIns="0" tIns="0" bIns="0">
+          <a:bodyPr wrap="square" lIns="0" tIns="0" rIns="0" bIns="0" anchor="ctr">
             <a:spAutoFit/>
           </a:bodyPr>
           <a:lstStyle/>
@@ -8837,7 +7850,9 @@
         <p:txBody>
           <a:bodyPr rtlCol="0" anchor="ctr"/>
           <a:lstStyle/>
-          <a:p/>
+          <a:p>
+            <a:endParaRPr/>
+          </a:p>
         </p:txBody>
       </p:sp>
       <p:sp>
@@ -8857,7 +7872,7 @@
           <a:noFill/>
         </p:spPr>
         <p:txBody>
-          <a:bodyPr wrap="square" anchor="ctr" lIns="0" rIns="0" tIns="0" bIns="0">
+          <a:bodyPr wrap="square" lIns="0" tIns="0" rIns="0" bIns="0" anchor="ctr">
             <a:spAutoFit/>
           </a:bodyPr>
           <a:lstStyle/>
@@ -8920,7 +7935,9 @@
         <p:txBody>
           <a:bodyPr rtlCol="0" anchor="ctr"/>
           <a:lstStyle/>
-          <a:p/>
+          <a:p>
+            <a:endParaRPr/>
+          </a:p>
         </p:txBody>
       </p:sp>
       <p:sp>
@@ -8940,7 +7957,7 @@
           <a:noFill/>
         </p:spPr>
         <p:txBody>
-          <a:bodyPr wrap="square" anchor="ctr" lIns="0" rIns="0" tIns="0" bIns="0">
+          <a:bodyPr wrap="square" lIns="0" tIns="0" rIns="0" bIns="0" anchor="ctr">
             <a:spAutoFit/>
           </a:bodyPr>
           <a:lstStyle/>
@@ -9058,7 +8075,7 @@
           <a:noFill/>
         </p:spPr>
         <p:txBody>
-          <a:bodyPr wrap="square" anchor="t" lIns="0" rIns="0" tIns="0" bIns="0">
+          <a:bodyPr wrap="square" lIns="0" tIns="0" rIns="0" bIns="0" anchor="t">
             <a:spAutoFit/>
           </a:bodyPr>
           <a:lstStyle/>
@@ -9115,7 +8132,7 @@
           <a:noFill/>
         </p:spPr>
         <p:txBody>
-          <a:bodyPr wrap="square" anchor="t" lIns="0" rIns="0" tIns="0" bIns="0">
+          <a:bodyPr wrap="square" lIns="0" tIns="0" rIns="0" bIns="0" anchor="t">
             <a:spAutoFit/>
           </a:bodyPr>
           <a:lstStyle/>
@@ -9178,7 +8195,9 @@
         <p:txBody>
           <a:bodyPr rtlCol="0" anchor="ctr"/>
           <a:lstStyle/>
-          <a:p/>
+          <a:p>
+            <a:endParaRPr/>
+          </a:p>
         </p:txBody>
       </p:sp>
       <p:sp>
@@ -9198,7 +8217,7 @@
           <a:noFill/>
         </p:spPr>
         <p:txBody>
-          <a:bodyPr wrap="square" anchor="ctr" lIns="0" rIns="0" tIns="0" bIns="0">
+          <a:bodyPr wrap="square" lIns="0" tIns="0" rIns="0" bIns="0" anchor="ctr">
             <a:spAutoFit/>
           </a:bodyPr>
           <a:lstStyle/>
@@ -9263,7 +8282,9 @@
         <p:txBody>
           <a:bodyPr rtlCol="0" anchor="ctr"/>
           <a:lstStyle/>
-          <a:p/>
+          <a:p>
+            <a:endParaRPr/>
+          </a:p>
         </p:txBody>
       </p:sp>
       <p:sp>
@@ -9283,7 +8304,7 @@
           <a:noFill/>
         </p:spPr>
         <p:txBody>
-          <a:bodyPr wrap="square" anchor="ctr" lIns="0" rIns="0" tIns="0" bIns="0">
+          <a:bodyPr wrap="square" lIns="0" tIns="0" rIns="0" bIns="0" anchor="ctr">
             <a:spAutoFit/>
           </a:bodyPr>
           <a:lstStyle/>
@@ -9346,7 +8367,9 @@
         <p:txBody>
           <a:bodyPr rtlCol="0" anchor="ctr"/>
           <a:lstStyle/>
-          <a:p/>
+          <a:p>
+            <a:endParaRPr/>
+          </a:p>
         </p:txBody>
       </p:sp>
       <p:sp>
@@ -9366,7 +8389,7 @@
           <a:noFill/>
         </p:spPr>
         <p:txBody>
-          <a:bodyPr wrap="square" anchor="ctr" lIns="0" rIns="0" tIns="0" bIns="0">
+          <a:bodyPr wrap="square" lIns="0" tIns="0" rIns="0" bIns="0" anchor="ctr">
             <a:spAutoFit/>
           </a:bodyPr>
           <a:lstStyle/>
@@ -9429,7 +8452,9 @@
         <p:txBody>
           <a:bodyPr rtlCol="0" anchor="ctr"/>
           <a:lstStyle/>
-          <a:p/>
+          <a:p>
+            <a:endParaRPr/>
+          </a:p>
         </p:txBody>
       </p:sp>
       <p:sp>
@@ -9449,7 +8474,7 @@
           <a:noFill/>
         </p:spPr>
         <p:txBody>
-          <a:bodyPr wrap="square" anchor="ctr" lIns="0" rIns="0" tIns="0" bIns="0">
+          <a:bodyPr wrap="square" lIns="0" tIns="0" rIns="0" bIns="0" anchor="ctr">
             <a:spAutoFit/>
           </a:bodyPr>
           <a:lstStyle/>
@@ -9512,7 +8537,9 @@
         <p:txBody>
           <a:bodyPr rtlCol="0" anchor="ctr"/>
           <a:lstStyle/>
-          <a:p/>
+          <a:p>
+            <a:endParaRPr/>
+          </a:p>
         </p:txBody>
       </p:sp>
       <p:sp>
@@ -9532,7 +8559,7 @@
           <a:noFill/>
         </p:spPr>
         <p:txBody>
-          <a:bodyPr wrap="square" anchor="ctr" lIns="0" rIns="0" tIns="0" bIns="0">
+          <a:bodyPr wrap="square" lIns="0" tIns="0" rIns="0" bIns="0" anchor="ctr">
             <a:spAutoFit/>
           </a:bodyPr>
           <a:lstStyle/>
@@ -9595,7 +8622,9 @@
         <p:txBody>
           <a:bodyPr rtlCol="0" anchor="ctr"/>
           <a:lstStyle/>
-          <a:p/>
+          <a:p>
+            <a:endParaRPr/>
+          </a:p>
         </p:txBody>
       </p:sp>
       <p:sp>
@@ -9615,7 +8644,7 @@
           <a:noFill/>
         </p:spPr>
         <p:txBody>
-          <a:bodyPr wrap="square" anchor="ctr" lIns="0" rIns="0" tIns="0" bIns="0">
+          <a:bodyPr wrap="square" lIns="0" tIns="0" rIns="0" bIns="0" anchor="ctr">
             <a:spAutoFit/>
           </a:bodyPr>
           <a:lstStyle/>
@@ -9678,7 +8707,9 @@
         <p:txBody>
           <a:bodyPr rtlCol="0" anchor="ctr"/>
           <a:lstStyle/>
-          <a:p/>
+          <a:p>
+            <a:endParaRPr/>
+          </a:p>
         </p:txBody>
       </p:sp>
       <p:sp>
@@ -9698,7 +8729,7 @@
           <a:noFill/>
         </p:spPr>
         <p:txBody>
-          <a:bodyPr wrap="square" anchor="ctr" lIns="0" rIns="0" tIns="0" bIns="0">
+          <a:bodyPr wrap="square" lIns="0" tIns="0" rIns="0" bIns="0" anchor="ctr">
             <a:spAutoFit/>
           </a:bodyPr>
           <a:lstStyle/>
@@ -9761,7 +8792,9 @@
         <p:txBody>
           <a:bodyPr rtlCol="0" anchor="ctr"/>
           <a:lstStyle/>
-          <a:p/>
+          <a:p>
+            <a:endParaRPr/>
+          </a:p>
         </p:txBody>
       </p:sp>
       <p:sp>
@@ -9781,7 +8814,7 @@
           <a:noFill/>
         </p:spPr>
         <p:txBody>
-          <a:bodyPr wrap="square" anchor="ctr" lIns="0" rIns="0" tIns="0" bIns="0">
+          <a:bodyPr wrap="square" lIns="0" tIns="0" rIns="0" bIns="0" anchor="ctr">
             <a:spAutoFit/>
           </a:bodyPr>
           <a:lstStyle/>
@@ -9844,7 +8877,9 @@
         <p:txBody>
           <a:bodyPr rtlCol="0" anchor="ctr"/>
           <a:lstStyle/>
-          <a:p/>
+          <a:p>
+            <a:endParaRPr/>
+          </a:p>
         </p:txBody>
       </p:sp>
       <p:sp>
@@ -9864,7 +8899,7 @@
           <a:noFill/>
         </p:spPr>
         <p:txBody>
-          <a:bodyPr wrap="square" anchor="ctr" lIns="0" rIns="0" tIns="0" bIns="0">
+          <a:bodyPr wrap="square" lIns="0" tIns="0" rIns="0" bIns="0" anchor="ctr">
             <a:spAutoFit/>
           </a:bodyPr>
           <a:lstStyle/>
@@ -9895,7 +8930,7 @@
 </file>
 
 <file path=ppt/slides/slide4.xml><?xml version="1.0" encoding="utf-8"?>
-<p:sld xmlns:a="http://schemas.openxmlformats.org/drawingml/2006/main" xmlns:p="http://schemas.openxmlformats.org/presentationml/2006/main" xmlns:r="http://schemas.openxmlformats.org/officeDocument/2006/relationships">
+<p:sld xmlns:a="http://schemas.openxmlformats.org/drawingml/2006/main" xmlns:r="http://schemas.openxmlformats.org/officeDocument/2006/relationships" xmlns:p="http://schemas.openxmlformats.org/presentationml/2006/main">
   <p:cSld>
     <p:bg>
       <p:bgPr>
@@ -9911,7 +8946,14 @@
         <p:cNvGrpSpPr/>
         <p:nvPr/>
       </p:nvGrpSpPr>
-      <p:grpSpPr/>
+      <p:grpSpPr>
+        <a:xfrm>
+          <a:off x="0" y="0"/>
+          <a:ext cx="0" cy="0"/>
+          <a:chOff x="0" y="0"/>
+          <a:chExt cx="0" cy="0"/>
+        </a:xfrm>
+      </p:grpSpPr>
       <p:sp>
         <p:nvSpPr>
           <p:cNvPr id="2" name="TextBox 1"/>
@@ -9929,7 +8971,7 @@
           <a:noFill/>
         </p:spPr>
         <p:txBody>
-          <a:bodyPr wrap="square" anchor="t" lIns="0" rIns="0" tIns="0" bIns="0">
+          <a:bodyPr wrap="square" lIns="0" tIns="0" rIns="0" bIns="0" anchor="t">
             <a:spAutoFit/>
           </a:bodyPr>
           <a:lstStyle/>
@@ -9968,7 +9010,7 @@
           <a:noFill/>
         </p:spPr>
         <p:txBody>
-          <a:bodyPr wrap="square" anchor="t" lIns="0" rIns="0" tIns="0" bIns="0">
+          <a:bodyPr wrap="square" lIns="0" tIns="0" rIns="0" bIns="0" anchor="t">
             <a:spAutoFit/>
           </a:bodyPr>
           <a:lstStyle/>
@@ -9999,7 +9041,7 @@
           <p:nvPr/>
         </p:nvPicPr>
         <p:blipFill>
-          <a:blip r:embed="rId2"/>
+          <a:blip r:embed="rId3"/>
           <a:stretch>
             <a:fillRect/>
           </a:stretch>
@@ -10031,7 +9073,7 @@
           <a:noFill/>
         </p:spPr>
         <p:txBody>
-          <a:bodyPr wrap="square" anchor="t" lIns="0" rIns="0" tIns="0" bIns="0">
+          <a:bodyPr wrap="square" lIns="0" tIns="0" rIns="0" bIns="0" anchor="t">
             <a:spAutoFit/>
           </a:bodyPr>
           <a:lstStyle/>
@@ -10070,7 +9112,7 @@
           <a:noFill/>
         </p:spPr>
         <p:txBody>
-          <a:bodyPr wrap="square" anchor="t" lIns="0" rIns="0" tIns="0" bIns="0">
+          <a:bodyPr wrap="square" lIns="0" tIns="0" rIns="0" bIns="0" anchor="t">
             <a:spAutoFit/>
           </a:bodyPr>
           <a:lstStyle/>
@@ -10109,7 +9151,7 @@
           <a:noFill/>
         </p:spPr>
         <p:txBody>
-          <a:bodyPr wrap="square" anchor="t" lIns="0" rIns="0" tIns="0" bIns="0">
+          <a:bodyPr wrap="square" lIns="0" tIns="0" rIns="0" bIns="0" anchor="t">
             <a:spAutoFit/>
           </a:bodyPr>
           <a:lstStyle/>
@@ -10196,7 +9238,9 @@
         <p:txBody>
           <a:bodyPr rtlCol="0" anchor="ctr"/>
           <a:lstStyle/>
-          <a:p/>
+          <a:p>
+            <a:endParaRPr/>
+          </a:p>
         </p:txBody>
       </p:sp>
       <p:sp>
@@ -10216,7 +9260,7 @@
           <a:noFill/>
         </p:spPr>
         <p:txBody>
-          <a:bodyPr wrap="square" anchor="ctr" lIns="0" rIns="0" tIns="0" bIns="0">
+          <a:bodyPr wrap="square" lIns="0" tIns="0" rIns="0" bIns="0" anchor="ctr">
             <a:spAutoFit/>
           </a:bodyPr>
           <a:lstStyle/>
@@ -10298,7 +9342,7 @@
           <a:noFill/>
         </p:spPr>
         <p:txBody>
-          <a:bodyPr wrap="square" anchor="t" lIns="0" rIns="0" tIns="0" bIns="0">
+          <a:bodyPr wrap="square" lIns="0" tIns="0" rIns="0" bIns="0" anchor="t">
             <a:spAutoFit/>
           </a:bodyPr>
           <a:lstStyle/>
@@ -10405,7 +9449,9 @@
         <p:txBody>
           <a:bodyPr rtlCol="0" anchor="ctr"/>
           <a:lstStyle/>
-          <a:p/>
+          <a:p>
+            <a:endParaRPr/>
+          </a:p>
         </p:txBody>
       </p:sp>
       <p:sp>
@@ -10425,7 +9471,7 @@
           <a:noFill/>
         </p:spPr>
         <p:txBody>
-          <a:bodyPr wrap="square" anchor="t" lIns="0" rIns="0" tIns="0" bIns="0">
+          <a:bodyPr wrap="square" lIns="0" tIns="0" rIns="0" bIns="0" anchor="t">
             <a:spAutoFit/>
           </a:bodyPr>
           <a:lstStyle/>
@@ -10464,7 +9510,7 @@
           <a:noFill/>
         </p:spPr>
         <p:txBody>
-          <a:bodyPr wrap="square" anchor="t" lIns="0" rIns="0" tIns="0" bIns="0">
+          <a:bodyPr wrap="square" lIns="0" tIns="0" rIns="0" bIns="0" anchor="t">
             <a:spAutoFit/>
           </a:bodyPr>
           <a:lstStyle/>
@@ -10513,7 +9559,7 @@
 </file>
 
 <file path=ppt/slides/slide5.xml><?xml version="1.0" encoding="utf-8"?>
-<p:sld xmlns:a="http://schemas.openxmlformats.org/drawingml/2006/main" xmlns:p="http://schemas.openxmlformats.org/presentationml/2006/main" xmlns:r="http://schemas.openxmlformats.org/officeDocument/2006/relationships">
+<p:sld xmlns:a="http://schemas.openxmlformats.org/drawingml/2006/main" xmlns:r="http://schemas.openxmlformats.org/officeDocument/2006/relationships" xmlns:p="http://schemas.openxmlformats.org/presentationml/2006/main">
   <p:cSld>
     <p:bg>
       <p:bgPr>
@@ -10529,7 +9575,14 @@
         <p:cNvGrpSpPr/>
         <p:nvPr/>
       </p:nvGrpSpPr>
-      <p:grpSpPr/>
+      <p:grpSpPr>
+        <a:xfrm>
+          <a:off x="0" y="0"/>
+          <a:ext cx="0" cy="0"/>
+          <a:chOff x="0" y="0"/>
+          <a:chExt cx="0" cy="0"/>
+        </a:xfrm>
+      </p:grpSpPr>
       <p:sp>
         <p:nvSpPr>
           <p:cNvPr id="2" name="TextBox 1"/>
@@ -10547,7 +9600,7 @@
           <a:noFill/>
         </p:spPr>
         <p:txBody>
-          <a:bodyPr wrap="square" anchor="t" lIns="0" rIns="0" tIns="0" bIns="0">
+          <a:bodyPr wrap="square" lIns="0" tIns="0" rIns="0" bIns="0" anchor="t">
             <a:spAutoFit/>
           </a:bodyPr>
           <a:lstStyle/>
@@ -10586,7 +9639,7 @@
           <a:noFill/>
         </p:spPr>
         <p:txBody>
-          <a:bodyPr wrap="square" anchor="t" lIns="0" rIns="0" tIns="0" bIns="0">
+          <a:bodyPr wrap="square" lIns="0" tIns="0" rIns="0" bIns="0" anchor="t">
             <a:spAutoFit/>
           </a:bodyPr>
           <a:lstStyle/>
@@ -10617,7 +9670,7 @@
           <p:nvPr/>
         </p:nvPicPr>
         <p:blipFill>
-          <a:blip r:embed="rId2"/>
+          <a:blip r:embed="rId3"/>
           <a:stretch>
             <a:fillRect/>
           </a:stretch>
@@ -10649,7 +9702,7 @@
           <a:noFill/>
         </p:spPr>
         <p:txBody>
-          <a:bodyPr wrap="square" anchor="t" lIns="0" rIns="0" tIns="0" bIns="0">
+          <a:bodyPr wrap="square" lIns="0" tIns="0" rIns="0" bIns="0" anchor="t">
             <a:spAutoFit/>
           </a:bodyPr>
           <a:lstStyle/>
@@ -10688,7 +9741,7 @@
           <a:noFill/>
         </p:spPr>
         <p:txBody>
-          <a:bodyPr wrap="square" anchor="t" lIns="0" rIns="0" tIns="0" bIns="0">
+          <a:bodyPr wrap="square" lIns="0" tIns="0" rIns="0" bIns="0" anchor="t">
             <a:spAutoFit/>
           </a:bodyPr>
           <a:lstStyle/>
@@ -10727,7 +9780,7 @@
           <a:noFill/>
         </p:spPr>
         <p:txBody>
-          <a:bodyPr wrap="square" anchor="t" lIns="0" rIns="0" tIns="0" bIns="0">
+          <a:bodyPr wrap="square" lIns="0" tIns="0" rIns="0" bIns="0" anchor="t">
             <a:spAutoFit/>
           </a:bodyPr>
           <a:lstStyle/>
@@ -10790,7 +9843,7 @@
           <a:noFill/>
         </p:spPr>
         <p:txBody>
-          <a:bodyPr wrap="square" anchor="t" lIns="0" rIns="0" tIns="0" bIns="0">
+          <a:bodyPr wrap="square" lIns="0" tIns="0" rIns="0" bIns="0" anchor="t">
             <a:spAutoFit/>
           </a:bodyPr>
           <a:lstStyle/>
@@ -10829,7 +9882,7 @@
           <a:noFill/>
         </p:spPr>
         <p:txBody>
-          <a:bodyPr wrap="square" anchor="t" lIns="0" rIns="0" tIns="0" bIns="0">
+          <a:bodyPr wrap="square" lIns="0" tIns="0" rIns="0" bIns="0" anchor="t">
             <a:spAutoFit/>
           </a:bodyPr>
           <a:lstStyle/>
@@ -10868,7 +9921,7 @@
           <a:noFill/>
         </p:spPr>
         <p:txBody>
-          <a:bodyPr wrap="square" anchor="t" lIns="0" rIns="0" tIns="0" bIns="0">
+          <a:bodyPr wrap="square" lIns="0" tIns="0" rIns="0" bIns="0" anchor="t">
             <a:spAutoFit/>
           </a:bodyPr>
           <a:lstStyle/>
@@ -10907,7 +9960,7 @@
           <a:noFill/>
         </p:spPr>
         <p:txBody>
-          <a:bodyPr wrap="square" anchor="t" lIns="0" rIns="0" tIns="0" bIns="0">
+          <a:bodyPr wrap="square" lIns="0" tIns="0" rIns="0" bIns="0" anchor="t">
             <a:spAutoFit/>
           </a:bodyPr>
           <a:lstStyle/>
@@ -10946,7 +9999,7 @@
           <a:noFill/>
         </p:spPr>
         <p:txBody>
-          <a:bodyPr wrap="square" anchor="t" lIns="0" rIns="0" tIns="0" bIns="0">
+          <a:bodyPr wrap="square" lIns="0" tIns="0" rIns="0" bIns="0" anchor="t">
             <a:spAutoFit/>
           </a:bodyPr>
           <a:lstStyle/>
@@ -10985,7 +10038,7 @@
           <a:noFill/>
         </p:spPr>
         <p:txBody>
-          <a:bodyPr wrap="square" anchor="t" lIns="0" rIns="0" tIns="0" bIns="0">
+          <a:bodyPr wrap="square" lIns="0" tIns="0" rIns="0" bIns="0" anchor="t">
             <a:spAutoFit/>
           </a:bodyPr>
           <a:lstStyle/>
@@ -11016,7 +10069,7 @@
 </file>
 
 <file path=ppt/slides/slide6.xml><?xml version="1.0" encoding="utf-8"?>
-<p:sld xmlns:a="http://schemas.openxmlformats.org/drawingml/2006/main" xmlns:p="http://schemas.openxmlformats.org/presentationml/2006/main" xmlns:r="http://schemas.openxmlformats.org/officeDocument/2006/relationships">
+<p:sld xmlns:a="http://schemas.openxmlformats.org/drawingml/2006/main" xmlns:r="http://schemas.openxmlformats.org/officeDocument/2006/relationships" xmlns:p="http://schemas.openxmlformats.org/presentationml/2006/main">
   <p:cSld>
     <p:bg>
       <p:bgPr>
@@ -11032,7 +10085,14 @@
         <p:cNvGrpSpPr/>
         <p:nvPr/>
       </p:nvGrpSpPr>
-      <p:grpSpPr/>
+      <p:grpSpPr>
+        <a:xfrm>
+          <a:off x="0" y="0"/>
+          <a:ext cx="0" cy="0"/>
+          <a:chOff x="0" y="0"/>
+          <a:chExt cx="0" cy="0"/>
+        </a:xfrm>
+      </p:grpSpPr>
       <p:sp>
         <p:nvSpPr>
           <p:cNvPr id="2" name="TextBox 1"/>
@@ -11050,7 +10110,7 @@
           <a:noFill/>
         </p:spPr>
         <p:txBody>
-          <a:bodyPr wrap="square" anchor="t" lIns="0" rIns="0" tIns="0" bIns="0">
+          <a:bodyPr wrap="square" lIns="0" tIns="0" rIns="0" bIns="0" anchor="t">
             <a:spAutoFit/>
           </a:bodyPr>
           <a:lstStyle/>
@@ -11089,7 +10149,7 @@
           <a:noFill/>
         </p:spPr>
         <p:txBody>
-          <a:bodyPr wrap="square" anchor="t" lIns="0" rIns="0" tIns="0" bIns="0">
+          <a:bodyPr wrap="square" lIns="0" tIns="0" rIns="0" bIns="0" anchor="t">
             <a:spAutoFit/>
           </a:bodyPr>
           <a:lstStyle/>
@@ -11120,7 +10180,7 @@
           <p:nvPr/>
         </p:nvPicPr>
         <p:blipFill>
-          <a:blip r:embed="rId2"/>
+          <a:blip r:embed="rId3"/>
           <a:stretch>
             <a:fillRect/>
           </a:stretch>
@@ -11152,7 +10212,7 @@
           <a:noFill/>
         </p:spPr>
         <p:txBody>
-          <a:bodyPr wrap="square" anchor="t" lIns="0" rIns="0" tIns="0" bIns="0">
+          <a:bodyPr wrap="square" lIns="0" tIns="0" rIns="0" bIns="0" anchor="t">
             <a:spAutoFit/>
           </a:bodyPr>
           <a:lstStyle/>
@@ -11191,7 +10251,7 @@
           <a:noFill/>
         </p:spPr>
         <p:txBody>
-          <a:bodyPr wrap="square" anchor="t" lIns="0" rIns="0" tIns="0" bIns="0">
+          <a:bodyPr wrap="square" lIns="0" tIns="0" rIns="0" bIns="0" anchor="t">
             <a:spAutoFit/>
           </a:bodyPr>
           <a:lstStyle/>
@@ -11230,7 +10290,7 @@
           <a:noFill/>
         </p:spPr>
         <p:txBody>
-          <a:bodyPr wrap="square" anchor="t" lIns="0" rIns="0" tIns="0" bIns="0">
+          <a:bodyPr wrap="square" lIns="0" tIns="0" rIns="0" bIns="0" anchor="t">
             <a:spAutoFit/>
           </a:bodyPr>
           <a:lstStyle/>
@@ -11293,7 +10353,7 @@
           <a:noFill/>
         </p:spPr>
         <p:txBody>
-          <a:bodyPr wrap="square" anchor="t" lIns="0" rIns="0" tIns="0" bIns="0">
+          <a:bodyPr wrap="square" lIns="0" tIns="0" rIns="0" bIns="0" anchor="t">
             <a:spAutoFit/>
           </a:bodyPr>
           <a:lstStyle/>
@@ -11332,7 +10392,7 @@
           <a:noFill/>
         </p:spPr>
         <p:txBody>
-          <a:bodyPr wrap="square" anchor="t" lIns="0" rIns="0" tIns="0" bIns="0">
+          <a:bodyPr wrap="square" lIns="0" tIns="0" rIns="0" bIns="0" anchor="t">
             <a:spAutoFit/>
           </a:bodyPr>
           <a:lstStyle/>
@@ -11371,7 +10431,7 @@
           <a:noFill/>
         </p:spPr>
         <p:txBody>
-          <a:bodyPr wrap="square" anchor="t" lIns="0" rIns="0" tIns="0" bIns="0">
+          <a:bodyPr wrap="square" lIns="0" tIns="0" rIns="0" bIns="0" anchor="t">
             <a:spAutoFit/>
           </a:bodyPr>
           <a:lstStyle/>
@@ -11410,7 +10470,7 @@
           <a:noFill/>
         </p:spPr>
         <p:txBody>
-          <a:bodyPr wrap="square" anchor="t" lIns="0" rIns="0" tIns="0" bIns="0">
+          <a:bodyPr wrap="square" lIns="0" tIns="0" rIns="0" bIns="0" anchor="t">
             <a:spAutoFit/>
           </a:bodyPr>
           <a:lstStyle/>
@@ -11449,7 +10509,7 @@
           <a:noFill/>
         </p:spPr>
         <p:txBody>
-          <a:bodyPr wrap="square" anchor="t" lIns="0" rIns="0" tIns="0" bIns="0">
+          <a:bodyPr wrap="square" lIns="0" tIns="0" rIns="0" bIns="0" anchor="t">
             <a:spAutoFit/>
           </a:bodyPr>
           <a:lstStyle/>
@@ -11488,7 +10548,7 @@
           <a:noFill/>
         </p:spPr>
         <p:txBody>
-          <a:bodyPr wrap="square" anchor="t" lIns="0" rIns="0" tIns="0" bIns="0">
+          <a:bodyPr wrap="square" lIns="0" tIns="0" rIns="0" bIns="0" anchor="t">
             <a:spAutoFit/>
           </a:bodyPr>
           <a:lstStyle/>
@@ -11527,7 +10587,7 @@
           <a:noFill/>
         </p:spPr>
         <p:txBody>
-          <a:bodyPr wrap="square" anchor="t" lIns="0" rIns="0" tIns="0" bIns="0">
+          <a:bodyPr wrap="square" lIns="0" tIns="0" rIns="0" bIns="0" anchor="t">
             <a:spAutoFit/>
           </a:bodyPr>
           <a:lstStyle/>
@@ -11566,7 +10626,7 @@
           <a:noFill/>
         </p:spPr>
         <p:txBody>
-          <a:bodyPr wrap="square" anchor="t" lIns="0" rIns="0" tIns="0" bIns="0">
+          <a:bodyPr wrap="square" lIns="0" tIns="0" rIns="0" bIns="0" anchor="t">
             <a:spAutoFit/>
           </a:bodyPr>
           <a:lstStyle/>
@@ -11629,7 +10689,9 @@
         <p:txBody>
           <a:bodyPr rtlCol="0" anchor="ctr"/>
           <a:lstStyle/>
-          <a:p/>
+          <a:p>
+            <a:endParaRPr/>
+          </a:p>
         </p:txBody>
       </p:sp>
       <p:sp>
@@ -11649,7 +10711,7 @@
           <a:noFill/>
         </p:spPr>
         <p:txBody>
-          <a:bodyPr wrap="square" anchor="t" lIns="0" rIns="0" tIns="0" bIns="0">
+          <a:bodyPr wrap="square" lIns="0" tIns="0" rIns="0" bIns="0" anchor="t">
             <a:spAutoFit/>
           </a:bodyPr>
           <a:lstStyle/>
@@ -11688,7 +10750,7 @@
           <a:noFill/>
         </p:spPr>
         <p:txBody>
-          <a:bodyPr wrap="square" anchor="t" lIns="0" rIns="0" tIns="0" bIns="0">
+          <a:bodyPr wrap="square" lIns="0" tIns="0" rIns="0" bIns="0" anchor="t">
             <a:spAutoFit/>
           </a:bodyPr>
           <a:lstStyle/>
@@ -11719,7 +10781,7 @@
 </file>
 
 <file path=ppt/slides/slide7.xml><?xml version="1.0" encoding="utf-8"?>
-<p:sld xmlns:a="http://schemas.openxmlformats.org/drawingml/2006/main" xmlns:p="http://schemas.openxmlformats.org/presentationml/2006/main" xmlns:r="http://schemas.openxmlformats.org/officeDocument/2006/relationships">
+<p:sld xmlns:a="http://schemas.openxmlformats.org/drawingml/2006/main" xmlns:r="http://schemas.openxmlformats.org/officeDocument/2006/relationships" xmlns:p="http://schemas.openxmlformats.org/presentationml/2006/main">
   <p:cSld>
     <p:bg>
       <p:bgPr>
@@ -11735,7 +10797,14 @@
         <p:cNvGrpSpPr/>
         <p:nvPr/>
       </p:nvGrpSpPr>
-      <p:grpSpPr/>
+      <p:grpSpPr>
+        <a:xfrm>
+          <a:off x="0" y="0"/>
+          <a:ext cx="0" cy="0"/>
+          <a:chOff x="0" y="0"/>
+          <a:chExt cx="0" cy="0"/>
+        </a:xfrm>
+      </p:grpSpPr>
       <p:sp>
         <p:nvSpPr>
           <p:cNvPr id="2" name="TextBox 1"/>
@@ -11753,7 +10822,7 @@
           <a:noFill/>
         </p:spPr>
         <p:txBody>
-          <a:bodyPr wrap="square" anchor="t" lIns="0" rIns="0" tIns="0" bIns="0">
+          <a:bodyPr wrap="square" lIns="0" tIns="0" rIns="0" bIns="0" anchor="t">
             <a:spAutoFit/>
           </a:bodyPr>
           <a:lstStyle/>
@@ -11792,7 +10861,7 @@
           <a:noFill/>
         </p:spPr>
         <p:txBody>
-          <a:bodyPr wrap="square" anchor="t" lIns="0" rIns="0" tIns="0" bIns="0">
+          <a:bodyPr wrap="square" lIns="0" tIns="0" rIns="0" bIns="0" anchor="t">
             <a:spAutoFit/>
           </a:bodyPr>
           <a:lstStyle/>
@@ -11823,7 +10892,7 @@
           <p:nvPr/>
         </p:nvPicPr>
         <p:blipFill>
-          <a:blip r:embed="rId2"/>
+          <a:blip r:embed="rId3"/>
           <a:stretch>
             <a:fillRect/>
           </a:stretch>
@@ -11855,7 +10924,7 @@
           <a:noFill/>
         </p:spPr>
         <p:txBody>
-          <a:bodyPr wrap="square" anchor="t" lIns="0" rIns="0" tIns="0" bIns="0">
+          <a:bodyPr wrap="square" lIns="0" tIns="0" rIns="0" bIns="0" anchor="t">
             <a:spAutoFit/>
           </a:bodyPr>
           <a:lstStyle/>
@@ -11894,7 +10963,7 @@
           <a:noFill/>
         </p:spPr>
         <p:txBody>
-          <a:bodyPr wrap="square" anchor="t" lIns="0" rIns="0" tIns="0" bIns="0">
+          <a:bodyPr wrap="square" lIns="0" tIns="0" rIns="0" bIns="0" anchor="t">
             <a:spAutoFit/>
           </a:bodyPr>
           <a:lstStyle/>
@@ -11933,7 +11002,7 @@
           <a:noFill/>
         </p:spPr>
         <p:txBody>
-          <a:bodyPr wrap="square" anchor="t" lIns="0" rIns="0" tIns="0" bIns="0">
+          <a:bodyPr wrap="square" lIns="0" tIns="0" rIns="0" bIns="0" anchor="t">
             <a:spAutoFit/>
           </a:bodyPr>
           <a:lstStyle/>
@@ -11972,7 +11041,7 @@
           <a:noFill/>
         </p:spPr>
         <p:txBody>
-          <a:bodyPr wrap="square" anchor="t" lIns="0" rIns="0" tIns="0" bIns="0">
+          <a:bodyPr wrap="square" lIns="0" tIns="0" rIns="0" bIns="0" anchor="t">
             <a:spAutoFit/>
           </a:bodyPr>
           <a:lstStyle/>
@@ -11989,7 +11058,7 @@
                 </a:solidFill>
                 <a:latin typeface="Bahnschrift"/>
               </a:rPr>
-              <a:t>deriva del montaje a lo largo de la tarde →</a:t>
+              <a:t>deriva del montaje: +2 fs por traza a lo largo de la tarde →</a:t>
             </a:r>
           </a:p>
         </p:txBody>
@@ -12047,7 +11116,7 @@
           <a:noFill/>
         </p:spPr>
         <p:txBody>
-          <a:bodyPr wrap="square" anchor="ctr" lIns="0" rIns="0" tIns="0" bIns="0">
+          <a:bodyPr wrap="square" lIns="0" tIns="0" rIns="0" bIns="0" anchor="ctr">
             <a:spAutoFit/>
           </a:bodyPr>
           <a:lstStyle/>
@@ -12110,7 +11179,9 @@
         <p:txBody>
           <a:bodyPr rtlCol="0" anchor="ctr"/>
           <a:lstStyle/>
-          <a:p/>
+          <a:p>
+            <a:endParaRPr/>
+          </a:p>
         </p:txBody>
       </p:sp>
       <p:sp>
@@ -12130,7 +11201,7 @@
           <a:noFill/>
         </p:spPr>
         <p:txBody>
-          <a:bodyPr wrap="square" anchor="ctr" lIns="0" rIns="0" tIns="0" bIns="0">
+          <a:bodyPr wrap="square" lIns="0" tIns="0" rIns="0" bIns="0" anchor="ctr">
             <a:spAutoFit/>
           </a:bodyPr>
           <a:lstStyle/>
@@ -12193,7 +11264,9 @@
         <p:txBody>
           <a:bodyPr rtlCol="0" anchor="ctr"/>
           <a:lstStyle/>
-          <a:p/>
+          <a:p>
+            <a:endParaRPr/>
+          </a:p>
         </p:txBody>
       </p:sp>
       <p:sp>
@@ -12213,7 +11286,7 @@
           <a:noFill/>
         </p:spPr>
         <p:txBody>
-          <a:bodyPr wrap="square" anchor="ctr" lIns="0" rIns="0" tIns="0" bIns="0">
+          <a:bodyPr wrap="square" lIns="0" tIns="0" rIns="0" bIns="0" anchor="ctr">
             <a:spAutoFit/>
           </a:bodyPr>
           <a:lstStyle/>
@@ -12276,7 +11349,9 @@
         <p:txBody>
           <a:bodyPr rtlCol="0" anchor="ctr"/>
           <a:lstStyle/>
-          <a:p/>
+          <a:p>
+            <a:endParaRPr/>
+          </a:p>
         </p:txBody>
       </p:sp>
       <p:sp>
@@ -12296,7 +11371,7 @@
           <a:noFill/>
         </p:spPr>
         <p:txBody>
-          <a:bodyPr wrap="square" anchor="ctr" lIns="0" rIns="0" tIns="0" bIns="0">
+          <a:bodyPr wrap="square" lIns="0" tIns="0" rIns="0" bIns="0" anchor="ctr">
             <a:spAutoFit/>
           </a:bodyPr>
           <a:lstStyle/>
@@ -12359,7 +11434,9 @@
         <p:txBody>
           <a:bodyPr rtlCol="0" anchor="ctr"/>
           <a:lstStyle/>
-          <a:p/>
+          <a:p>
+            <a:endParaRPr/>
+          </a:p>
         </p:txBody>
       </p:sp>
       <p:sp>
@@ -12379,7 +11456,7 @@
           <a:noFill/>
         </p:spPr>
         <p:txBody>
-          <a:bodyPr wrap="square" anchor="ctr" lIns="0" rIns="0" tIns="0" bIns="0">
+          <a:bodyPr wrap="square" lIns="0" tIns="0" rIns="0" bIns="0" anchor="ctr">
             <a:spAutoFit/>
           </a:bodyPr>
           <a:lstStyle/>
@@ -12442,7 +11519,9 @@
         <p:txBody>
           <a:bodyPr rtlCol="0" anchor="ctr"/>
           <a:lstStyle/>
-          <a:p/>
+          <a:p>
+            <a:endParaRPr/>
+          </a:p>
         </p:txBody>
       </p:sp>
       <p:sp>
@@ -12462,7 +11541,7 @@
           <a:noFill/>
         </p:spPr>
         <p:txBody>
-          <a:bodyPr wrap="square" anchor="ctr" lIns="0" rIns="0" tIns="0" bIns="0">
+          <a:bodyPr wrap="square" lIns="0" tIns="0" rIns="0" bIns="0" anchor="ctr">
             <a:spAutoFit/>
           </a:bodyPr>
           <a:lstStyle/>
@@ -12525,7 +11604,9 @@
         <p:txBody>
           <a:bodyPr rtlCol="0" anchor="ctr"/>
           <a:lstStyle/>
-          <a:p/>
+          <a:p>
+            <a:endParaRPr/>
+          </a:p>
         </p:txBody>
       </p:sp>
       <p:sp>
@@ -12545,7 +11626,7 @@
           <a:noFill/>
         </p:spPr>
         <p:txBody>
-          <a:bodyPr wrap="square" anchor="ctr" lIns="0" rIns="0" tIns="0" bIns="0">
+          <a:bodyPr wrap="square" lIns="0" tIns="0" rIns="0" bIns="0" anchor="ctr">
             <a:spAutoFit/>
           </a:bodyPr>
           <a:lstStyle/>
@@ -12608,7 +11689,9 @@
         <p:txBody>
           <a:bodyPr rtlCol="0" anchor="ctr"/>
           <a:lstStyle/>
-          <a:p/>
+          <a:p>
+            <a:endParaRPr/>
+          </a:p>
         </p:txBody>
       </p:sp>
       <p:sp>
@@ -12628,7 +11711,7 @@
           <a:noFill/>
         </p:spPr>
         <p:txBody>
-          <a:bodyPr wrap="square" anchor="ctr" lIns="0" rIns="0" tIns="0" bIns="0">
+          <a:bodyPr wrap="square" lIns="0" tIns="0" rIns="0" bIns="0" anchor="ctr">
             <a:spAutoFit/>
           </a:bodyPr>
           <a:lstStyle/>
@@ -12691,7 +11774,9 @@
         <p:txBody>
           <a:bodyPr rtlCol="0" anchor="ctr"/>
           <a:lstStyle/>
-          <a:p/>
+          <a:p>
+            <a:endParaRPr/>
+          </a:p>
         </p:txBody>
       </p:sp>
       <p:sp>
@@ -12711,7 +11796,7 @@
           <a:noFill/>
         </p:spPr>
         <p:txBody>
-          <a:bodyPr wrap="square" anchor="ctr" lIns="0" rIns="0" tIns="0" bIns="0">
+          <a:bodyPr wrap="square" lIns="0" tIns="0" rIns="0" bIns="0" anchor="ctr">
             <a:spAutoFit/>
           </a:bodyPr>
           <a:lstStyle/>
@@ -12774,7 +11859,9 @@
         <p:txBody>
           <a:bodyPr rtlCol="0" anchor="ctr"/>
           <a:lstStyle/>
-          <a:p/>
+          <a:p>
+            <a:endParaRPr/>
+          </a:p>
         </p:txBody>
       </p:sp>
       <p:sp>
@@ -12794,7 +11881,7 @@
           <a:noFill/>
         </p:spPr>
         <p:txBody>
-          <a:bodyPr wrap="square" anchor="ctr" lIns="0" rIns="0" tIns="0" bIns="0">
+          <a:bodyPr wrap="square" lIns="0" tIns="0" rIns="0" bIns="0" anchor="ctr">
             <a:spAutoFit/>
           </a:bodyPr>
           <a:lstStyle/>
@@ -12833,7 +11920,7 @@
           <a:noFill/>
         </p:spPr>
         <p:txBody>
-          <a:bodyPr wrap="square" anchor="t" lIns="0" rIns="0" tIns="0" bIns="0">
+          <a:bodyPr wrap="square" lIns="0" tIns="0" rIns="0" bIns="0" anchor="t">
             <a:spAutoFit/>
           </a:bodyPr>
           <a:lstStyle/>
@@ -12850,7 +11937,7 @@
                 </a:solidFill>
                 <a:latin typeface="Bahnschrift"/>
               </a:rPr>
-              <a:t>la deriva entra entera en ȳ₁ y S₁ queda subestimada</a:t>
+              <a:t>sesgo de ȳ₁, ȳ₂, ȳ₃: +2, +8 y +14 fs; réplicas seguidas → Sₖ chica</a:t>
             </a:r>
           </a:p>
         </p:txBody>
@@ -12872,7 +11959,7 @@
           <a:noFill/>
         </p:spPr>
         <p:txBody>
-          <a:bodyPr wrap="square" anchor="ctr" lIns="0" rIns="0" tIns="0" bIns="0">
+          <a:bodyPr wrap="square" lIns="0" tIns="0" rIns="0" bIns="0" anchor="ctr">
             <a:spAutoFit/>
           </a:bodyPr>
           <a:lstStyle/>
@@ -12935,7 +12022,9 @@
         <p:txBody>
           <a:bodyPr rtlCol="0" anchor="ctr"/>
           <a:lstStyle/>
-          <a:p/>
+          <a:p>
+            <a:endParaRPr/>
+          </a:p>
         </p:txBody>
       </p:sp>
       <p:sp>
@@ -12955,7 +12044,7 @@
           <a:noFill/>
         </p:spPr>
         <p:txBody>
-          <a:bodyPr wrap="square" anchor="ctr" lIns="0" rIns="0" tIns="0" bIns="0">
+          <a:bodyPr wrap="square" lIns="0" tIns="0" rIns="0" bIns="0" anchor="ctr">
             <a:spAutoFit/>
           </a:bodyPr>
           <a:lstStyle/>
@@ -13018,7 +12107,9 @@
         <p:txBody>
           <a:bodyPr rtlCol="0" anchor="ctr"/>
           <a:lstStyle/>
-          <a:p/>
+          <a:p>
+            <a:endParaRPr/>
+          </a:p>
         </p:txBody>
       </p:sp>
       <p:sp>
@@ -13038,7 +12129,7 @@
           <a:noFill/>
         </p:spPr>
         <p:txBody>
-          <a:bodyPr wrap="square" anchor="ctr" lIns="0" rIns="0" tIns="0" bIns="0">
+          <a:bodyPr wrap="square" lIns="0" tIns="0" rIns="0" bIns="0" anchor="ctr">
             <a:spAutoFit/>
           </a:bodyPr>
           <a:lstStyle/>
@@ -13101,7 +12192,9 @@
         <p:txBody>
           <a:bodyPr rtlCol="0" anchor="ctr"/>
           <a:lstStyle/>
-          <a:p/>
+          <a:p>
+            <a:endParaRPr/>
+          </a:p>
         </p:txBody>
       </p:sp>
       <p:sp>
@@ -13121,7 +12214,7 @@
           <a:noFill/>
         </p:spPr>
         <p:txBody>
-          <a:bodyPr wrap="square" anchor="ctr" lIns="0" rIns="0" tIns="0" bIns="0">
+          <a:bodyPr wrap="square" lIns="0" tIns="0" rIns="0" bIns="0" anchor="ctr">
             <a:spAutoFit/>
           </a:bodyPr>
           <a:lstStyle/>
@@ -13184,7 +12277,9 @@
         <p:txBody>
           <a:bodyPr rtlCol="0" anchor="ctr"/>
           <a:lstStyle/>
-          <a:p/>
+          <a:p>
+            <a:endParaRPr/>
+          </a:p>
         </p:txBody>
       </p:sp>
       <p:sp>
@@ -13204,7 +12299,7 @@
           <a:noFill/>
         </p:spPr>
         <p:txBody>
-          <a:bodyPr wrap="square" anchor="ctr" lIns="0" rIns="0" tIns="0" bIns="0">
+          <a:bodyPr wrap="square" lIns="0" tIns="0" rIns="0" bIns="0" anchor="ctr">
             <a:spAutoFit/>
           </a:bodyPr>
           <a:lstStyle/>
@@ -13267,7 +12362,9 @@
         <p:txBody>
           <a:bodyPr rtlCol="0" anchor="ctr"/>
           <a:lstStyle/>
-          <a:p/>
+          <a:p>
+            <a:endParaRPr/>
+          </a:p>
         </p:txBody>
       </p:sp>
       <p:sp>
@@ -13287,7 +12384,7 @@
           <a:noFill/>
         </p:spPr>
         <p:txBody>
-          <a:bodyPr wrap="square" anchor="ctr" lIns="0" rIns="0" tIns="0" bIns="0">
+          <a:bodyPr wrap="square" lIns="0" tIns="0" rIns="0" bIns="0" anchor="ctr">
             <a:spAutoFit/>
           </a:bodyPr>
           <a:lstStyle/>
@@ -13350,7 +12447,9 @@
         <p:txBody>
           <a:bodyPr rtlCol="0" anchor="ctr"/>
           <a:lstStyle/>
-          <a:p/>
+          <a:p>
+            <a:endParaRPr/>
+          </a:p>
         </p:txBody>
       </p:sp>
       <p:sp>
@@ -13370,7 +12469,7 @@
           <a:noFill/>
         </p:spPr>
         <p:txBody>
-          <a:bodyPr wrap="square" anchor="ctr" lIns="0" rIns="0" tIns="0" bIns="0">
+          <a:bodyPr wrap="square" lIns="0" tIns="0" rIns="0" bIns="0" anchor="ctr">
             <a:spAutoFit/>
           </a:bodyPr>
           <a:lstStyle/>
@@ -13433,7 +12532,9 @@
         <p:txBody>
           <a:bodyPr rtlCol="0" anchor="ctr"/>
           <a:lstStyle/>
-          <a:p/>
+          <a:p>
+            <a:endParaRPr/>
+          </a:p>
         </p:txBody>
       </p:sp>
       <p:sp>
@@ -13453,7 +12554,7 @@
           <a:noFill/>
         </p:spPr>
         <p:txBody>
-          <a:bodyPr wrap="square" anchor="ctr" lIns="0" rIns="0" tIns="0" bIns="0">
+          <a:bodyPr wrap="square" lIns="0" tIns="0" rIns="0" bIns="0" anchor="ctr">
             <a:spAutoFit/>
           </a:bodyPr>
           <a:lstStyle/>
@@ -13516,7 +12617,9 @@
         <p:txBody>
           <a:bodyPr rtlCol="0" anchor="ctr"/>
           <a:lstStyle/>
-          <a:p/>
+          <a:p>
+            <a:endParaRPr/>
+          </a:p>
         </p:txBody>
       </p:sp>
       <p:sp>
@@ -13536,7 +12639,7 @@
           <a:noFill/>
         </p:spPr>
         <p:txBody>
-          <a:bodyPr wrap="square" anchor="ctr" lIns="0" rIns="0" tIns="0" bIns="0">
+          <a:bodyPr wrap="square" lIns="0" tIns="0" rIns="0" bIns="0" anchor="ctr">
             <a:spAutoFit/>
           </a:bodyPr>
           <a:lstStyle/>
@@ -13599,7 +12702,9 @@
         <p:txBody>
           <a:bodyPr rtlCol="0" anchor="ctr"/>
           <a:lstStyle/>
-          <a:p/>
+          <a:p>
+            <a:endParaRPr/>
+          </a:p>
         </p:txBody>
       </p:sp>
       <p:sp>
@@ -13619,7 +12724,7 @@
           <a:noFill/>
         </p:spPr>
         <p:txBody>
-          <a:bodyPr wrap="square" anchor="ctr" lIns="0" rIns="0" tIns="0" bIns="0">
+          <a:bodyPr wrap="square" lIns="0" tIns="0" rIns="0" bIns="0" anchor="ctr">
             <a:spAutoFit/>
           </a:bodyPr>
           <a:lstStyle/>
@@ -13658,7 +12763,7 @@
           <a:noFill/>
         </p:spPr>
         <p:txBody>
-          <a:bodyPr wrap="square" anchor="t" lIns="0" rIns="0" tIns="0" bIns="0">
+          <a:bodyPr wrap="square" lIns="0" tIns="0" rIns="0" bIns="0" anchor="t">
             <a:spAutoFit/>
           </a:bodyPr>
           <a:lstStyle/>
@@ -13675,43 +12780,7 @@
                 </a:solidFill>
                 <a:latin typeface="Bahnschrift"/>
               </a:rPr>
-              <a:t>la deriva se reparte: cada ȳ</a:t>
-            </a:r>
-            <a:r>
-              <a:rPr sz="1350" b="0" i="0" baseline="-25000">
-                <a:solidFill>
-                  <a:srgbClr val="1B8A5A"/>
-                </a:solidFill>
-                <a:latin typeface="Bahnschrift"/>
-              </a:rPr>
-              <a:t>k</a:t>
-            </a:r>
-            <a:r>
-              <a:rPr sz="1350" b="0" i="0">
-                <a:solidFill>
-                  <a:srgbClr val="1B8A5A"/>
-                </a:solidFill>
-                <a:latin typeface="Bahnschrift"/>
-              </a:rPr>
-              <a:t> sin sesgo, cada S</a:t>
-            </a:r>
-            <a:r>
-              <a:rPr sz="1350" b="0" i="0" baseline="-25000">
-                <a:solidFill>
-                  <a:srgbClr val="1B8A5A"/>
-                </a:solidFill>
-                <a:latin typeface="Bahnschrift"/>
-              </a:rPr>
-              <a:t>k</a:t>
-            </a:r>
-            <a:r>
-              <a:rPr sz="1350" b="0" i="0">
-                <a:solidFill>
-                  <a:srgbClr val="1B8A5A"/>
-                </a:solidFill>
-                <a:latin typeface="Bahnschrift"/>
-              </a:rPr>
-              <a:t> la incluye</a:t>
+              <a:t>la deriva se reparte por igual entre corrientes y entra en Sₖ</a:t>
             </a:r>
           </a:p>
         </p:txBody>
@@ -13757,7 +12826,9 @@
         <p:txBody>
           <a:bodyPr rtlCol="0" anchor="ctr"/>
           <a:lstStyle/>
-          <a:p/>
+          <a:p>
+            <a:endParaRPr/>
+          </a:p>
         </p:txBody>
       </p:sp>
       <p:sp>
@@ -13777,7 +12848,7 @@
           <a:noFill/>
         </p:spPr>
         <p:txBody>
-          <a:bodyPr wrap="square" anchor="t" lIns="0" rIns="0" tIns="0" bIns="0">
+          <a:bodyPr wrap="square" lIns="0" tIns="0" rIns="0" bIns="0" anchor="t">
             <a:spAutoFit/>
           </a:bodyPr>
           <a:lstStyle/>
@@ -13794,7 +12865,7 @@
                 </a:solidFill>
                 <a:latin typeface="Bahnschrift SemiBold"/>
               </a:rPr>
-              <a:t>Plan</a:t>
+              <a:t>ȳₖ y Sₖ</a:t>
             </a:r>
           </a:p>
         </p:txBody>
@@ -13816,7 +12887,7 @@
           <a:noFill/>
         </p:spPr>
         <p:txBody>
-          <a:bodyPr wrap="square" anchor="t" lIns="0" rIns="0" tIns="0" bIns="0">
+          <a:bodyPr wrap="square" lIns="0" tIns="0" rIns="0" bIns="0" anchor="t">
             <a:spAutoFit/>
           </a:bodyPr>
           <a:lstStyle/>
@@ -13833,7 +12904,7 @@
                 </a:solidFill>
                 <a:latin typeface="Bahnschrift"/>
               </a:rPr>
-              <a:t>3 días × (3 I₁ + 3 I₂ + 3 I₃). Sorteo completo cada día, semilla anotada.</a:t>
+              <a:t>Media y desviación estándar de las réplicas de la corriente k (5, 6 o 7 A).</a:t>
             </a:r>
           </a:p>
         </p:txBody>
@@ -13847,6 +12918,130 @@
         <p:spPr>
           <a:xfrm>
             <a:off x="4297679" y="4572000"/>
+            <a:ext cx="3593592" cy="1554480"/>
+          </a:xfrm>
+          <a:prstGeom prst="roundRect">
+            <a:avLst>
+              <a:gd name="adj" fmla="val 6000"/>
+            </a:avLst>
+          </a:prstGeom>
+          <a:solidFill>
+            <a:srgbClr val="FDECEE"/>
+          </a:solidFill>
+          <a:ln>
+            <a:noFill/>
+          </a:ln>
+          <a:effectLst/>
+        </p:spPr>
+        <p:style>
+          <a:lnRef idx="1">
+            <a:schemeClr val="accent1"/>
+          </a:lnRef>
+          <a:fillRef idx="3">
+            <a:schemeClr val="accent1"/>
+          </a:fillRef>
+          <a:effectRef idx="2">
+            <a:schemeClr val="accent1"/>
+          </a:effectRef>
+          <a:fontRef idx="minor">
+            <a:schemeClr val="lt1"/>
+          </a:fontRef>
+        </p:style>
+        <p:txBody>
+          <a:bodyPr rtlCol="0" anchor="ctr"/>
+          <a:lstStyle/>
+          <a:p>
+            <a:endParaRPr/>
+          </a:p>
+        </p:txBody>
+      </p:sp>
+      <p:sp>
+        <p:nvSpPr>
+          <p:cNvPr id="54" name="TextBox 53"/>
+          <p:cNvSpPr txBox="1"/>
+          <p:nvPr/>
+        </p:nvSpPr>
+        <p:spPr>
+          <a:xfrm>
+            <a:off x="4480559" y="4681728"/>
+            <a:ext cx="3227832" cy="365760"/>
+          </a:xfrm>
+          <a:prstGeom prst="rect">
+            <a:avLst/>
+          </a:prstGeom>
+          <a:noFill/>
+        </p:spPr>
+        <p:txBody>
+          <a:bodyPr wrap="square" lIns="0" tIns="0" rIns="0" bIns="0" anchor="t">
+            <a:spAutoFit/>
+          </a:bodyPr>
+          <a:lstStyle/>
+          <a:p>
+            <a:pPr algn="l">
+              <a:spcAft>
+                <a:spcPts val="600"/>
+              </a:spcAft>
+            </a:pPr>
+            <a:r>
+              <a:rPr sz="1400" b="0" i="0">
+                <a:solidFill>
+                  <a:srgbClr val="D7263D"/>
+                </a:solidFill>
+                <a:latin typeface="Bahnschrift SemiBold"/>
+              </a:rPr>
+              <a:t>Qué protege el sorteo</a:t>
+            </a:r>
+          </a:p>
+        </p:txBody>
+      </p:sp>
+      <p:sp>
+        <p:nvSpPr>
+          <p:cNvPr id="55" name="TextBox 54"/>
+          <p:cNvSpPr txBox="1"/>
+          <p:nvPr/>
+        </p:nvSpPr>
+        <p:spPr>
+          <a:xfrm>
+            <a:off x="4480559" y="5029200"/>
+            <a:ext cx="3227832" cy="1005840"/>
+          </a:xfrm>
+          <a:prstGeom prst="rect">
+            <a:avLst/>
+          </a:prstGeom>
+          <a:noFill/>
+        </p:spPr>
+        <p:txBody>
+          <a:bodyPr wrap="square" lIns="0" tIns="0" rIns="0" bIns="0" anchor="t">
+            <a:spAutoFit/>
+          </a:bodyPr>
+          <a:lstStyle/>
+          <a:p>
+            <a:pPr algn="l">
+              <a:spcAft>
+                <a:spcPts val="600"/>
+              </a:spcAft>
+            </a:pPr>
+            <a:r>
+              <a:rPr sz="1300" b="0" i="0">
+                <a:solidFill>
+                  <a:srgbClr val="0E1726"/>
+                </a:solidFill>
+                <a:latin typeface="Bahnschrift"/>
+              </a:rPr>
+              <a:t>Que la deriva no favorezca a una corriente y que Sₖ sea realista: el tiempo pasa al error, como supone la prueba t.</a:t>
+            </a:r>
+          </a:p>
+        </p:txBody>
+      </p:sp>
+      <p:sp>
+        <p:nvSpPr>
+          <p:cNvPr id="56" name="Rounded Rectangle 55"/>
+          <p:cNvSpPr/>
+          <p:nvPr/>
+        </p:nvSpPr>
+        <p:spPr>
+          <a:xfrm>
+            <a:off x="8046719" y="4572000"/>
             <a:ext cx="3593592" cy="1554480"/>
           </a:xfrm>
           <a:prstGeom prst="roundRect">
@@ -13879,18 +13074,20 @@
         <p:txBody>
           <a:bodyPr rtlCol="0" anchor="ctr"/>
           <a:lstStyle/>
-          <a:p/>
-        </p:txBody>
-      </p:sp>
-      <p:sp>
-        <p:nvSpPr>
-          <p:cNvPr id="54" name="TextBox 53"/>
+          <a:p>
+            <a:endParaRPr/>
+          </a:p>
+        </p:txBody>
+      </p:sp>
+      <p:sp>
+        <p:nvSpPr>
+          <p:cNvPr id="57" name="TextBox 56"/>
           <p:cNvSpPr txBox="1"/>
           <p:nvPr/>
         </p:nvSpPr>
         <p:spPr>
           <a:xfrm>
-            <a:off x="4480559" y="4681728"/>
+            <a:off x="8229599" y="4681728"/>
             <a:ext cx="3227832" cy="365760"/>
           </a:xfrm>
           <a:prstGeom prst="rect">
@@ -13899,7 +13096,7 @@
           <a:noFill/>
         </p:spPr>
         <p:txBody>
-          <a:bodyPr wrap="square" anchor="t" lIns="0" rIns="0" tIns="0" bIns="0">
+          <a:bodyPr wrap="square" lIns="0" tIns="0" rIns="0" bIns="0" anchor="t">
             <a:spAutoFit/>
           </a:bodyPr>
           <a:lstStyle/>
@@ -13916,20 +13113,20 @@
                 </a:solidFill>
                 <a:latin typeface="Bahnschrift SemiBold"/>
               </a:rPr>
-              <a:t>Las corrientes no interfieren</a:t>
-            </a:r>
-          </a:p>
-        </p:txBody>
-      </p:sp>
-      <p:sp>
-        <p:nvSpPr>
-          <p:cNvPr id="55" name="TextBox 54"/>
+              <a:t>Qué no protege</a:t>
+            </a:r>
+          </a:p>
+        </p:txBody>
+      </p:sp>
+      <p:sp>
+        <p:nvSpPr>
+          <p:cNvPr id="58" name="TextBox 57"/>
           <p:cNvSpPr txBox="1"/>
           <p:nvPr/>
         </p:nvSpPr>
         <p:spPr>
           <a:xfrm>
-            <a:off x="4480559" y="5029200"/>
+            <a:off x="8229599" y="5029200"/>
             <a:ext cx="3227832" cy="1005840"/>
           </a:xfrm>
           <a:prstGeom prst="rect">
@@ -13938,7 +13135,7 @@
           <a:noFill/>
         </p:spPr>
         <p:txBody>
-          <a:bodyPr wrap="square" anchor="t" lIns="0" rIns="0" tIns="0" bIns="0">
+          <a:bodyPr wrap="square" lIns="0" tIns="0" rIns="0" bIns="0" anchor="t">
             <a:spAutoFit/>
           </a:bodyPr>
           <a:lstStyle/>
@@ -13955,129 +13152,7 @@
                 </a:solidFill>
                 <a:latin typeface="Bahnschrift"/>
               </a:rPr>
-              <a:t>Cada traza es una realización separada; el láser no guarda memoria tras 5 min.</a:t>
-            </a:r>
-          </a:p>
-        </p:txBody>
-      </p:sp>
-      <p:sp>
-        <p:nvSpPr>
-          <p:cNvPr id="56" name="Rounded Rectangle 55"/>
-          <p:cNvSpPr/>
-          <p:nvPr/>
-        </p:nvSpPr>
-        <p:spPr>
-          <a:xfrm>
-            <a:off x="8046719" y="4572000"/>
-            <a:ext cx="3593592" cy="1554480"/>
-          </a:xfrm>
-          <a:prstGeom prst="roundRect">
-            <a:avLst>
-              <a:gd name="adj" fmla="val 6000"/>
-            </a:avLst>
-          </a:prstGeom>
-          <a:solidFill>
-            <a:srgbClr val="FDECEE"/>
-          </a:solidFill>
-          <a:ln>
-            <a:noFill/>
-          </a:ln>
-          <a:effectLst/>
-        </p:spPr>
-        <p:style>
-          <a:lnRef idx="1">
-            <a:schemeClr val="accent1"/>
-          </a:lnRef>
-          <a:fillRef idx="3">
-            <a:schemeClr val="accent1"/>
-          </a:fillRef>
-          <a:effectRef idx="2">
-            <a:schemeClr val="accent1"/>
-          </a:effectRef>
-          <a:fontRef idx="minor">
-            <a:schemeClr val="lt1"/>
-          </a:fontRef>
-        </p:style>
-        <p:txBody>
-          <a:bodyPr rtlCol="0" anchor="ctr"/>
-          <a:lstStyle/>
-          <a:p/>
-        </p:txBody>
-      </p:sp>
-      <p:sp>
-        <p:nvSpPr>
-          <p:cNvPr id="57" name="TextBox 56"/>
-          <p:cNvSpPr txBox="1"/>
-          <p:nvPr/>
-        </p:nvSpPr>
-        <p:spPr>
-          <a:xfrm>
-            <a:off x="8229599" y="4681728"/>
-            <a:ext cx="3227832" cy="365760"/>
-          </a:xfrm>
-          <a:prstGeom prst="rect">
-            <a:avLst/>
-          </a:prstGeom>
-          <a:noFill/>
-        </p:spPr>
-        <p:txBody>
-          <a:bodyPr wrap="square" anchor="t" lIns="0" rIns="0" tIns="0" bIns="0">
-            <a:spAutoFit/>
-          </a:bodyPr>
-          <a:lstStyle/>
-          <a:p>
-            <a:pPr algn="l">
-              <a:spcAft>
-                <a:spcPts val="600"/>
-              </a:spcAft>
-            </a:pPr>
-            <a:r>
-              <a:rPr sz="1400" b="0" i="0">
-                <a:solidFill>
-                  <a:srgbClr val="D7263D"/>
-                </a:solidFill>
-                <a:latin typeface="Bahnschrift SemiBold"/>
-              </a:rPr>
-              <a:t>Por qué quedan independientes</a:t>
-            </a:r>
-          </a:p>
-        </p:txBody>
-      </p:sp>
-      <p:sp>
-        <p:nvSpPr>
-          <p:cNvPr id="58" name="TextBox 57"/>
-          <p:cNvSpPr txBox="1"/>
-          <p:nvPr/>
-        </p:nvSpPr>
-        <p:spPr>
-          <a:xfrm>
-            <a:off x="8229599" y="5029200"/>
-            <a:ext cx="3227832" cy="1005840"/>
-          </a:xfrm>
-          <a:prstGeom prst="rect">
-            <a:avLst/>
-          </a:prstGeom>
-          <a:noFill/>
-        </p:spPr>
-        <p:txBody>
-          <a:bodyPr wrap="square" anchor="t" lIns="0" rIns="0" tIns="0" bIns="0">
-            <a:spAutoFit/>
-          </a:bodyPr>
-          <a:lstStyle/>
-          <a:p>
-            <a:pPr algn="l">
-              <a:spcAft>
-                <a:spcPts val="600"/>
-              </a:spcAft>
-            </a:pPr>
-            <a:r>
-              <a:rPr sz="1300" b="0" i="0">
-                <a:solidFill>
-                  <a:srgbClr val="0E1726"/>
-                </a:solidFill>
-                <a:latin typeface="Bahnschrift"/>
-              </a:rPr>
-              <a:t>El tiempo pasa al error con media cero en cada muestra: lo que supone la prueba t.</a:t>
+              <a:t>El nivel promedio de la deriva, igual en las tres: se controla con calentamiento y montaje fijo, y se discute.</a:t>
             </a:r>
           </a:p>
         </p:txBody>
@@ -14091,7 +13166,7 @@
 </file>
 
 <file path=ppt/slides/slide8.xml><?xml version="1.0" encoding="utf-8"?>
-<p:sld xmlns:a="http://schemas.openxmlformats.org/drawingml/2006/main" xmlns:p="http://schemas.openxmlformats.org/presentationml/2006/main" xmlns:r="http://schemas.openxmlformats.org/officeDocument/2006/relationships">
+<p:sld xmlns:a="http://schemas.openxmlformats.org/drawingml/2006/main" xmlns:r="http://schemas.openxmlformats.org/officeDocument/2006/relationships" xmlns:p="http://schemas.openxmlformats.org/presentationml/2006/main">
   <p:cSld>
     <p:bg>
       <p:bgPr>
@@ -14107,7 +13182,14 @@
         <p:cNvGrpSpPr/>
         <p:nvPr/>
       </p:nvGrpSpPr>
-      <p:grpSpPr/>
+      <p:grpSpPr>
+        <a:xfrm>
+          <a:off x="0" y="0"/>
+          <a:ext cx="0" cy="0"/>
+          <a:chOff x="0" y="0"/>
+          <a:chExt cx="0" cy="0"/>
+        </a:xfrm>
+      </p:grpSpPr>
       <p:sp>
         <p:nvSpPr>
           <p:cNvPr id="2" name="TextBox 1"/>
@@ -14125,7 +13207,7 @@
           <a:noFill/>
         </p:spPr>
         <p:txBody>
-          <a:bodyPr wrap="square" anchor="t" lIns="0" rIns="0" tIns="0" bIns="0">
+          <a:bodyPr wrap="square" lIns="0" tIns="0" rIns="0" bIns="0" anchor="t">
             <a:spAutoFit/>
           </a:bodyPr>
           <a:lstStyle/>
@@ -14164,7 +13246,7 @@
           <a:noFill/>
         </p:spPr>
         <p:txBody>
-          <a:bodyPr wrap="square" anchor="t" lIns="0" rIns="0" tIns="0" bIns="0">
+          <a:bodyPr wrap="square" lIns="0" tIns="0" rIns="0" bIns="0" anchor="t">
             <a:spAutoFit/>
           </a:bodyPr>
           <a:lstStyle/>
@@ -14195,7 +13277,7 @@
           <p:nvPr/>
         </p:nvPicPr>
         <p:blipFill>
-          <a:blip r:embed="rId2"/>
+          <a:blip r:embed="rId3"/>
           <a:stretch>
             <a:fillRect/>
           </a:stretch>
@@ -14227,7 +13309,7 @@
           <a:noFill/>
         </p:spPr>
         <p:txBody>
-          <a:bodyPr wrap="square" anchor="t" lIns="0" rIns="0" tIns="0" bIns="0">
+          <a:bodyPr wrap="square" lIns="0" tIns="0" rIns="0" bIns="0" anchor="t">
             <a:spAutoFit/>
           </a:bodyPr>
           <a:lstStyle/>
@@ -14266,7 +13348,7 @@
           <a:noFill/>
         </p:spPr>
         <p:txBody>
-          <a:bodyPr wrap="square" anchor="t" lIns="0" rIns="0" tIns="0" bIns="0">
+          <a:bodyPr wrap="square" lIns="0" tIns="0" rIns="0" bIns="0" anchor="t">
             <a:spAutoFit/>
           </a:bodyPr>
           <a:lstStyle/>
@@ -14305,7 +13387,7 @@
           <a:noFill/>
         </p:spPr>
         <p:txBody>
-          <a:bodyPr wrap="square" anchor="t" lIns="0" rIns="0" tIns="0" bIns="0">
+          <a:bodyPr wrap="square" lIns="0" tIns="0" rIns="0" bIns="0" anchor="t">
             <a:spAutoFit/>
           </a:bodyPr>
           <a:lstStyle/>
@@ -14322,7 +13404,7 @@
                 </a:solidFill>
                 <a:latin typeface="Bahnschrift"/>
               </a:rPr>
-              <a:t>8</a:t>
+              <a:t>9</a:t>
             </a:r>
           </a:p>
         </p:txBody>
@@ -14366,7 +13448,9 @@
         <p:txBody>
           <a:bodyPr rtlCol="0" anchor="ctr"/>
           <a:lstStyle/>
-          <a:p/>
+          <a:p>
+            <a:endParaRPr/>
+          </a:p>
         </p:txBody>
       </p:sp>
       <p:sp>
@@ -14386,7 +13470,7 @@
           <a:noFill/>
         </p:spPr>
         <p:txBody>
-          <a:bodyPr wrap="square" anchor="ctr" lIns="0" rIns="0" tIns="0" bIns="0">
+          <a:bodyPr wrap="square" lIns="0" tIns="0" rIns="0" bIns="0" anchor="ctr">
             <a:spAutoFit/>
           </a:bodyPr>
           <a:lstStyle/>
@@ -14425,7 +13509,7 @@
           <a:noFill/>
         </p:spPr>
         <p:txBody>
-          <a:bodyPr wrap="square" anchor="ctr" lIns="0" rIns="0" tIns="0" bIns="0">
+          <a:bodyPr wrap="square" lIns="0" tIns="0" rIns="0" bIns="0" anchor="ctr">
             <a:spAutoFit/>
           </a:bodyPr>
           <a:lstStyle/>
@@ -14486,7 +13570,9 @@
         <p:txBody>
           <a:bodyPr rtlCol="0" anchor="ctr"/>
           <a:lstStyle/>
-          <a:p/>
+          <a:p>
+            <a:endParaRPr/>
+          </a:p>
         </p:txBody>
       </p:sp>
       <p:sp>
@@ -14506,7 +13592,7 @@
           <a:noFill/>
         </p:spPr>
         <p:txBody>
-          <a:bodyPr wrap="square" anchor="ctr" lIns="0" rIns="0" tIns="0" bIns="0">
+          <a:bodyPr wrap="square" lIns="0" tIns="0" rIns="0" bIns="0" anchor="ctr">
             <a:spAutoFit/>
           </a:bodyPr>
           <a:lstStyle/>
@@ -14545,7 +13631,7 @@
           <a:noFill/>
         </p:spPr>
         <p:txBody>
-          <a:bodyPr wrap="square" anchor="ctr" lIns="0" rIns="0" tIns="0" bIns="0">
+          <a:bodyPr wrap="square" lIns="0" tIns="0" rIns="0" bIns="0" anchor="ctr">
             <a:spAutoFit/>
           </a:bodyPr>
           <a:lstStyle/>
@@ -14606,7 +13692,9 @@
         <p:txBody>
           <a:bodyPr rtlCol="0" anchor="ctr"/>
           <a:lstStyle/>
-          <a:p/>
+          <a:p>
+            <a:endParaRPr/>
+          </a:p>
         </p:txBody>
       </p:sp>
       <p:sp>
@@ -14626,7 +13714,7 @@
           <a:noFill/>
         </p:spPr>
         <p:txBody>
-          <a:bodyPr wrap="square" anchor="ctr" lIns="0" rIns="0" tIns="0" bIns="0">
+          <a:bodyPr wrap="square" lIns="0" tIns="0" rIns="0" bIns="0" anchor="ctr">
             <a:spAutoFit/>
           </a:bodyPr>
           <a:lstStyle/>
@@ -14665,7 +13753,7 @@
           <a:noFill/>
         </p:spPr>
         <p:txBody>
-          <a:bodyPr wrap="square" anchor="ctr" lIns="0" rIns="0" tIns="0" bIns="0">
+          <a:bodyPr wrap="square" lIns="0" tIns="0" rIns="0" bIns="0" anchor="ctr">
             <a:spAutoFit/>
           </a:bodyPr>
           <a:lstStyle/>
@@ -14744,7 +13832,9 @@
         <p:txBody>
           <a:bodyPr rtlCol="0" anchor="ctr"/>
           <a:lstStyle/>
-          <a:p/>
+          <a:p>
+            <a:endParaRPr/>
+          </a:p>
         </p:txBody>
       </p:sp>
       <p:sp>
@@ -14764,7 +13854,7 @@
           <a:noFill/>
         </p:spPr>
         <p:txBody>
-          <a:bodyPr wrap="square" anchor="ctr" lIns="0" rIns="0" tIns="0" bIns="0">
+          <a:bodyPr wrap="square" lIns="0" tIns="0" rIns="0" bIns="0" anchor="ctr">
             <a:spAutoFit/>
           </a:bodyPr>
           <a:lstStyle/>
@@ -14803,7 +13893,7 @@
           <a:noFill/>
         </p:spPr>
         <p:txBody>
-          <a:bodyPr wrap="square" anchor="ctr" lIns="0" rIns="0" tIns="0" bIns="0">
+          <a:bodyPr wrap="square" lIns="0" tIns="0" rIns="0" bIns="0" anchor="ctr">
             <a:spAutoFit/>
           </a:bodyPr>
           <a:lstStyle/>
@@ -14864,7 +13954,9 @@
         <p:txBody>
           <a:bodyPr rtlCol="0" anchor="ctr"/>
           <a:lstStyle/>
-          <a:p/>
+          <a:p>
+            <a:endParaRPr/>
+          </a:p>
         </p:txBody>
       </p:sp>
       <p:sp>
@@ -14884,7 +13976,7 @@
           <a:noFill/>
         </p:spPr>
         <p:txBody>
-          <a:bodyPr wrap="square" anchor="ctr" lIns="0" rIns="0" tIns="0" bIns="0">
+          <a:bodyPr wrap="square" lIns="0" tIns="0" rIns="0" bIns="0" anchor="ctr">
             <a:spAutoFit/>
           </a:bodyPr>
           <a:lstStyle/>
@@ -14923,7 +14015,7 @@
           <a:noFill/>
         </p:spPr>
         <p:txBody>
-          <a:bodyPr wrap="square" anchor="ctr" lIns="0" rIns="0" tIns="0" bIns="0">
+          <a:bodyPr wrap="square" lIns="0" tIns="0" rIns="0" bIns="0" anchor="ctr">
             <a:spAutoFit/>
           </a:bodyPr>
           <a:lstStyle/>
@@ -14993,7 +14085,9 @@
         <p:txBody>
           <a:bodyPr rtlCol="0" anchor="ctr"/>
           <a:lstStyle/>
-          <a:p/>
+          <a:p>
+            <a:endParaRPr/>
+          </a:p>
         </p:txBody>
       </p:sp>
       <p:sp>
@@ -15013,7 +14107,7 @@
           <a:noFill/>
         </p:spPr>
         <p:txBody>
-          <a:bodyPr wrap="square" anchor="ctr" lIns="0" rIns="0" tIns="0" bIns="0">
+          <a:bodyPr wrap="square" lIns="0" tIns="0" rIns="0" bIns="0" anchor="ctr">
             <a:spAutoFit/>
           </a:bodyPr>
           <a:lstStyle/>
@@ -15052,7 +14146,7 @@
           <a:noFill/>
         </p:spPr>
         <p:txBody>
-          <a:bodyPr wrap="square" anchor="ctr" lIns="0" rIns="0" tIns="0" bIns="0">
+          <a:bodyPr wrap="square" lIns="0" tIns="0" rIns="0" bIns="0" anchor="ctr">
             <a:spAutoFit/>
           </a:bodyPr>
           <a:lstStyle/>
@@ -15129,15 +14223,39 @@
                 <a:tableStyleId>{2D5ABB26-0587-4C30-8999-92F81FD0307C}</a:tableStyleId>
               </a:tblPr>
               <a:tblGrid>
-                <a:gridCol w="1005840"/>
-                <a:gridCol w="1691640"/>
-                <a:gridCol w="1490472"/>
-                <a:gridCol w="868680"/>
+                <a:gridCol w="1005840">
+                  <a:extLst>
+                    <a:ext uri="{9D8B030D-6E8A-4147-A177-3AD203B41FA5}">
+                      <a16:colId xmlns:a16="http://schemas.microsoft.com/office/drawing/2014/main" val="20000"/>
+                    </a:ext>
+                  </a:extLst>
+                </a:gridCol>
+                <a:gridCol w="1691640">
+                  <a:extLst>
+                    <a:ext uri="{9D8B030D-6E8A-4147-A177-3AD203B41FA5}">
+                      <a16:colId xmlns:a16="http://schemas.microsoft.com/office/drawing/2014/main" val="20001"/>
+                    </a:ext>
+                  </a:extLst>
+                </a:gridCol>
+                <a:gridCol w="1490472">
+                  <a:extLst>
+                    <a:ext uri="{9D8B030D-6E8A-4147-A177-3AD203B41FA5}">
+                      <a16:colId xmlns:a16="http://schemas.microsoft.com/office/drawing/2014/main" val="20002"/>
+                    </a:ext>
+                  </a:extLst>
+                </a:gridCol>
+                <a:gridCol w="868680">
+                  <a:extLst>
+                    <a:ext uri="{9D8B030D-6E8A-4147-A177-3AD203B41FA5}">
+                      <a16:colId xmlns:a16="http://schemas.microsoft.com/office/drawing/2014/main" val="20003"/>
+                    </a:ext>
+                  </a:extLst>
+                </a:gridCol>
               </a:tblGrid>
               <a:tr h="420624">
                 <a:tc>
                   <a:txBody>
-                    <a:bodyPr wrap="square"/>
+                    <a:bodyPr/>
                     <a:lstStyle/>
                     <a:p>
                       <a:r>
@@ -15151,7 +14269,7 @@
                       </a:r>
                     </a:p>
                   </a:txBody>
-                  <a:tcPr marL="91440" marR="91440" marT="36576" marB="36576" anchor="ctr">
+                  <a:tcPr marT="36576" marB="36576" anchor="ctr">
                     <a:solidFill>
                       <a:srgbClr val="0E1726"/>
                     </a:solidFill>
@@ -15159,7 +14277,7 @@
                 </a:tc>
                 <a:tc>
                   <a:txBody>
-                    <a:bodyPr wrap="square"/>
+                    <a:bodyPr/>
                     <a:lstStyle/>
                     <a:p>
                       <a:r>
@@ -15191,7 +14309,7 @@
                       </a:r>
                     </a:p>
                   </a:txBody>
-                  <a:tcPr marL="91440" marR="91440" marT="36576" marB="36576" anchor="ctr">
+                  <a:tcPr marT="36576" marB="36576" anchor="ctr">
                     <a:solidFill>
                       <a:srgbClr val="0E1726"/>
                     </a:solidFill>
@@ -15199,7 +14317,7 @@
                 </a:tc>
                 <a:tc>
                   <a:txBody>
-                    <a:bodyPr wrap="square"/>
+                    <a:bodyPr/>
                     <a:lstStyle/>
                     <a:p>
                       <a:r>
@@ -15213,7 +14331,7 @@
                       </a:r>
                     </a:p>
                   </a:txBody>
-                  <a:tcPr marL="91440" marR="91440" marT="36576" marB="36576" anchor="ctr">
+                  <a:tcPr marT="36576" marB="36576" anchor="ctr">
                     <a:solidFill>
                       <a:srgbClr val="0E1726"/>
                     </a:solidFill>
@@ -15221,7 +14339,7 @@
                 </a:tc>
                 <a:tc>
                   <a:txBody>
-                    <a:bodyPr wrap="square"/>
+                    <a:bodyPr/>
                     <a:lstStyle/>
                     <a:p>
                       <a:r>
@@ -15235,17 +14353,22 @@
                       </a:r>
                     </a:p>
                   </a:txBody>
-                  <a:tcPr marL="91440" marR="91440" marT="36576" marB="36576" anchor="ctr">
+                  <a:tcPr marT="36576" marB="36576" anchor="ctr">
                     <a:solidFill>
                       <a:srgbClr val="0E1726"/>
                     </a:solidFill>
                   </a:tcPr>
                 </a:tc>
+                <a:extLst>
+                  <a:ext uri="{0D108BD9-81ED-4DB2-BD59-A6C34878D82A}">
+                    <a16:rowId xmlns:a16="http://schemas.microsoft.com/office/drawing/2014/main" val="10000"/>
+                  </a:ext>
+                </a:extLst>
               </a:tr>
               <a:tr h="420624">
                 <a:tc>
                   <a:txBody>
-                    <a:bodyPr wrap="square"/>
+                    <a:bodyPr/>
                     <a:lstStyle/>
                     <a:p>
                       <a:r>
@@ -15259,7 +14382,7 @@
                       </a:r>
                     </a:p>
                   </a:txBody>
-                  <a:tcPr marL="91440" marR="91440" marT="36576" marB="36576" anchor="ctr">
+                  <a:tcPr marT="36576" marB="36576" anchor="ctr">
                     <a:solidFill>
                       <a:srgbClr val="FFFFFF"/>
                     </a:solidFill>
@@ -15267,7 +14390,7 @@
                 </a:tc>
                 <a:tc>
                   <a:txBody>
-                    <a:bodyPr wrap="square"/>
+                    <a:bodyPr/>
                     <a:lstStyle/>
                     <a:p>
                       <a:r>
@@ -15281,7 +14404,7 @@
                       </a:r>
                     </a:p>
                   </a:txBody>
-                  <a:tcPr marL="91440" marR="91440" marT="36576" marB="36576" anchor="ctr">
+                  <a:tcPr marT="36576" marB="36576" anchor="ctr">
                     <a:solidFill>
                       <a:srgbClr val="FFFFFF"/>
                     </a:solidFill>
@@ -15289,7 +14412,7 @@
                 </a:tc>
                 <a:tc>
                   <a:txBody>
-                    <a:bodyPr wrap="square"/>
+                    <a:bodyPr/>
                     <a:lstStyle/>
                     <a:p>
                       <a:r>
@@ -15303,7 +14426,7 @@
                       </a:r>
                     </a:p>
                   </a:txBody>
-                  <a:tcPr marL="91440" marR="91440" marT="36576" marB="36576" anchor="ctr">
+                  <a:tcPr marT="36576" marB="36576" anchor="ctr">
                     <a:solidFill>
                       <a:srgbClr val="FFFFFF"/>
                     </a:solidFill>
@@ -15311,7 +14434,7 @@
                 </a:tc>
                 <a:tc>
                   <a:txBody>
-                    <a:bodyPr wrap="square"/>
+                    <a:bodyPr/>
                     <a:lstStyle/>
                     <a:p>
                       <a:r>
@@ -15325,17 +14448,22 @@
                       </a:r>
                     </a:p>
                   </a:txBody>
-                  <a:tcPr marL="91440" marR="91440" marT="36576" marB="36576" anchor="ctr">
+                  <a:tcPr marT="36576" marB="36576" anchor="ctr">
                     <a:solidFill>
                       <a:srgbClr val="FFFFFF"/>
                     </a:solidFill>
                   </a:tcPr>
                 </a:tc>
+                <a:extLst>
+                  <a:ext uri="{0D108BD9-81ED-4DB2-BD59-A6C34878D82A}">
+                    <a16:rowId xmlns:a16="http://schemas.microsoft.com/office/drawing/2014/main" val="10001"/>
+                  </a:ext>
+                </a:extLst>
               </a:tr>
               <a:tr h="420624">
                 <a:tc>
                   <a:txBody>
-                    <a:bodyPr wrap="square"/>
+                    <a:bodyPr/>
                     <a:lstStyle/>
                     <a:p>
                       <a:r>
@@ -15349,7 +14477,7 @@
                       </a:r>
                     </a:p>
                   </a:txBody>
-                  <a:tcPr marL="91440" marR="91440" marT="36576" marB="36576" anchor="ctr">
+                  <a:tcPr marT="36576" marB="36576" anchor="ctr">
                     <a:solidFill>
                       <a:srgbClr val="F2F4F7"/>
                     </a:solidFill>
@@ -15357,7 +14485,7 @@
                 </a:tc>
                 <a:tc>
                   <a:txBody>
-                    <a:bodyPr wrap="square"/>
+                    <a:bodyPr/>
                     <a:lstStyle/>
                     <a:p>
                       <a:r>
@@ -15371,7 +14499,7 @@
                       </a:r>
                     </a:p>
                   </a:txBody>
-                  <a:tcPr marL="91440" marR="91440" marT="36576" marB="36576" anchor="ctr">
+                  <a:tcPr marT="36576" marB="36576" anchor="ctr">
                     <a:solidFill>
                       <a:srgbClr val="F2F4F7"/>
                     </a:solidFill>
@@ -15379,7 +14507,7 @@
                 </a:tc>
                 <a:tc>
                   <a:txBody>
-                    <a:bodyPr wrap="square"/>
+                    <a:bodyPr/>
                     <a:lstStyle/>
                     <a:p>
                       <a:r>
@@ -15393,7 +14521,7 @@
                       </a:r>
                     </a:p>
                   </a:txBody>
-                  <a:tcPr marL="91440" marR="91440" marT="36576" marB="36576" anchor="ctr">
+                  <a:tcPr marT="36576" marB="36576" anchor="ctr">
                     <a:solidFill>
                       <a:srgbClr val="F2F4F7"/>
                     </a:solidFill>
@@ -15401,7 +14529,7 @@
                 </a:tc>
                 <a:tc>
                   <a:txBody>
-                    <a:bodyPr wrap="square"/>
+                    <a:bodyPr/>
                     <a:lstStyle/>
                     <a:p>
                       <a:r>
@@ -15415,17 +14543,22 @@
                       </a:r>
                     </a:p>
                   </a:txBody>
-                  <a:tcPr marL="91440" marR="91440" marT="36576" marB="36576" anchor="ctr">
+                  <a:tcPr marT="36576" marB="36576" anchor="ctr">
                     <a:solidFill>
                       <a:srgbClr val="F2F4F7"/>
                     </a:solidFill>
                   </a:tcPr>
                 </a:tc>
+                <a:extLst>
+                  <a:ext uri="{0D108BD9-81ED-4DB2-BD59-A6C34878D82A}">
+                    <a16:rowId xmlns:a16="http://schemas.microsoft.com/office/drawing/2014/main" val="10002"/>
+                  </a:ext>
+                </a:extLst>
               </a:tr>
               <a:tr h="420624">
                 <a:tc>
                   <a:txBody>
-                    <a:bodyPr wrap="square"/>
+                    <a:bodyPr/>
                     <a:lstStyle/>
                     <a:p>
                       <a:r>
@@ -15439,7 +14572,7 @@
                       </a:r>
                     </a:p>
                   </a:txBody>
-                  <a:tcPr marL="91440" marR="91440" marT="36576" marB="36576" anchor="ctr">
+                  <a:tcPr marT="36576" marB="36576" anchor="ctr">
                     <a:solidFill>
                       <a:srgbClr val="FFFFFF"/>
                     </a:solidFill>
@@ -15447,7 +14580,7 @@
                 </a:tc>
                 <a:tc>
                   <a:txBody>
-                    <a:bodyPr wrap="square"/>
+                    <a:bodyPr/>
                     <a:lstStyle/>
                     <a:p>
                       <a:r>
@@ -15461,7 +14594,7 @@
                       </a:r>
                     </a:p>
                   </a:txBody>
-                  <a:tcPr marL="91440" marR="91440" marT="36576" marB="36576" anchor="ctr">
+                  <a:tcPr marT="36576" marB="36576" anchor="ctr">
                     <a:solidFill>
                       <a:srgbClr val="FFFFFF"/>
                     </a:solidFill>
@@ -15469,7 +14602,7 @@
                 </a:tc>
                 <a:tc>
                   <a:txBody>
-                    <a:bodyPr wrap="square"/>
+                    <a:bodyPr/>
                     <a:lstStyle/>
                     <a:p>
                       <a:r>
@@ -15483,7 +14616,7 @@
                       </a:r>
                     </a:p>
                   </a:txBody>
-                  <a:tcPr marL="91440" marR="91440" marT="36576" marB="36576" anchor="ctr">
+                  <a:tcPr marT="36576" marB="36576" anchor="ctr">
                     <a:solidFill>
                       <a:srgbClr val="FFFFFF"/>
                     </a:solidFill>
@@ -15491,7 +14624,7 @@
                 </a:tc>
                 <a:tc>
                   <a:txBody>
-                    <a:bodyPr wrap="square"/>
+                    <a:bodyPr/>
                     <a:lstStyle/>
                     <a:p>
                       <a:r>
@@ -15505,12 +14638,17 @@
                       </a:r>
                     </a:p>
                   </a:txBody>
-                  <a:tcPr marL="91440" marR="91440" marT="36576" marB="36576" anchor="ctr">
+                  <a:tcPr marT="36576" marB="36576" anchor="ctr">
                     <a:solidFill>
                       <a:srgbClr val="FFFFFF"/>
                     </a:solidFill>
                   </a:tcPr>
                 </a:tc>
+                <a:extLst>
+                  <a:ext uri="{0D108BD9-81ED-4DB2-BD59-A6C34878D82A}">
+                    <a16:rowId xmlns:a16="http://schemas.microsoft.com/office/drawing/2014/main" val="10003"/>
+                  </a:ext>
+                </a:extLst>
               </a:tr>
             </a:tbl>
           </a:graphicData>
@@ -15557,7 +14695,9 @@
         <p:txBody>
           <a:bodyPr rtlCol="0" anchor="ctr"/>
           <a:lstStyle/>
-          <a:p/>
+          <a:p>
+            <a:endParaRPr/>
+          </a:p>
         </p:txBody>
       </p:sp>
       <p:sp>
@@ -15577,7 +14717,7 @@
           <a:noFill/>
         </p:spPr>
         <p:txBody>
-          <a:bodyPr wrap="square" anchor="t" lIns="0" rIns="0" tIns="0" bIns="0">
+          <a:bodyPr wrap="square" lIns="0" tIns="0" rIns="0" bIns="0" anchor="t">
             <a:spAutoFit/>
           </a:bodyPr>
           <a:lstStyle/>
@@ -15616,7 +14756,7 @@
           <a:noFill/>
         </p:spPr>
         <p:txBody>
-          <a:bodyPr wrap="square" anchor="t" lIns="0" rIns="0" tIns="0" bIns="0">
+          <a:bodyPr wrap="square" lIns="0" tIns="0" rIns="0" bIns="0" anchor="t">
             <a:spAutoFit/>
           </a:bodyPr>
           <a:lstStyle/>
@@ -15679,7 +14819,9 @@
         <p:txBody>
           <a:bodyPr rtlCol="0" anchor="ctr"/>
           <a:lstStyle/>
-          <a:p/>
+          <a:p>
+            <a:endParaRPr/>
+          </a:p>
         </p:txBody>
       </p:sp>
       <p:sp>
@@ -15699,7 +14841,7 @@
           <a:noFill/>
         </p:spPr>
         <p:txBody>
-          <a:bodyPr wrap="square" anchor="t" lIns="0" rIns="0" tIns="0" bIns="0">
+          <a:bodyPr wrap="square" lIns="0" tIns="0" rIns="0" bIns="0" anchor="t">
             <a:spAutoFit/>
           </a:bodyPr>
           <a:lstStyle/>
@@ -15738,7 +14880,7 @@
           <a:noFill/>
         </p:spPr>
         <p:txBody>
-          <a:bodyPr wrap="square" anchor="t" lIns="0" rIns="0" tIns="0" bIns="0">
+          <a:bodyPr wrap="square" lIns="0" tIns="0" rIns="0" bIns="0" anchor="t">
             <a:spAutoFit/>
           </a:bodyPr>
           <a:lstStyle/>
@@ -15787,7 +14929,7 @@
 </file>
 
 <file path=ppt/slides/slide9.xml><?xml version="1.0" encoding="utf-8"?>
-<p:sld xmlns:a="http://schemas.openxmlformats.org/drawingml/2006/main" xmlns:p="http://schemas.openxmlformats.org/presentationml/2006/main" xmlns:r="http://schemas.openxmlformats.org/officeDocument/2006/relationships">
+<p:sld xmlns:a="http://schemas.openxmlformats.org/drawingml/2006/main" xmlns:r="http://schemas.openxmlformats.org/officeDocument/2006/relationships" xmlns:p="http://schemas.openxmlformats.org/presentationml/2006/main">
   <p:cSld>
     <p:bg>
       <p:bgPr>
@@ -15803,7 +14945,14 @@
         <p:cNvGrpSpPr/>
         <p:nvPr/>
       </p:nvGrpSpPr>
-      <p:grpSpPr/>
+      <p:grpSpPr>
+        <a:xfrm>
+          <a:off x="0" y="0"/>
+          <a:ext cx="0" cy="0"/>
+          <a:chOff x="0" y="0"/>
+          <a:chExt cx="0" cy="0"/>
+        </a:xfrm>
+      </p:grpSpPr>
       <p:sp>
         <p:nvSpPr>
           <p:cNvPr id="2" name="TextBox 1"/>
@@ -15821,7 +14970,7 @@
           <a:noFill/>
         </p:spPr>
         <p:txBody>
-          <a:bodyPr wrap="square" anchor="t" lIns="0" rIns="0" tIns="0" bIns="0">
+          <a:bodyPr wrap="square" lIns="0" tIns="0" rIns="0" bIns="0" anchor="t">
             <a:spAutoFit/>
           </a:bodyPr>
           <a:lstStyle/>
@@ -15860,7 +15009,7 @@
           <a:noFill/>
         </p:spPr>
         <p:txBody>
-          <a:bodyPr wrap="square" anchor="t" lIns="0" rIns="0" tIns="0" bIns="0">
+          <a:bodyPr wrap="square" lIns="0" tIns="0" rIns="0" bIns="0" anchor="t">
             <a:spAutoFit/>
           </a:bodyPr>
           <a:lstStyle/>
@@ -15891,7 +15040,7 @@
           <p:nvPr/>
         </p:nvPicPr>
         <p:blipFill>
-          <a:blip r:embed="rId2"/>
+          <a:blip r:embed="rId3"/>
           <a:stretch>
             <a:fillRect/>
           </a:stretch>
@@ -15923,7 +15072,7 @@
           <a:noFill/>
         </p:spPr>
         <p:txBody>
-          <a:bodyPr wrap="square" anchor="t" lIns="0" rIns="0" tIns="0" bIns="0">
+          <a:bodyPr wrap="square" lIns="0" tIns="0" rIns="0" bIns="0" anchor="t">
             <a:spAutoFit/>
           </a:bodyPr>
           <a:lstStyle/>
@@ -15962,7 +15111,7 @@
           <a:noFill/>
         </p:spPr>
         <p:txBody>
-          <a:bodyPr wrap="square" anchor="t" lIns="0" rIns="0" tIns="0" bIns="0">
+          <a:bodyPr wrap="square" lIns="0" tIns="0" rIns="0" bIns="0" anchor="t">
             <a:spAutoFit/>
           </a:bodyPr>
           <a:lstStyle/>
@@ -16001,7 +15150,7 @@
           <a:noFill/>
         </p:spPr>
         <p:txBody>
-          <a:bodyPr wrap="square" anchor="t" lIns="0" rIns="0" tIns="0" bIns="0">
+          <a:bodyPr wrap="square" lIns="0" tIns="0" rIns="0" bIns="0" anchor="t">
             <a:spAutoFit/>
           </a:bodyPr>
           <a:lstStyle/>
@@ -16018,7 +15167,7 @@
                 </a:solidFill>
                 <a:latin typeface="Bahnschrift"/>
               </a:rPr>
-              <a:t>9</a:t>
+              <a:t>10</a:t>
             </a:r>
           </a:p>
         </p:txBody>
@@ -16062,7 +15211,9 @@
         <p:txBody>
           <a:bodyPr rtlCol="0" anchor="ctr"/>
           <a:lstStyle/>
-          <a:p/>
+          <a:p>
+            <a:endParaRPr/>
+          </a:p>
         </p:txBody>
       </p:sp>
       <p:sp>
@@ -16082,7 +15233,7 @@
           <a:noFill/>
         </p:spPr>
         <p:txBody>
-          <a:bodyPr wrap="square" anchor="ctr" lIns="0" rIns="0" tIns="0" bIns="0">
+          <a:bodyPr wrap="square" lIns="0" tIns="0" rIns="0" bIns="0" anchor="ctr">
             <a:spAutoFit/>
           </a:bodyPr>
           <a:lstStyle/>
@@ -16121,7 +15272,7 @@
           <a:noFill/>
         </p:spPr>
         <p:txBody>
-          <a:bodyPr wrap="square" anchor="t" lIns="0" rIns="0" tIns="0" bIns="0">
+          <a:bodyPr wrap="square" lIns="0" tIns="0" rIns="0" bIns="0" anchor="t">
             <a:spAutoFit/>
           </a:bodyPr>
           <a:lstStyle/>
@@ -16160,7 +15311,7 @@
           <a:noFill/>
         </p:spPr>
         <p:txBody>
-          <a:bodyPr wrap="square" anchor="t" lIns="0" rIns="0" tIns="0" bIns="0">
+          <a:bodyPr wrap="square" lIns="0" tIns="0" rIns="0" bIns="0" anchor="t">
             <a:spAutoFit/>
           </a:bodyPr>
           <a:lstStyle/>
@@ -16257,7 +15408,9 @@
         <p:txBody>
           <a:bodyPr rtlCol="0" anchor="ctr"/>
           <a:lstStyle/>
-          <a:p/>
+          <a:p>
+            <a:endParaRPr/>
+          </a:p>
         </p:txBody>
       </p:sp>
       <p:sp>
@@ -16277,7 +15430,7 @@
           <a:noFill/>
         </p:spPr>
         <p:txBody>
-          <a:bodyPr wrap="square" anchor="ctr" lIns="0" rIns="0" tIns="0" bIns="0">
+          <a:bodyPr wrap="square" lIns="0" tIns="0" rIns="0" bIns="0" anchor="ctr">
             <a:spAutoFit/>
           </a:bodyPr>
           <a:lstStyle/>
@@ -16316,7 +15469,7 @@
           <a:noFill/>
         </p:spPr>
         <p:txBody>
-          <a:bodyPr wrap="square" anchor="t" lIns="0" rIns="0" tIns="0" bIns="0">
+          <a:bodyPr wrap="square" lIns="0" tIns="0" rIns="0" bIns="0" anchor="t">
             <a:spAutoFit/>
           </a:bodyPr>
           <a:lstStyle/>
@@ -16355,7 +15508,7 @@
           <a:noFill/>
         </p:spPr>
         <p:txBody>
-          <a:bodyPr wrap="square" anchor="t" lIns="0" rIns="0" tIns="0" bIns="0">
+          <a:bodyPr wrap="square" lIns="0" tIns="0" rIns="0" bIns="0" anchor="t">
             <a:spAutoFit/>
           </a:bodyPr>
           <a:lstStyle/>
@@ -16416,7 +15569,9 @@
         <p:txBody>
           <a:bodyPr rtlCol="0" anchor="ctr"/>
           <a:lstStyle/>
-          <a:p/>
+          <a:p>
+            <a:endParaRPr/>
+          </a:p>
         </p:txBody>
       </p:sp>
       <p:sp>
@@ -16436,7 +15591,7 @@
           <a:noFill/>
         </p:spPr>
         <p:txBody>
-          <a:bodyPr wrap="square" anchor="ctr" lIns="0" rIns="0" tIns="0" bIns="0">
+          <a:bodyPr wrap="square" lIns="0" tIns="0" rIns="0" bIns="0" anchor="ctr">
             <a:spAutoFit/>
           </a:bodyPr>
           <a:lstStyle/>
@@ -16475,7 +15630,7 @@
           <a:noFill/>
         </p:spPr>
         <p:txBody>
-          <a:bodyPr wrap="square" anchor="t" lIns="0" rIns="0" tIns="0" bIns="0">
+          <a:bodyPr wrap="square" lIns="0" tIns="0" rIns="0" bIns="0" anchor="t">
             <a:spAutoFit/>
           </a:bodyPr>
           <a:lstStyle/>
@@ -16514,7 +15669,7 @@
           <a:noFill/>
         </p:spPr>
         <p:txBody>
-          <a:bodyPr wrap="square" anchor="t" lIns="0" rIns="0" tIns="0" bIns="0">
+          <a:bodyPr wrap="square" lIns="0" tIns="0" rIns="0" bIns="0" anchor="t">
             <a:spAutoFit/>
           </a:bodyPr>
           <a:lstStyle/>
@@ -16575,7 +15730,9 @@
         <p:txBody>
           <a:bodyPr rtlCol="0" anchor="ctr"/>
           <a:lstStyle/>
-          <a:p/>
+          <a:p>
+            <a:endParaRPr/>
+          </a:p>
         </p:txBody>
       </p:sp>
       <p:sp>
@@ -16595,7 +15752,7 @@
           <a:noFill/>
         </p:spPr>
         <p:txBody>
-          <a:bodyPr wrap="square" anchor="ctr" lIns="0" rIns="0" tIns="0" bIns="0">
+          <a:bodyPr wrap="square" lIns="0" tIns="0" rIns="0" bIns="0" anchor="ctr">
             <a:spAutoFit/>
           </a:bodyPr>
           <a:lstStyle/>
@@ -16634,7 +15791,7 @@
           <a:noFill/>
         </p:spPr>
         <p:txBody>
-          <a:bodyPr wrap="square" anchor="t" lIns="0" rIns="0" tIns="0" bIns="0">
+          <a:bodyPr wrap="square" lIns="0" tIns="0" rIns="0" bIns="0" anchor="t">
             <a:spAutoFit/>
           </a:bodyPr>
           <a:lstStyle/>
@@ -16673,7 +15830,7 @@
           <a:noFill/>
         </p:spPr>
         <p:txBody>
-          <a:bodyPr wrap="square" anchor="t" lIns="0" rIns="0" tIns="0" bIns="0">
+          <a:bodyPr wrap="square" lIns="0" tIns="0" rIns="0" bIns="0" anchor="t">
             <a:spAutoFit/>
           </a:bodyPr>
           <a:lstStyle/>
@@ -16772,7 +15929,9 @@
         <p:txBody>
           <a:bodyPr rtlCol="0" anchor="ctr"/>
           <a:lstStyle/>
-          <a:p/>
+          <a:p>
+            <a:endParaRPr/>
+          </a:p>
         </p:txBody>
       </p:sp>
       <p:sp>
@@ -16792,7 +15951,7 @@
           <a:noFill/>
         </p:spPr>
         <p:txBody>
-          <a:bodyPr wrap="square" anchor="ctr" lIns="0" rIns="0" tIns="0" bIns="0">
+          <a:bodyPr wrap="square" lIns="0" tIns="0" rIns="0" bIns="0" anchor="ctr">
             <a:spAutoFit/>
           </a:bodyPr>
           <a:lstStyle/>
@@ -16979,7 +16138,9 @@
         <p:txBody>
           <a:bodyPr rtlCol="0" anchor="ctr"/>
           <a:lstStyle/>
-          <a:p/>
+          <a:p>
+            <a:endParaRPr/>
+          </a:p>
         </p:txBody>
       </p:sp>
       <p:sp>
@@ -16999,7 +16160,7 @@
           <a:noFill/>
         </p:spPr>
         <p:txBody>
-          <a:bodyPr wrap="square" anchor="t" lIns="0" rIns="0" tIns="0" bIns="0">
+          <a:bodyPr wrap="square" lIns="0" tIns="0" rIns="0" bIns="0" anchor="t">
             <a:spAutoFit/>
           </a:bodyPr>
           <a:lstStyle/>
@@ -17038,7 +16199,7 @@
           <a:noFill/>
         </p:spPr>
         <p:txBody>
-          <a:bodyPr wrap="square" anchor="t" lIns="0" rIns="0" tIns="0" bIns="0">
+          <a:bodyPr wrap="square" lIns="0" tIns="0" rIns="0" bIns="0" anchor="t">
             <a:spAutoFit/>
           </a:bodyPr>
           <a:lstStyle/>
@@ -17101,7 +16262,9 @@
         <p:txBody>
           <a:bodyPr rtlCol="0" anchor="ctr"/>
           <a:lstStyle/>
-          <a:p/>
+          <a:p>
+            <a:endParaRPr/>
+          </a:p>
         </p:txBody>
       </p:sp>
       <p:sp>
@@ -17121,7 +16284,7 @@
           <a:noFill/>
         </p:spPr>
         <p:txBody>
-          <a:bodyPr wrap="square" anchor="t" lIns="0" rIns="0" tIns="0" bIns="0">
+          <a:bodyPr wrap="square" lIns="0" tIns="0" rIns="0" bIns="0" anchor="t">
             <a:spAutoFit/>
           </a:bodyPr>
           <a:lstStyle/>
@@ -17160,7 +16323,7 @@
           <a:noFill/>
         </p:spPr>
         <p:txBody>
-          <a:bodyPr wrap="square" anchor="t" lIns="0" rIns="0" tIns="0" bIns="0">
+          <a:bodyPr wrap="square" lIns="0" tIns="0" rIns="0" bIns="0" anchor="t">
             <a:spAutoFit/>
           </a:bodyPr>
           <a:lstStyle/>
@@ -17223,7 +16386,9 @@
         <p:txBody>
           <a:bodyPr rtlCol="0" anchor="ctr"/>
           <a:lstStyle/>
-          <a:p/>
+          <a:p>
+            <a:endParaRPr/>
+          </a:p>
         </p:txBody>
       </p:sp>
       <p:sp>
@@ -17243,7 +16408,7 @@
           <a:noFill/>
         </p:spPr>
         <p:txBody>
-          <a:bodyPr wrap="square" anchor="t" lIns="0" rIns="0" tIns="0" bIns="0">
+          <a:bodyPr wrap="square" lIns="0" tIns="0" rIns="0" bIns="0" anchor="t">
             <a:spAutoFit/>
           </a:bodyPr>
           <a:lstStyle/>
@@ -17282,7 +16447,7 @@
           <a:noFill/>
         </p:spPr>
         <p:txBody>
-          <a:bodyPr wrap="square" anchor="t" lIns="0" rIns="0" tIns="0" bIns="0">
+          <a:bodyPr wrap="square" lIns="0" tIns="0" rIns="0" bIns="0" anchor="t">
             <a:spAutoFit/>
           </a:bodyPr>
           <a:lstStyle/>
@@ -17323,15 +16488,39 @@
                 <a:tableStyleId>{2D5ABB26-0587-4C30-8999-92F81FD0307C}</a:tableStyleId>
               </a:tblPr>
               <a:tblGrid>
-                <a:gridCol w="914400"/>
-                <a:gridCol w="1417320"/>
-                <a:gridCol w="1280160"/>
-                <a:gridCol w="1627632"/>
+                <a:gridCol w="914400">
+                  <a:extLst>
+                    <a:ext uri="{9D8B030D-6E8A-4147-A177-3AD203B41FA5}">
+                      <a16:colId xmlns:a16="http://schemas.microsoft.com/office/drawing/2014/main" val="20000"/>
+                    </a:ext>
+                  </a:extLst>
+                </a:gridCol>
+                <a:gridCol w="1417320">
+                  <a:extLst>
+                    <a:ext uri="{9D8B030D-6E8A-4147-A177-3AD203B41FA5}">
+                      <a16:colId xmlns:a16="http://schemas.microsoft.com/office/drawing/2014/main" val="20001"/>
+                    </a:ext>
+                  </a:extLst>
+                </a:gridCol>
+                <a:gridCol w="1280160">
+                  <a:extLst>
+                    <a:ext uri="{9D8B030D-6E8A-4147-A177-3AD203B41FA5}">
+                      <a16:colId xmlns:a16="http://schemas.microsoft.com/office/drawing/2014/main" val="20002"/>
+                    </a:ext>
+                  </a:extLst>
+                </a:gridCol>
+                <a:gridCol w="1627632">
+                  <a:extLst>
+                    <a:ext uri="{9D8B030D-6E8A-4147-A177-3AD203B41FA5}">
+                      <a16:colId xmlns:a16="http://schemas.microsoft.com/office/drawing/2014/main" val="20003"/>
+                    </a:ext>
+                  </a:extLst>
+                </a:gridCol>
               </a:tblGrid>
               <a:tr h="347472">
                 <a:tc>
                   <a:txBody>
-                    <a:bodyPr wrap="square"/>
+                    <a:bodyPr/>
                     <a:lstStyle/>
                     <a:p>
                       <a:r>
@@ -17345,7 +16534,7 @@
                       </a:r>
                     </a:p>
                   </a:txBody>
-                  <a:tcPr marL="91440" marR="91440" marT="36576" marB="36576" anchor="ctr">
+                  <a:tcPr marT="36576" marB="36576" anchor="ctr">
                     <a:solidFill>
                       <a:srgbClr val="0E1726"/>
                     </a:solidFill>
@@ -17353,7 +16542,7 @@
                 </a:tc>
                 <a:tc>
                   <a:txBody>
-                    <a:bodyPr wrap="square"/>
+                    <a:bodyPr/>
                     <a:lstStyle/>
                     <a:p>
                       <a:r>
@@ -17367,7 +16556,7 @@
                       </a:r>
                     </a:p>
                   </a:txBody>
-                  <a:tcPr marL="91440" marR="91440" marT="36576" marB="36576" anchor="ctr">
+                  <a:tcPr marT="36576" marB="36576" anchor="ctr">
                     <a:solidFill>
                       <a:srgbClr val="0E1726"/>
                     </a:solidFill>
@@ -17375,7 +16564,7 @@
                 </a:tc>
                 <a:tc>
                   <a:txBody>
-                    <a:bodyPr wrap="square"/>
+                    <a:bodyPr/>
                     <a:lstStyle/>
                     <a:p>
                       <a:r>
@@ -17389,7 +16578,7 @@
                       </a:r>
                     </a:p>
                   </a:txBody>
-                  <a:tcPr marL="91440" marR="91440" marT="36576" marB="36576" anchor="ctr">
+                  <a:tcPr marT="36576" marB="36576" anchor="ctr">
                     <a:solidFill>
                       <a:srgbClr val="0E1726"/>
                     </a:solidFill>
@@ -17397,7 +16586,7 @@
                 </a:tc>
                 <a:tc>
                   <a:txBody>
-                    <a:bodyPr wrap="square"/>
+                    <a:bodyPr/>
                     <a:lstStyle/>
                     <a:p>
                       <a:r>
@@ -17411,17 +16600,22 @@
                       </a:r>
                     </a:p>
                   </a:txBody>
-                  <a:tcPr marL="91440" marR="91440" marT="36576" marB="36576" anchor="ctr">
+                  <a:tcPr marT="36576" marB="36576" anchor="ctr">
                     <a:solidFill>
                       <a:srgbClr val="0E1726"/>
                     </a:solidFill>
                   </a:tcPr>
                 </a:tc>
+                <a:extLst>
+                  <a:ext uri="{0D108BD9-81ED-4DB2-BD59-A6C34878D82A}">
+                    <a16:rowId xmlns:a16="http://schemas.microsoft.com/office/drawing/2014/main" val="10000"/>
+                  </a:ext>
+                </a:extLst>
               </a:tr>
               <a:tr h="347472">
                 <a:tc>
                   <a:txBody>
-                    <a:bodyPr wrap="square"/>
+                    <a:bodyPr/>
                     <a:lstStyle/>
                     <a:p>
                       <a:r>
@@ -17435,7 +16629,7 @@
                       </a:r>
                     </a:p>
                   </a:txBody>
-                  <a:tcPr marL="91440" marR="91440" marT="36576" marB="36576" anchor="ctr">
+                  <a:tcPr marT="36576" marB="36576" anchor="ctr">
                     <a:solidFill>
                       <a:srgbClr val="FFFFFF"/>
                     </a:solidFill>
@@ -17443,7 +16637,7 @@
                 </a:tc>
                 <a:tc>
                   <a:txBody>
-                    <a:bodyPr wrap="square"/>
+                    <a:bodyPr/>
                     <a:lstStyle/>
                     <a:p>
                       <a:r>
@@ -17457,7 +16651,7 @@
                       </a:r>
                     </a:p>
                   </a:txBody>
-                  <a:tcPr marL="91440" marR="91440" marT="36576" marB="36576" anchor="ctr">
+                  <a:tcPr marT="36576" marB="36576" anchor="ctr">
                     <a:solidFill>
                       <a:srgbClr val="FFFFFF"/>
                     </a:solidFill>
@@ -17465,7 +16659,7 @@
                 </a:tc>
                 <a:tc>
                   <a:txBody>
-                    <a:bodyPr wrap="square"/>
+                    <a:bodyPr/>
                     <a:lstStyle/>
                     <a:p>
                       <a:r>
@@ -17479,7 +16673,7 @@
                       </a:r>
                     </a:p>
                   </a:txBody>
-                  <a:tcPr marL="91440" marR="91440" marT="36576" marB="36576" anchor="ctr">
+                  <a:tcPr marT="36576" marB="36576" anchor="ctr">
                     <a:solidFill>
                       <a:srgbClr val="FFFFFF"/>
                     </a:solidFill>
@@ -17487,7 +16681,7 @@
                 </a:tc>
                 <a:tc>
                   <a:txBody>
-                    <a:bodyPr wrap="square"/>
+                    <a:bodyPr/>
                     <a:lstStyle/>
                     <a:p>
                       <a:r>
@@ -17501,17 +16695,22 @@
                       </a:r>
                     </a:p>
                   </a:txBody>
-                  <a:tcPr marL="91440" marR="91440" marT="36576" marB="36576" anchor="ctr">
+                  <a:tcPr marT="36576" marB="36576" anchor="ctr">
                     <a:solidFill>
                       <a:srgbClr val="FFFFFF"/>
                     </a:solidFill>
                   </a:tcPr>
                 </a:tc>
+                <a:extLst>
+                  <a:ext uri="{0D108BD9-81ED-4DB2-BD59-A6C34878D82A}">
+                    <a16:rowId xmlns:a16="http://schemas.microsoft.com/office/drawing/2014/main" val="10001"/>
+                  </a:ext>
+                </a:extLst>
               </a:tr>
               <a:tr h="347472">
                 <a:tc>
                   <a:txBody>
-                    <a:bodyPr wrap="square"/>
+                    <a:bodyPr/>
                     <a:lstStyle/>
                     <a:p>
                       <a:r>
@@ -17525,7 +16724,7 @@
                       </a:r>
                     </a:p>
                   </a:txBody>
-                  <a:tcPr marL="91440" marR="91440" marT="36576" marB="36576" anchor="ctr">
+                  <a:tcPr marT="36576" marB="36576" anchor="ctr">
                     <a:solidFill>
                       <a:srgbClr val="F2F4F7"/>
                     </a:solidFill>
@@ -17533,7 +16732,7 @@
                 </a:tc>
                 <a:tc>
                   <a:txBody>
-                    <a:bodyPr wrap="square"/>
+                    <a:bodyPr/>
                     <a:lstStyle/>
                     <a:p>
                       <a:r>
@@ -17547,7 +16746,7 @@
                       </a:r>
                     </a:p>
                   </a:txBody>
-                  <a:tcPr marL="91440" marR="91440" marT="36576" marB="36576" anchor="ctr">
+                  <a:tcPr marT="36576" marB="36576" anchor="ctr">
                     <a:solidFill>
                       <a:srgbClr val="F2F4F7"/>
                     </a:solidFill>
@@ -17555,7 +16754,7 @@
                 </a:tc>
                 <a:tc>
                   <a:txBody>
-                    <a:bodyPr wrap="square"/>
+                    <a:bodyPr/>
                     <a:lstStyle/>
                     <a:p>
                       <a:r>
@@ -17569,7 +16768,7 @@
                       </a:r>
                     </a:p>
                   </a:txBody>
-                  <a:tcPr marL="91440" marR="91440" marT="36576" marB="36576" anchor="ctr">
+                  <a:tcPr marT="36576" marB="36576" anchor="ctr">
                     <a:solidFill>
                       <a:srgbClr val="F2F4F7"/>
                     </a:solidFill>
@@ -17577,7 +16776,7 @@
                 </a:tc>
                 <a:tc>
                   <a:txBody>
-                    <a:bodyPr wrap="square"/>
+                    <a:bodyPr/>
                     <a:lstStyle/>
                     <a:p>
                       <a:r>
@@ -17591,17 +16790,22 @@
                       </a:r>
                     </a:p>
                   </a:txBody>
-                  <a:tcPr marL="91440" marR="91440" marT="36576" marB="36576" anchor="ctr">
+                  <a:tcPr marT="36576" marB="36576" anchor="ctr">
                     <a:solidFill>
                       <a:srgbClr val="F2F4F7"/>
                     </a:solidFill>
                   </a:tcPr>
                 </a:tc>
+                <a:extLst>
+                  <a:ext uri="{0D108BD9-81ED-4DB2-BD59-A6C34878D82A}">
+                    <a16:rowId xmlns:a16="http://schemas.microsoft.com/office/drawing/2014/main" val="10002"/>
+                  </a:ext>
+                </a:extLst>
               </a:tr>
               <a:tr h="347472">
                 <a:tc>
                   <a:txBody>
-                    <a:bodyPr wrap="square"/>
+                    <a:bodyPr/>
                     <a:lstStyle/>
                     <a:p>
                       <a:r>
@@ -17615,7 +16819,7 @@
                       </a:r>
                     </a:p>
                   </a:txBody>
-                  <a:tcPr marL="91440" marR="91440" marT="36576" marB="36576" anchor="ctr">
+                  <a:tcPr marT="36576" marB="36576" anchor="ctr">
                     <a:solidFill>
                       <a:srgbClr val="FFFFFF"/>
                     </a:solidFill>
@@ -17623,7 +16827,7 @@
                 </a:tc>
                 <a:tc>
                   <a:txBody>
-                    <a:bodyPr wrap="square"/>
+                    <a:bodyPr/>
                     <a:lstStyle/>
                     <a:p>
                       <a:r>
@@ -17637,7 +16841,7 @@
                       </a:r>
                     </a:p>
                   </a:txBody>
-                  <a:tcPr marL="91440" marR="91440" marT="36576" marB="36576" anchor="ctr">
+                  <a:tcPr marT="36576" marB="36576" anchor="ctr">
                     <a:solidFill>
                       <a:srgbClr val="FFFFFF"/>
                     </a:solidFill>
@@ -17645,7 +16849,7 @@
                 </a:tc>
                 <a:tc>
                   <a:txBody>
-                    <a:bodyPr wrap="square"/>
+                    <a:bodyPr/>
                     <a:lstStyle/>
                     <a:p>
                       <a:r>
@@ -17659,7 +16863,7 @@
                       </a:r>
                     </a:p>
                   </a:txBody>
-                  <a:tcPr marL="91440" marR="91440" marT="36576" marB="36576" anchor="ctr">
+                  <a:tcPr marT="36576" marB="36576" anchor="ctr">
                     <a:solidFill>
                       <a:srgbClr val="FFFFFF"/>
                     </a:solidFill>
@@ -17667,7 +16871,7 @@
                 </a:tc>
                 <a:tc>
                   <a:txBody>
-                    <a:bodyPr wrap="square"/>
+                    <a:bodyPr/>
                     <a:lstStyle/>
                     <a:p>
                       <a:r>
@@ -17681,17 +16885,22 @@
                       </a:r>
                     </a:p>
                   </a:txBody>
-                  <a:tcPr marL="91440" marR="91440" marT="36576" marB="36576" anchor="ctr">
+                  <a:tcPr marT="36576" marB="36576" anchor="ctr">
                     <a:solidFill>
                       <a:srgbClr val="FFFFFF"/>
                     </a:solidFill>
                   </a:tcPr>
                 </a:tc>
+                <a:extLst>
+                  <a:ext uri="{0D108BD9-81ED-4DB2-BD59-A6C34878D82A}">
+                    <a16:rowId xmlns:a16="http://schemas.microsoft.com/office/drawing/2014/main" val="10003"/>
+                  </a:ext>
+                </a:extLst>
               </a:tr>
               <a:tr h="347472">
                 <a:tc>
                   <a:txBody>
-                    <a:bodyPr wrap="square"/>
+                    <a:bodyPr/>
                     <a:lstStyle/>
                     <a:p>
                       <a:r>
@@ -17705,7 +16914,7 @@
                       </a:r>
                     </a:p>
                   </a:txBody>
-                  <a:tcPr marL="91440" marR="91440" marT="36576" marB="36576" anchor="ctr">
+                  <a:tcPr marT="36576" marB="36576" anchor="ctr">
                     <a:solidFill>
                       <a:srgbClr val="F2F4F7"/>
                     </a:solidFill>
@@ -17713,7 +16922,7 @@
                 </a:tc>
                 <a:tc>
                   <a:txBody>
-                    <a:bodyPr wrap="square"/>
+                    <a:bodyPr/>
                     <a:lstStyle/>
                     <a:p>
                       <a:r>
@@ -17727,7 +16936,7 @@
                       </a:r>
                     </a:p>
                   </a:txBody>
-                  <a:tcPr marL="91440" marR="91440" marT="36576" marB="36576" anchor="ctr">
+                  <a:tcPr marT="36576" marB="36576" anchor="ctr">
                     <a:solidFill>
                       <a:srgbClr val="F2F4F7"/>
                     </a:solidFill>
@@ -17735,7 +16944,7 @@
                 </a:tc>
                 <a:tc>
                   <a:txBody>
-                    <a:bodyPr wrap="square"/>
+                    <a:bodyPr/>
                     <a:lstStyle/>
                     <a:p>
                       <a:r>
@@ -17749,7 +16958,7 @@
                       </a:r>
                     </a:p>
                   </a:txBody>
-                  <a:tcPr marL="91440" marR="91440" marT="36576" marB="36576" anchor="ctr">
+                  <a:tcPr marT="36576" marB="36576" anchor="ctr">
                     <a:solidFill>
                       <a:srgbClr val="F2F4F7"/>
                     </a:solidFill>
@@ -17757,7 +16966,7 @@
                 </a:tc>
                 <a:tc>
                   <a:txBody>
-                    <a:bodyPr wrap="square"/>
+                    <a:bodyPr/>
                     <a:lstStyle/>
                     <a:p>
                       <a:r>
@@ -17771,12 +16980,17 @@
                       </a:r>
                     </a:p>
                   </a:txBody>
-                  <a:tcPr marL="91440" marR="91440" marT="36576" marB="36576" anchor="ctr">
+                  <a:tcPr marT="36576" marB="36576" anchor="ctr">
                     <a:solidFill>
                       <a:srgbClr val="F2F4F7"/>
                     </a:solidFill>
                   </a:tcPr>
                 </a:tc>
+                <a:extLst>
+                  <a:ext uri="{0D108BD9-81ED-4DB2-BD59-A6C34878D82A}">
+                    <a16:rowId xmlns:a16="http://schemas.microsoft.com/office/drawing/2014/main" val="10004"/>
+                  </a:ext>
+                </a:extLst>
               </a:tr>
             </a:tbl>
           </a:graphicData>
@@ -17799,7 +17013,7 @@
           <a:noFill/>
         </p:spPr>
         <p:txBody>
-          <a:bodyPr wrap="square" anchor="t" lIns="0" rIns="0" tIns="0" bIns="0">
+          <a:bodyPr wrap="square" lIns="0" tIns="0" rIns="0" bIns="0" anchor="t">
             <a:spAutoFit/>
           </a:bodyPr>
           <a:lstStyle/>
@@ -18150,7 +17364,7 @@
 </file>
 
 <file path=ppt/theme/theme2.xml><?xml version="1.0" encoding="utf-8"?>
-<a:theme xmlns:a="http://schemas.openxmlformats.org/drawingml/2006/main" name="Office Theme">
+<a:theme xmlns:a="http://schemas.openxmlformats.org/drawingml/2006/main" name="Tema de Office">
   <a:themeElements>
     <a:clrScheme name="Office">
       <a:dk1>
@@ -18160,44 +17374,44 @@
         <a:sysClr val="window" lastClr="FFFFFF"/>
       </a:lt1>
       <a:dk2>
-        <a:srgbClr val="1F497D"/>
+        <a:srgbClr val="44546A"/>
       </a:dk2>
       <a:lt2>
-        <a:srgbClr val="EEECE1"/>
+        <a:srgbClr val="E7E6E6"/>
       </a:lt2>
       <a:accent1>
-        <a:srgbClr val="4F81BD"/>
+        <a:srgbClr val="4472C4"/>
       </a:accent1>
       <a:accent2>
-        <a:srgbClr val="C0504D"/>
+        <a:srgbClr val="ED7D31"/>
       </a:accent2>
       <a:accent3>
-        <a:srgbClr val="9BBB59"/>
+        <a:srgbClr val="A5A5A5"/>
       </a:accent3>
       <a:accent4>
-        <a:srgbClr val="8064A2"/>
+        <a:srgbClr val="FFC000"/>
       </a:accent4>
       <a:accent5>
-        <a:srgbClr val="4BACC6"/>
+        <a:srgbClr val="5B9BD5"/>
       </a:accent5>
       <a:accent6>
-        <a:srgbClr val="F79646"/>
+        <a:srgbClr val="70AD47"/>
       </a:accent6>
       <a:hlink>
-        <a:srgbClr val="0000FF"/>
+        <a:srgbClr val="0563C1"/>
       </a:hlink>
       <a:folHlink>
-        <a:srgbClr val="800080"/>
+        <a:srgbClr val="954F72"/>
       </a:folHlink>
     </a:clrScheme>
     <a:fontScheme name="Office">
       <a:majorFont>
-        <a:latin typeface="Calibri"/>
+        <a:latin typeface="Calibri Light" panose="020F0302020204030204"/>
         <a:ea typeface=""/>
         <a:cs typeface=""/>
-        <a:font script="Jpan" typeface="ＭＳ Ｐゴシック"/>
+        <a:font script="Jpan" typeface="游ゴシック Light"/>
         <a:font script="Hang" typeface="맑은 고딕"/>
-        <a:font script="Hans" typeface="宋体"/>
+        <a:font script="Hans" typeface="等线 Light"/>
         <a:font script="Hant" typeface="新細明體"/>
         <a:font script="Arab" typeface="Times New Roman"/>
         <a:font script="Hebr" typeface="Times New Roman"/>
@@ -18225,14 +17439,31 @@
         <a:font script="Viet" typeface="Times New Roman"/>
         <a:font script="Uigh" typeface="Microsoft Uighur"/>
         <a:font script="Geor" typeface="Sylfaen"/>
+        <a:font script="Armn" typeface="Arial"/>
+        <a:font script="Bugi" typeface="Leelawadee UI"/>
+        <a:font script="Bopo" typeface="Microsoft JhengHei"/>
+        <a:font script="Java" typeface="Javanese Text"/>
+        <a:font script="Lisu" typeface="Segoe UI"/>
+        <a:font script="Mymr" typeface="Myanmar Text"/>
+        <a:font script="Nkoo" typeface="Ebrima"/>
+        <a:font script="Olck" typeface="Nirmala UI"/>
+        <a:font script="Osma" typeface="Ebrima"/>
+        <a:font script="Phag" typeface="Phagspa"/>
+        <a:font script="Syrn" typeface="Estrangelo Edessa"/>
+        <a:font script="Syrj" typeface="Estrangelo Edessa"/>
+        <a:font script="Syre" typeface="Estrangelo Edessa"/>
+        <a:font script="Sora" typeface="Nirmala UI"/>
+        <a:font script="Tale" typeface="Microsoft Tai Le"/>
+        <a:font script="Talu" typeface="Microsoft New Tai Lue"/>
+        <a:font script="Tfng" typeface="Ebrima"/>
       </a:majorFont>
       <a:minorFont>
-        <a:latin typeface="Calibri"/>
+        <a:latin typeface="Calibri" panose="020F0502020204030204"/>
         <a:ea typeface=""/>
         <a:cs typeface=""/>
-        <a:font script="Jpan" typeface="ＭＳ Ｐゴシック"/>
+        <a:font script="Jpan" typeface="游ゴシック"/>
         <a:font script="Hang" typeface="맑은 고딕"/>
-        <a:font script="Hans" typeface="宋体"/>
+        <a:font script="Hans" typeface="等线"/>
         <a:font script="Hant" typeface="新細明體"/>
         <a:font script="Arab" typeface="Arial"/>
         <a:font script="Hebr" typeface="Arial"/>
@@ -18260,6 +17491,23 @@
         <a:font script="Viet" typeface="Arial"/>
         <a:font script="Uigh" typeface="Microsoft Uighur"/>
         <a:font script="Geor" typeface="Sylfaen"/>
+        <a:font script="Armn" typeface="Arial"/>
+        <a:font script="Bugi" typeface="Leelawadee UI"/>
+        <a:font script="Bopo" typeface="Microsoft JhengHei"/>
+        <a:font script="Java" typeface="Javanese Text"/>
+        <a:font script="Lisu" typeface="Segoe UI"/>
+        <a:font script="Mymr" typeface="Myanmar Text"/>
+        <a:font script="Nkoo" typeface="Ebrima"/>
+        <a:font script="Olck" typeface="Nirmala UI"/>
+        <a:font script="Osma" typeface="Ebrima"/>
+        <a:font script="Phag" typeface="Phagspa"/>
+        <a:font script="Syrn" typeface="Estrangelo Edessa"/>
+        <a:font script="Syrj" typeface="Estrangelo Edessa"/>
+        <a:font script="Syre" typeface="Estrangelo Edessa"/>
+        <a:font script="Sora" typeface="Nirmala UI"/>
+        <a:font script="Tale" typeface="Microsoft Tai Le"/>
+        <a:font script="Talu" typeface="Microsoft New Tai Lue"/>
+        <a:font script="Tfng" typeface="Ebrima"/>
       </a:minorFont>
     </a:fontScheme>
     <a:fmtScheme name="Office">
@@ -18271,200 +17519,141 @@
           <a:gsLst>
             <a:gs pos="0">
               <a:schemeClr val="phClr">
-                <a:tint val="50000"/>
-                <a:satMod val="300000"/>
+                <a:lumMod val="110000"/>
+                <a:satMod val="105000"/>
+                <a:tint val="67000"/>
               </a:schemeClr>
             </a:gs>
-            <a:gs pos="35000">
+            <a:gs pos="50000">
               <a:schemeClr val="phClr">
-                <a:tint val="37000"/>
-                <a:satMod val="300000"/>
+                <a:lumMod val="105000"/>
+                <a:satMod val="103000"/>
+                <a:tint val="73000"/>
               </a:schemeClr>
             </a:gs>
             <a:gs pos="100000">
               <a:schemeClr val="phClr">
-                <a:tint val="15000"/>
-                <a:satMod val="350000"/>
+                <a:lumMod val="105000"/>
+                <a:satMod val="109000"/>
+                <a:tint val="81000"/>
               </a:schemeClr>
             </a:gs>
           </a:gsLst>
-          <a:lin ang="16200000" scaled="1"/>
+          <a:lin ang="5400000" scaled="0"/>
         </a:gradFill>
         <a:gradFill rotWithShape="1">
           <a:gsLst>
             <a:gs pos="0">
               <a:schemeClr val="phClr">
-                <a:tint val="100000"/>
+                <a:satMod val="103000"/>
+                <a:lumMod val="102000"/>
+                <a:tint val="94000"/>
+              </a:schemeClr>
+            </a:gs>
+            <a:gs pos="50000">
+              <a:schemeClr val="phClr">
+                <a:satMod val="110000"/>
+                <a:lumMod val="100000"/>
                 <a:shade val="100000"/>
-                <a:satMod val="130000"/>
               </a:schemeClr>
             </a:gs>
             <a:gs pos="100000">
               <a:schemeClr val="phClr">
-                <a:tint val="50000"/>
-                <a:shade val="100000"/>
-                <a:satMod val="350000"/>
+                <a:lumMod val="99000"/>
+                <a:satMod val="120000"/>
+                <a:shade val="78000"/>
               </a:schemeClr>
             </a:gs>
           </a:gsLst>
-          <a:lin ang="16200000" scaled="0"/>
+          <a:lin ang="5400000" scaled="0"/>
         </a:gradFill>
       </a:fillStyleLst>
       <a:lnStyleLst>
-        <a:ln w="9525" cap="flat" cmpd="sng" algn="ctr">
-          <a:solidFill>
-            <a:schemeClr val="phClr">
-              <a:shade val="95000"/>
-              <a:satMod val="105000"/>
-            </a:schemeClr>
-          </a:solidFill>
-          <a:prstDash val="solid"/>
-        </a:ln>
-        <a:ln w="25400" cap="flat" cmpd="sng" algn="ctr">
+        <a:ln w="6350" cap="flat" cmpd="sng" algn="ctr">
           <a:solidFill>
             <a:schemeClr val="phClr"/>
           </a:solidFill>
           <a:prstDash val="solid"/>
+          <a:miter lim="800000"/>
         </a:ln>
-        <a:ln w="38100" cap="flat" cmpd="sng" algn="ctr">
+        <a:ln w="12700" cap="flat" cmpd="sng" algn="ctr">
           <a:solidFill>
             <a:schemeClr val="phClr"/>
           </a:solidFill>
           <a:prstDash val="solid"/>
+          <a:miter lim="800000"/>
+        </a:ln>
+        <a:ln w="19050" cap="flat" cmpd="sng" algn="ctr">
+          <a:solidFill>
+            <a:schemeClr val="phClr"/>
+          </a:solidFill>
+          <a:prstDash val="solid"/>
+          <a:miter lim="800000"/>
         </a:ln>
       </a:lnStyleLst>
       <a:effectStyleLst>
         <a:effectStyle>
+          <a:effectLst/>
+        </a:effectStyle>
+        <a:effectStyle>
+          <a:effectLst/>
+        </a:effectStyle>
+        <a:effectStyle>
           <a:effectLst>
-            <a:outerShdw blurRad="40000" dist="20000" dir="5400000" rotWithShape="0">
+            <a:outerShdw blurRad="57150" dist="19050" dir="5400000" algn="ctr" rotWithShape="0">
               <a:srgbClr val="000000">
-                <a:alpha val="38000"/>
+                <a:alpha val="63000"/>
               </a:srgbClr>
             </a:outerShdw>
           </a:effectLst>
-        </a:effectStyle>
-        <a:effectStyle>
-          <a:effectLst>
-            <a:outerShdw blurRad="40000" dist="23000" dir="5400000" rotWithShape="0">
-              <a:srgbClr val="000000">
-                <a:alpha val="35000"/>
-              </a:srgbClr>
-            </a:outerShdw>
-          </a:effectLst>
-        </a:effectStyle>
-        <a:effectStyle>
-          <a:effectLst>
-            <a:outerShdw blurRad="40000" dist="23000" dir="5400000" rotWithShape="0">
-              <a:srgbClr val="000000">
-                <a:alpha val="35000"/>
-              </a:srgbClr>
-            </a:outerShdw>
-          </a:effectLst>
-          <a:scene3d>
-            <a:camera prst="orthographicFront">
-              <a:rot lat="0" lon="0" rev="0"/>
-            </a:camera>
-            <a:lightRig rig="threePt" dir="t">
-              <a:rot lat="0" lon="0" rev="1200000"/>
-            </a:lightRig>
-          </a:scene3d>
-          <a:sp3d>
-            <a:bevelT w="63500" h="25400"/>
-          </a:sp3d>
         </a:effectStyle>
       </a:effectStyleLst>
       <a:bgFillStyleLst>
         <a:solidFill>
           <a:schemeClr val="phClr"/>
         </a:solidFill>
+        <a:solidFill>
+          <a:schemeClr val="phClr">
+            <a:tint val="95000"/>
+            <a:satMod val="170000"/>
+          </a:schemeClr>
+        </a:solidFill>
         <a:gradFill rotWithShape="1">
           <a:gsLst>
             <a:gs pos="0">
               <a:schemeClr val="phClr">
-                <a:tint val="40000"/>
-                <a:satMod val="350000"/>
+                <a:tint val="93000"/>
+                <a:satMod val="150000"/>
+                <a:shade val="98000"/>
+                <a:lumMod val="102000"/>
               </a:schemeClr>
             </a:gs>
-            <a:gs pos="40000">
+            <a:gs pos="50000">
               <a:schemeClr val="phClr">
-                <a:tint val="45000"/>
-                <a:shade val="99000"/>
-                <a:satMod val="350000"/>
+                <a:tint val="98000"/>
+                <a:satMod val="130000"/>
+                <a:shade val="90000"/>
+                <a:lumMod val="103000"/>
               </a:schemeClr>
             </a:gs>
             <a:gs pos="100000">
               <a:schemeClr val="phClr">
-                <a:shade val="20000"/>
-                <a:satMod val="255000"/>
+                <a:shade val="63000"/>
+                <a:satMod val="120000"/>
               </a:schemeClr>
             </a:gs>
           </a:gsLst>
-          <a:path path="circle">
-            <a:fillToRect l="50000" t="-80000" r="50000" b="180000"/>
-          </a:path>
-        </a:gradFill>
-        <a:gradFill rotWithShape="1">
-          <a:gsLst>
-            <a:gs pos="0">
-              <a:schemeClr val="phClr">
-                <a:tint val="80000"/>
-                <a:satMod val="300000"/>
-              </a:schemeClr>
-            </a:gs>
-            <a:gs pos="100000">
-              <a:schemeClr val="phClr">
-                <a:shade val="30000"/>
-                <a:satMod val="200000"/>
-              </a:schemeClr>
-            </a:gs>
-          </a:gsLst>
-          <a:path path="circle">
-            <a:fillToRect l="50000" t="50000" r="50000" b="50000"/>
-          </a:path>
+          <a:lin ang="5400000" scaled="0"/>
         </a:gradFill>
       </a:bgFillStyleLst>
     </a:fmtScheme>
   </a:themeElements>
-  <a:objectDefaults>
-    <a:spDef>
-      <a:spPr/>
-      <a:bodyPr/>
-      <a:lstStyle/>
-      <a:style>
-        <a:lnRef idx="1">
-          <a:schemeClr val="accent1"/>
-        </a:lnRef>
-        <a:fillRef idx="3">
-          <a:schemeClr val="accent1"/>
-        </a:fillRef>
-        <a:effectRef idx="2">
-          <a:schemeClr val="accent1"/>
-        </a:effectRef>
-        <a:fontRef idx="minor">
-          <a:schemeClr val="lt1"/>
-        </a:fontRef>
-      </a:style>
-    </a:spDef>
-    <a:lnDef>
-      <a:spPr/>
-      <a:bodyPr/>
-      <a:lstStyle/>
-      <a:style>
-        <a:lnRef idx="2">
-          <a:schemeClr val="accent1"/>
-        </a:lnRef>
-        <a:fillRef idx="0">
-          <a:schemeClr val="accent1"/>
-        </a:fillRef>
-        <a:effectRef idx="1">
-          <a:schemeClr val="accent1"/>
-        </a:effectRef>
-        <a:fontRef idx="minor">
-          <a:schemeClr val="tx1"/>
-        </a:fontRef>
-      </a:style>
-    </a:lnDef>
-  </a:objectDefaults>
+  <a:objectDefaults/>
   <a:extraClrSchemeLst/>
+  <a:extLst>
+    <a:ext uri="{05A4C25C-085E-4340-85A3-A5531E510DB2}">
+      <thm15:themeFamily xmlns:thm15="http://schemas.microsoft.com/office/thememl/2012/main" name="Office Theme" id="{62F939B6-93AF-4DB8-9C6B-D6C7DFDC589F}" vid="{4A3C46E8-61CC-4603-A589-7422A47A8E4A}"/>
+    </a:ext>
+  </a:extLst>
 </a:theme>
 </file>
--- a/trabajo-practico/protocolo/Protocolo_Experimentacion_Por_Nivel.pptx
+++ b/trabajo-practico/protocolo/Protocolo_Experimentacion_Por_Nivel.pptx
@@ -1210,7 +1210,7 @@
           <a:p>
             <a:fld id="{5BCAD085-E8A6-8845-BD4E-CB4CCA059FC4}" type="datetimeFigureOut">
               <a:rPr lang="en-US" smtClean="0"/>
-              <a:t>10/26/2026</a:t>
+              <a:t>10/27/2026</a:t>
             </a:fld>
             <a:endParaRPr lang="en-US"/>
           </a:p>
@@ -1378,7 +1378,7 @@
           <a:p>
             <a:fld id="{5BCAD085-E8A6-8845-BD4E-CB4CCA059FC4}" type="datetimeFigureOut">
               <a:rPr lang="en-US" smtClean="0"/>
-              <a:t>10/26/2026</a:t>
+              <a:t>10/27/2026</a:t>
             </a:fld>
             <a:endParaRPr lang="en-US"/>
           </a:p>
@@ -1556,7 +1556,7 @@
           <a:p>
             <a:fld id="{5BCAD085-E8A6-8845-BD4E-CB4CCA059FC4}" type="datetimeFigureOut">
               <a:rPr lang="en-US" smtClean="0"/>
-              <a:t>10/26/2026</a:t>
+              <a:t>10/27/2026</a:t>
             </a:fld>
             <a:endParaRPr lang="en-US"/>
           </a:p>
@@ -1724,7 +1724,7 @@
           <a:p>
             <a:fld id="{5BCAD085-E8A6-8845-BD4E-CB4CCA059FC4}" type="datetimeFigureOut">
               <a:rPr lang="en-US" smtClean="0"/>
-              <a:t>10/26/2026</a:t>
+              <a:t>10/27/2026</a:t>
             </a:fld>
             <a:endParaRPr lang="en-US"/>
           </a:p>
@@ -1969,7 +1969,7 @@
           <a:p>
             <a:fld id="{5BCAD085-E8A6-8845-BD4E-CB4CCA059FC4}" type="datetimeFigureOut">
               <a:rPr lang="en-US" smtClean="0"/>
-              <a:t>10/26/2026</a:t>
+              <a:t>10/27/2026</a:t>
             </a:fld>
             <a:endParaRPr lang="en-US"/>
           </a:p>
@@ -2254,7 +2254,7 @@
           <a:p>
             <a:fld id="{5BCAD085-E8A6-8845-BD4E-CB4CCA059FC4}" type="datetimeFigureOut">
               <a:rPr lang="en-US" smtClean="0"/>
-              <a:t>10/26/2026</a:t>
+              <a:t>10/27/2026</a:t>
             </a:fld>
             <a:endParaRPr lang="en-US"/>
           </a:p>
@@ -2673,7 +2673,7 @@
           <a:p>
             <a:fld id="{5BCAD085-E8A6-8845-BD4E-CB4CCA059FC4}" type="datetimeFigureOut">
               <a:rPr lang="en-US" smtClean="0"/>
-              <a:t>10/26/2026</a:t>
+              <a:t>10/27/2026</a:t>
             </a:fld>
             <a:endParaRPr lang="en-US"/>
           </a:p>
@@ -2790,7 +2790,7 @@
           <a:p>
             <a:fld id="{5BCAD085-E8A6-8845-BD4E-CB4CCA059FC4}" type="datetimeFigureOut">
               <a:rPr lang="en-US" smtClean="0"/>
-              <a:t>10/26/2026</a:t>
+              <a:t>10/27/2026</a:t>
             </a:fld>
             <a:endParaRPr lang="en-US"/>
           </a:p>
@@ -2885,7 +2885,7 @@
           <a:p>
             <a:fld id="{5BCAD085-E8A6-8845-BD4E-CB4CCA059FC4}" type="datetimeFigureOut">
               <a:rPr lang="en-US" smtClean="0"/>
-              <a:t>10/26/2026</a:t>
+              <a:t>10/27/2026</a:t>
             </a:fld>
             <a:endParaRPr lang="en-US"/>
           </a:p>
@@ -3160,7 +3160,7 @@
           <a:p>
             <a:fld id="{5BCAD085-E8A6-8845-BD4E-CB4CCA059FC4}" type="datetimeFigureOut">
               <a:rPr lang="en-US" smtClean="0"/>
-              <a:t>10/26/2026</a:t>
+              <a:t>10/27/2026</a:t>
             </a:fld>
             <a:endParaRPr lang="en-US"/>
           </a:p>
@@ -3412,7 +3412,7 @@
           <a:p>
             <a:fld id="{5BCAD085-E8A6-8845-BD4E-CB4CCA059FC4}" type="datetimeFigureOut">
               <a:rPr lang="en-US" smtClean="0"/>
-              <a:t>10/26/2026</a:t>
+              <a:t>10/27/2026</a:t>
             </a:fld>
             <a:endParaRPr lang="en-US"/>
           </a:p>
@@ -3623,7 +3623,7 @@
           <a:p>
             <a:fld id="{5BCAD085-E8A6-8845-BD4E-CB4CCA059FC4}" type="datetimeFigureOut">
               <a:rPr lang="en-US" smtClean="0"/>
-              <a:t>10/26/2026</a:t>
+              <a:t>10/27/2026</a:t>
             </a:fld>
             <a:endParaRPr lang="en-US"/>
           </a:p>
@@ -7948,8 +7948,8 @@
         </p:nvSpPr>
         <p:spPr>
           <a:xfrm>
-            <a:off x="6492240" y="2514600"/>
-            <a:ext cx="4965192" cy="822960"/>
+            <a:off x="6492240" y="2592655"/>
+            <a:ext cx="4965192" cy="666849"/>
           </a:xfrm>
           <a:prstGeom prst="rect">
             <a:avLst/>
@@ -7968,14 +7968,29 @@
               </a:spcAft>
             </a:pPr>
             <a:r>
-              <a:rPr sz="2000" b="0" i="0">
+              <a:rPr sz="2000" b="0" i="0" dirty="0">
                 <a:solidFill>
                   <a:srgbClr val="0E1726"/>
                 </a:solidFill>
                 <a:latin typeface="Cambria Math"/>
               </a:rPr>
-              <a:t>Caso 2 · t de una muestra</a:t>
-            </a:r>
+              <a:t>Caso 2 · t de una </a:t>
+            </a:r>
+            <a:r>
+              <a:rPr sz="2000" b="0" i="0" dirty="0" err="1">
+                <a:solidFill>
+                  <a:srgbClr val="0E1726"/>
+                </a:solidFill>
+                <a:latin typeface="Cambria Math"/>
+              </a:rPr>
+              <a:t>muestra</a:t>
+            </a:r>
+            <a:endParaRPr sz="2000" b="0" i="0" dirty="0">
+              <a:solidFill>
+                <a:srgbClr val="0E1726"/>
+              </a:solidFill>
+              <a:latin typeface="Cambria Math"/>
+            </a:endParaRPr>
           </a:p>
           <a:p>
             <a:pPr algn="ctr">
@@ -7984,25 +7999,34 @@
               </a:spcAft>
             </a:pPr>
             <a:r>
-              <a:rPr sz="2000" b="0" i="0">
+              <a:rPr sz="2000" b="0" i="0" dirty="0">
                 <a:solidFill>
                   <a:srgbClr val="0E1726"/>
                 </a:solidFill>
                 <a:latin typeface="Cambria Math"/>
               </a:rPr>
-              <a:t>t₀ = (ȳ</a:t>
-            </a:r>
-            <a:r>
-              <a:rPr sz="2000" b="0" i="0" baseline="-25000">
+              <a:t>t₀ = (</a:t>
+            </a:r>
+            <a:r>
+              <a:rPr sz="2000" b="0" i="0" dirty="0" err="1">
                 <a:solidFill>
                   <a:srgbClr val="0E1726"/>
                 </a:solidFill>
                 <a:latin typeface="Cambria Math"/>
               </a:rPr>
+              <a:t>ȳ</a:t>
+            </a:r>
+            <a:r>
+              <a:rPr sz="2000" b="0" i="0" baseline="-25000" dirty="0" err="1">
+                <a:solidFill>
+                  <a:srgbClr val="0E1726"/>
+                </a:solidFill>
+                <a:latin typeface="Cambria Math"/>
+              </a:rPr>
               <a:t>k</a:t>
             </a:r>
             <a:r>
-              <a:rPr sz="2000" b="0" i="0">
+              <a:rPr sz="2000" b="0" i="0" dirty="0">
                 <a:solidFill>
                   <a:srgbClr val="0E1726"/>
                 </a:solidFill>
@@ -8011,7 +8035,7 @@
               <a:t> − τ</a:t>
             </a:r>
             <a:r>
-              <a:rPr sz="2000" b="0" i="0" baseline="-25000">
+              <a:rPr sz="2000" b="0" i="0" baseline="-25000" dirty="0">
                 <a:solidFill>
                   <a:srgbClr val="0E1726"/>
                 </a:solidFill>
@@ -8020,41 +8044,47 @@
               <a:t>0,k</a:t>
             </a:r>
             <a:r>
-              <a:rPr sz="2000" b="0" i="0">
+              <a:rPr sz="2000" b="0" i="0" dirty="0">
                 <a:solidFill>
                   <a:srgbClr val="0E1726"/>
                 </a:solidFill>
                 <a:latin typeface="Cambria Math"/>
               </a:rPr>
-              <a:t>) / (S</a:t>
-            </a:r>
-            <a:r>
-              <a:rPr sz="2000" b="0" i="0" baseline="-25000">
+              <a:t>) / (</a:t>
+            </a:r>
+            <a:r>
+              <a:rPr sz="2000" b="0" i="0" dirty="0" err="1">
                 <a:solidFill>
                   <a:srgbClr val="0E1726"/>
                 </a:solidFill>
                 <a:latin typeface="Cambria Math"/>
               </a:rPr>
+              <a:t>S</a:t>
+            </a:r>
+            <a:r>
+              <a:rPr sz="2000" b="0" i="0" baseline="-25000" dirty="0" err="1">
+                <a:solidFill>
+                  <a:srgbClr val="0E1726"/>
+                </a:solidFill>
+                <a:latin typeface="Cambria Math"/>
+              </a:rPr>
               <a:t>k</a:t>
             </a:r>
             <a:r>
-              <a:rPr sz="2000" b="0" i="0">
+              <a:rPr sz="2000" b="0" i="0" dirty="0">
                 <a:solidFill>
                   <a:srgbClr val="0E1726"/>
                 </a:solidFill>
                 <a:latin typeface="Cambria Math"/>
               </a:rPr>
-              <a:t>/√n) · t</a:t>
-            </a:r>
-            <a:r>
-              <a:rPr sz="2000" b="0" i="0" baseline="-25000">
-                <a:solidFill>
-                  <a:srgbClr val="0E1726"/>
-                </a:solidFill>
-                <a:latin typeface="Cambria Math"/>
-              </a:rPr>
-              <a:t>n−1</a:t>
-            </a:r>
+              <a:t>/√n) </a:t>
+            </a:r>
+            <a:endParaRPr sz="2000" b="0" i="0" baseline="-25000" dirty="0">
+              <a:solidFill>
+                <a:srgbClr val="0E1726"/>
+              </a:solidFill>
+              <a:latin typeface="Cambria Math"/>
+            </a:endParaRPr>
           </a:p>
         </p:txBody>
       </p:sp>
